--- a/src/module04/content/Controle-de-Fluxo-em-Java.pptx
+++ b/src/module04/content/Controle-de-Fluxo-em-Java.pptx
@@ -4,6 +4,9 @@
   <p:sldMasterIdLst>
     <p:sldMasterId id="2147483648" r:id="rId1"/>
   </p:sldMasterIdLst>
+  <p:notesMasterIdLst>
+    <p:notesMasterId r:id="rId45"/>
+  </p:notesMasterIdLst>
   <p:sldIdLst>
     <p:sldId id="256" r:id="rId2"/>
     <p:sldId id="257" r:id="rId3"/>
@@ -49,10 +52,7 @@
     <p:sldId id="297" r:id="rId43"/>
     <p:sldId id="298" r:id="rId44"/>
   </p:sldIdLst>
-  <p:notesMasterIdLst>
-    <p:notesMasterId r:id="rId45"/>
-  </p:notesMasterIdLst>
-  <p:sldSz cx="9144000" cy="5143500"/>
+  <p:sldSz cx="9144000" cy="5143500" type="screen16x9"/>
   <p:notesSz cx="5143500" cy="9144000"/>
   <p:defaultTextStyle>
     <a:lvl1pPr marL="0" algn="l" defTabSz="914400" rtl="0" eaLnBrk="1" latinLnBrk="0" hangingPunct="1">
@@ -146,6 +146,11 @@
       </a:defRPr>
     </a:lvl9pPr>
   </p:defaultTextStyle>
+  <p:extLst>
+    <p:ext uri="{EFAFB233-063F-42B5-8137-9DF3F51BA10A}">
+      <p15:sldGuideLst xmlns:p15="http://schemas.microsoft.com/office/powerpoint/2012/main"/>
+    </p:ext>
+  </p:extLst>
 </p:presentation>
 </file>
 
@@ -171,234 +176,10 @@
           <a:chExt cx="0" cy="0"/>
         </a:xfrm>
       </p:grpSpPr>
-      <p:sp>
-        <p:nvSpPr>
-          <p:cNvPr id="2" name="Header Placeholder 1"/>
-          <p:cNvSpPr>
-            <a:spLocks noGrp="1"/>
-          </p:cNvSpPr>
-          <p:nvPr>
-            <p:ph type="hdr" sz="quarter"/>
-          </p:nvPr>
-        </p:nvSpPr>
-        <p:spPr>
-          <a:xfrm>
-            <a:off x="0" y="0"/>
-            <a:ext cx="2971800" cy="458788"/>
-          </a:xfrm>
-          <a:prstGeom prst="rect">
-            <a:avLst/>
-          </a:prstGeom>
-        </p:spPr>
-        <p:txBody>
-          <a:bodyPr vert="horz" lIns="91440" tIns="45720" rIns="91440" bIns="45720" rtlCol="0"/>
-          <a:lstStyle>
-            <a:lvl1pPr algn="l">
-              <a:defRPr sz="1200"/>
-            </a:lvl1pPr>
-          </a:lstStyle>
-          <a:p>
-            <a:endParaRPr lang="en-US"/>
-          </a:p>
-        </p:txBody>
-      </p:sp>
-      <p:sp>
-        <p:nvSpPr>
-          <p:cNvPr id="3" name="Date Placeholder 2"/>
-          <p:cNvSpPr>
-            <a:spLocks noGrp="1"/>
-          </p:cNvSpPr>
-          <p:nvPr>
-            <p:ph type="dt" idx="1"/>
-          </p:nvPr>
-        </p:nvSpPr>
-        <p:spPr>
-          <a:xfrm>
-            <a:off x="3884613" y="0"/>
-            <a:ext cx="2971800" cy="458788"/>
-          </a:xfrm>
-          <a:prstGeom prst="rect">
-            <a:avLst/>
-          </a:prstGeom>
-        </p:spPr>
-        <p:txBody>
-          <a:bodyPr vert="horz" lIns="91440" tIns="45720" rIns="91440" bIns="45720" rtlCol="0"/>
-          <a:lstStyle>
-            <a:lvl1pPr algn="r">
-              <a:defRPr sz="1200"/>
-            </a:lvl1pPr>
-          </a:lstStyle>
-          <a:p>
-            <a:fld id="{5282F153-3F37-0F45-9E97-73ACFA13230C}" type="datetimeFigureOut">
-              <a:rPr lang="en-US"/>
-              <a:t>7/23/19</a:t>
-            </a:fld>
-            <a:endParaRPr lang="en-US"/>
-          </a:p>
-        </p:txBody>
-      </p:sp>
-      <p:sp>
-        <p:nvSpPr>
-          <p:cNvPr id="4" name="Slide Image Placeholder 3"/>
-          <p:cNvSpPr>
-            <a:spLocks noGrp="1" noRot="1" noChangeAspect="1"/>
-          </p:cNvSpPr>
-          <p:nvPr>
-            <p:ph type="sldImg" idx="2"/>
-          </p:nvPr>
-        </p:nvSpPr>
-        <p:spPr>
-          <a:xfrm>
-            <a:off x="685800" y="1143000"/>
-            <a:ext cx="5486400" cy="3086100"/>
-          </a:xfrm>
-          <a:prstGeom prst="rect">
-            <a:avLst/>
-          </a:prstGeom>
-          <a:noFill/>
-          <a:ln w="12700">
-            <a:solidFill>
-              <a:prstClr val="black"/>
-            </a:solidFill>
-          </a:ln>
-        </p:spPr>
-        <p:txBody>
-          <a:bodyPr vert="horz" lIns="91440" tIns="45720" rIns="91440" bIns="45720" rtlCol="0" anchor="ctr"/>
-          <a:lstStyle/>
-          <a:p>
-            <a:endParaRPr lang="en-US"/>
-          </a:p>
-        </p:txBody>
-      </p:sp>
-      <p:sp>
-        <p:nvSpPr>
-          <p:cNvPr id="5" name="Notes Placeholder 4"/>
-          <p:cNvSpPr>
-            <a:spLocks noGrp="1"/>
-          </p:cNvSpPr>
-          <p:nvPr>
-            <p:ph type="body" sz="quarter" idx="3"/>
-          </p:nvPr>
-        </p:nvSpPr>
-        <p:spPr>
-          <a:xfrm>
-            <a:off x="685800" y="4400550"/>
-            <a:ext cx="5486400" cy="3600450"/>
-          </a:xfrm>
-          <a:prstGeom prst="rect">
-            <a:avLst/>
-          </a:prstGeom>
-        </p:spPr>
-        <p:txBody>
-          <a:bodyPr vert="horz" lIns="91440" tIns="45720" rIns="91440" bIns="45720" rtlCol="0"/>
-          <a:lstStyle/>
-          <a:p>
-            <a:pPr lvl="0"/>
-            <a:r>
-              <a:rPr lang="en-US"/>
-              <a:t>Click to edit Master text styles</a:t>
-            </a:r>
-          </a:p>
-          <a:p>
-            <a:pPr lvl="1"/>
-            <a:r>
-              <a:rPr lang="en-US"/>
-              <a:t>Second level</a:t>
-            </a:r>
-          </a:p>
-          <a:p>
-            <a:pPr lvl="2"/>
-            <a:r>
-              <a:rPr lang="en-US"/>
-              <a:t>Third level</a:t>
-            </a:r>
-          </a:p>
-          <a:p>
-            <a:pPr lvl="3"/>
-            <a:r>
-              <a:rPr lang="en-US"/>
-              <a:t>Fourth level</a:t>
-            </a:r>
-          </a:p>
-          <a:p>
-            <a:pPr lvl="4"/>
-            <a:r>
-              <a:rPr lang="en-US"/>
-              <a:t>Fifth level</a:t>
-            </a:r>
-          </a:p>
-        </p:txBody>
-      </p:sp>
-      <p:sp>
-        <p:nvSpPr>
-          <p:cNvPr id="6" name="Footer Placeholder 5"/>
-          <p:cNvSpPr>
-            <a:spLocks noGrp="1"/>
-          </p:cNvSpPr>
-          <p:nvPr>
-            <p:ph type="ftr" sz="quarter" idx="4"/>
-          </p:nvPr>
-        </p:nvSpPr>
-        <p:spPr>
-          <a:xfrm>
-            <a:off x="0" y="8685213"/>
-            <a:ext cx="2971800" cy="458787"/>
-          </a:xfrm>
-          <a:prstGeom prst="rect">
-            <a:avLst/>
-          </a:prstGeom>
-        </p:spPr>
-        <p:txBody>
-          <a:bodyPr vert="horz" lIns="91440" tIns="45720" rIns="91440" bIns="45720" rtlCol="0" anchor="b"/>
-          <a:lstStyle>
-            <a:lvl1pPr algn="l">
-              <a:defRPr sz="1200"/>
-            </a:lvl1pPr>
-          </a:lstStyle>
-          <a:p>
-            <a:endParaRPr lang="en-US"/>
-          </a:p>
-        </p:txBody>
-      </p:sp>
-      <p:sp>
-        <p:nvSpPr>
-          <p:cNvPr id="7" name="Slide Number Placeholder 6"/>
-          <p:cNvSpPr>
-            <a:spLocks noGrp="1"/>
-          </p:cNvSpPr>
-          <p:nvPr>
-            <p:ph type="sldNum" sz="quarter" idx="5"/>
-          </p:nvPr>
-        </p:nvSpPr>
-        <p:spPr>
-          <a:xfrm>
-            <a:off x="3884613" y="8685213"/>
-            <a:ext cx="2971800" cy="458787"/>
-          </a:xfrm>
-          <a:prstGeom prst="rect">
-            <a:avLst/>
-          </a:prstGeom>
-        </p:spPr>
-        <p:txBody>
-          <a:bodyPr vert="horz" lIns="91440" tIns="45720" rIns="91440" bIns="45720" rtlCol="0" anchor="b"/>
-          <a:lstStyle>
-            <a:lvl1pPr algn="r">
-              <a:defRPr sz="1200"/>
-            </a:lvl1pPr>
-          </a:lstStyle>
-          <a:p>
-            <a:fld id="{CE5E9CC1-C706-0F49-92D6-E571CC5EEA8F}" type="slidenum">
-              <a:rPr lang="en-US"/>
-              <a:t>‹#›</a:t>
-            </a:fld>
-            <a:endParaRPr lang="en-US"/>
-          </a:p>
-        </p:txBody>
-      </p:sp>
     </p:spTree>
     <p:extLst>
       <p:ext uri="{BB962C8B-B14F-4D97-AF65-F5344CB8AC3E}">
-        <p14:creationId xmlns:p14="http://schemas.microsoft.com/office/powerpoint/2010/main" val="1024086991"/>
+        <p14:creationId xmlns:p14="http://schemas.microsoft.com/office/powerpoint/2010/main" val="3909106056"/>
       </p:ext>
     </p:extLst>
   </p:cSld>
@@ -542,10 +323,6 @@
           <a:bodyPr/>
           <a:lstStyle/>
           <a:p>
-            <a:r>
-              <a:rPr lang="en-US" dirty="0"/>
-              <a:t/>
-            </a:r>
             <a:endParaRPr lang="en-US" dirty="0"/>
           </a:p>
         </p:txBody>
@@ -630,10 +407,6 @@
           <a:bodyPr/>
           <a:lstStyle/>
           <a:p>
-            <a:r>
-              <a:rPr lang="en-US" dirty="0"/>
-              <a:t/>
-            </a:r>
             <a:endParaRPr lang="en-US" dirty="0"/>
           </a:p>
         </p:txBody>
@@ -718,10 +491,6 @@
           <a:bodyPr/>
           <a:lstStyle/>
           <a:p>
-            <a:r>
-              <a:rPr lang="en-US" dirty="0"/>
-              <a:t/>
-            </a:r>
             <a:endParaRPr lang="en-US" dirty="0"/>
           </a:p>
         </p:txBody>
@@ -806,10 +575,6 @@
           <a:bodyPr/>
           <a:lstStyle/>
           <a:p>
-            <a:r>
-              <a:rPr lang="en-US" dirty="0"/>
-              <a:t/>
-            </a:r>
             <a:endParaRPr lang="en-US" dirty="0"/>
           </a:p>
         </p:txBody>
@@ -894,10 +659,6 @@
           <a:bodyPr/>
           <a:lstStyle/>
           <a:p>
-            <a:r>
-              <a:rPr lang="en-US" dirty="0"/>
-              <a:t/>
-            </a:r>
             <a:endParaRPr lang="en-US" dirty="0"/>
           </a:p>
         </p:txBody>
@@ -982,10 +743,6 @@
           <a:bodyPr/>
           <a:lstStyle/>
           <a:p>
-            <a:r>
-              <a:rPr lang="en-US" dirty="0"/>
-              <a:t/>
-            </a:r>
             <a:endParaRPr lang="en-US" dirty="0"/>
           </a:p>
         </p:txBody>
@@ -1070,10 +827,6 @@
           <a:bodyPr/>
           <a:lstStyle/>
           <a:p>
-            <a:r>
-              <a:rPr lang="en-US" dirty="0"/>
-              <a:t/>
-            </a:r>
             <a:endParaRPr lang="en-US" dirty="0"/>
           </a:p>
         </p:txBody>
@@ -1158,10 +911,6 @@
           <a:bodyPr/>
           <a:lstStyle/>
           <a:p>
-            <a:r>
-              <a:rPr lang="en-US" dirty="0"/>
-              <a:t/>
-            </a:r>
             <a:endParaRPr lang="en-US" dirty="0"/>
           </a:p>
         </p:txBody>
@@ -1246,10 +995,6 @@
           <a:bodyPr/>
           <a:lstStyle/>
           <a:p>
-            <a:r>
-              <a:rPr lang="en-US" dirty="0"/>
-              <a:t/>
-            </a:r>
             <a:endParaRPr lang="en-US" dirty="0"/>
           </a:p>
         </p:txBody>
@@ -1334,10 +1079,6 @@
           <a:bodyPr/>
           <a:lstStyle/>
           <a:p>
-            <a:r>
-              <a:rPr lang="en-US" dirty="0"/>
-              <a:t/>
-            </a:r>
             <a:endParaRPr lang="en-US" dirty="0"/>
           </a:p>
         </p:txBody>
@@ -1422,10 +1163,6 @@
           <a:bodyPr/>
           <a:lstStyle/>
           <a:p>
-            <a:r>
-              <a:rPr lang="en-US" dirty="0"/>
-              <a:t/>
-            </a:r>
             <a:endParaRPr lang="en-US" dirty="0"/>
           </a:p>
         </p:txBody>
@@ -1510,10 +1247,6 @@
           <a:bodyPr/>
           <a:lstStyle/>
           <a:p>
-            <a:r>
-              <a:rPr lang="en-US" dirty="0"/>
-              <a:t/>
-            </a:r>
             <a:endParaRPr lang="en-US" dirty="0"/>
           </a:p>
         </p:txBody>
@@ -1598,10 +1331,6 @@
           <a:bodyPr/>
           <a:lstStyle/>
           <a:p>
-            <a:r>
-              <a:rPr lang="en-US" dirty="0"/>
-              <a:t/>
-            </a:r>
             <a:endParaRPr lang="en-US" dirty="0"/>
           </a:p>
         </p:txBody>
@@ -1686,10 +1415,6 @@
           <a:bodyPr/>
           <a:lstStyle/>
           <a:p>
-            <a:r>
-              <a:rPr lang="en-US" dirty="0"/>
-              <a:t/>
-            </a:r>
             <a:endParaRPr lang="en-US" dirty="0"/>
           </a:p>
         </p:txBody>
@@ -1774,10 +1499,6 @@
           <a:bodyPr/>
           <a:lstStyle/>
           <a:p>
-            <a:r>
-              <a:rPr lang="en-US" dirty="0"/>
-              <a:t/>
-            </a:r>
             <a:endParaRPr lang="en-US" dirty="0"/>
           </a:p>
         </p:txBody>
@@ -1862,10 +1583,6 @@
           <a:bodyPr/>
           <a:lstStyle/>
           <a:p>
-            <a:r>
-              <a:rPr lang="en-US" dirty="0"/>
-              <a:t/>
-            </a:r>
             <a:endParaRPr lang="en-US" dirty="0"/>
           </a:p>
         </p:txBody>
@@ -1950,10 +1667,6 @@
           <a:bodyPr/>
           <a:lstStyle/>
           <a:p>
-            <a:r>
-              <a:rPr lang="en-US" dirty="0"/>
-              <a:t/>
-            </a:r>
             <a:endParaRPr lang="en-US" dirty="0"/>
           </a:p>
         </p:txBody>
@@ -2038,10 +1751,6 @@
           <a:bodyPr/>
           <a:lstStyle/>
           <a:p>
-            <a:r>
-              <a:rPr lang="en-US" dirty="0"/>
-              <a:t/>
-            </a:r>
             <a:endParaRPr lang="en-US" dirty="0"/>
           </a:p>
         </p:txBody>
@@ -2126,10 +1835,6 @@
           <a:bodyPr/>
           <a:lstStyle/>
           <a:p>
-            <a:r>
-              <a:rPr lang="en-US" dirty="0"/>
-              <a:t/>
-            </a:r>
             <a:endParaRPr lang="en-US" dirty="0"/>
           </a:p>
         </p:txBody>
@@ -2214,10 +1919,6 @@
           <a:bodyPr/>
           <a:lstStyle/>
           <a:p>
-            <a:r>
-              <a:rPr lang="en-US" dirty="0"/>
-              <a:t/>
-            </a:r>
             <a:endParaRPr lang="en-US" dirty="0"/>
           </a:p>
         </p:txBody>
@@ -2302,10 +2003,6 @@
           <a:bodyPr/>
           <a:lstStyle/>
           <a:p>
-            <a:r>
-              <a:rPr lang="en-US" dirty="0"/>
-              <a:t/>
-            </a:r>
             <a:endParaRPr lang="en-US" dirty="0"/>
           </a:p>
         </p:txBody>
@@ -2390,10 +2087,6 @@
           <a:bodyPr/>
           <a:lstStyle/>
           <a:p>
-            <a:r>
-              <a:rPr lang="en-US" dirty="0"/>
-              <a:t/>
-            </a:r>
             <a:endParaRPr lang="en-US" dirty="0"/>
           </a:p>
         </p:txBody>
@@ -2478,10 +2171,6 @@
           <a:bodyPr/>
           <a:lstStyle/>
           <a:p>
-            <a:r>
-              <a:rPr lang="en-US" dirty="0"/>
-              <a:t/>
-            </a:r>
             <a:endParaRPr lang="en-US" dirty="0"/>
           </a:p>
         </p:txBody>
@@ -2566,10 +2255,6 @@
           <a:bodyPr/>
           <a:lstStyle/>
           <a:p>
-            <a:r>
-              <a:rPr lang="en-US" dirty="0"/>
-              <a:t/>
-            </a:r>
             <a:endParaRPr lang="en-US" dirty="0"/>
           </a:p>
         </p:txBody>
@@ -2654,10 +2339,6 @@
           <a:bodyPr/>
           <a:lstStyle/>
           <a:p>
-            <a:r>
-              <a:rPr lang="en-US" dirty="0"/>
-              <a:t/>
-            </a:r>
             <a:endParaRPr lang="en-US" dirty="0"/>
           </a:p>
         </p:txBody>
@@ -2742,10 +2423,6 @@
           <a:bodyPr/>
           <a:lstStyle/>
           <a:p>
-            <a:r>
-              <a:rPr lang="en-US" dirty="0"/>
-              <a:t/>
-            </a:r>
             <a:endParaRPr lang="en-US" dirty="0"/>
           </a:p>
         </p:txBody>
@@ -2830,10 +2507,6 @@
           <a:bodyPr/>
           <a:lstStyle/>
           <a:p>
-            <a:r>
-              <a:rPr lang="en-US" dirty="0"/>
-              <a:t/>
-            </a:r>
             <a:endParaRPr lang="en-US" dirty="0"/>
           </a:p>
         </p:txBody>
@@ -2918,10 +2591,6 @@
           <a:bodyPr/>
           <a:lstStyle/>
           <a:p>
-            <a:r>
-              <a:rPr lang="en-US" dirty="0"/>
-              <a:t/>
-            </a:r>
             <a:endParaRPr lang="en-US" dirty="0"/>
           </a:p>
         </p:txBody>
@@ -3006,10 +2675,6 @@
           <a:bodyPr/>
           <a:lstStyle/>
           <a:p>
-            <a:r>
-              <a:rPr lang="en-US" dirty="0"/>
-              <a:t/>
-            </a:r>
             <a:endParaRPr lang="en-US" dirty="0"/>
           </a:p>
         </p:txBody>
@@ -3094,10 +2759,6 @@
           <a:bodyPr/>
           <a:lstStyle/>
           <a:p>
-            <a:r>
-              <a:rPr lang="en-US" dirty="0"/>
-              <a:t/>
-            </a:r>
             <a:endParaRPr lang="en-US" dirty="0"/>
           </a:p>
         </p:txBody>
@@ -3182,10 +2843,6 @@
           <a:bodyPr/>
           <a:lstStyle/>
           <a:p>
-            <a:r>
-              <a:rPr lang="en-US" dirty="0"/>
-              <a:t/>
-            </a:r>
             <a:endParaRPr lang="en-US" dirty="0"/>
           </a:p>
         </p:txBody>
@@ -3270,10 +2927,6 @@
           <a:bodyPr/>
           <a:lstStyle/>
           <a:p>
-            <a:r>
-              <a:rPr lang="en-US" dirty="0"/>
-              <a:t/>
-            </a:r>
             <a:endParaRPr lang="en-US" dirty="0"/>
           </a:p>
         </p:txBody>
@@ -3358,10 +3011,6 @@
           <a:bodyPr/>
           <a:lstStyle/>
           <a:p>
-            <a:r>
-              <a:rPr lang="en-US" dirty="0"/>
-              <a:t/>
-            </a:r>
             <a:endParaRPr lang="en-US" dirty="0"/>
           </a:p>
         </p:txBody>
@@ -3446,10 +3095,6 @@
           <a:bodyPr/>
           <a:lstStyle/>
           <a:p>
-            <a:r>
-              <a:rPr lang="en-US" dirty="0"/>
-              <a:t/>
-            </a:r>
             <a:endParaRPr lang="en-US" dirty="0"/>
           </a:p>
         </p:txBody>
@@ -3534,10 +3179,6 @@
           <a:bodyPr/>
           <a:lstStyle/>
           <a:p>
-            <a:r>
-              <a:rPr lang="en-US" dirty="0"/>
-              <a:t/>
-            </a:r>
             <a:endParaRPr lang="en-US" dirty="0"/>
           </a:p>
         </p:txBody>
@@ -3622,10 +3263,6 @@
           <a:bodyPr/>
           <a:lstStyle/>
           <a:p>
-            <a:r>
-              <a:rPr lang="en-US" dirty="0"/>
-              <a:t/>
-            </a:r>
             <a:endParaRPr lang="en-US" dirty="0"/>
           </a:p>
         </p:txBody>
@@ -3710,10 +3347,6 @@
           <a:bodyPr/>
           <a:lstStyle/>
           <a:p>
-            <a:r>
-              <a:rPr lang="en-US" dirty="0"/>
-              <a:t/>
-            </a:r>
             <a:endParaRPr lang="en-US" dirty="0"/>
           </a:p>
         </p:txBody>
@@ -3798,10 +3431,6 @@
           <a:bodyPr/>
           <a:lstStyle/>
           <a:p>
-            <a:r>
-              <a:rPr lang="en-US" dirty="0"/>
-              <a:t/>
-            </a:r>
             <a:endParaRPr lang="en-US" dirty="0"/>
           </a:p>
         </p:txBody>
@@ -3886,10 +3515,6 @@
           <a:bodyPr/>
           <a:lstStyle/>
           <a:p>
-            <a:r>
-              <a:rPr lang="en-US" dirty="0"/>
-              <a:t/>
-            </a:r>
             <a:endParaRPr lang="en-US" dirty="0"/>
           </a:p>
         </p:txBody>
@@ -3974,10 +3599,6 @@
           <a:bodyPr/>
           <a:lstStyle/>
           <a:p>
-            <a:r>
-              <a:rPr lang="en-US" dirty="0"/>
-              <a:t/>
-            </a:r>
             <a:endParaRPr lang="en-US" dirty="0"/>
           </a:p>
         </p:txBody>
@@ -4062,10 +3683,6 @@
           <a:bodyPr/>
           <a:lstStyle/>
           <a:p>
-            <a:r>
-              <a:rPr lang="en-US" dirty="0"/>
-              <a:t/>
-            </a:r>
             <a:endParaRPr lang="en-US" dirty="0"/>
           </a:p>
         </p:txBody>
@@ -4150,10 +3767,6 @@
           <a:bodyPr/>
           <a:lstStyle/>
           <a:p>
-            <a:r>
-              <a:rPr lang="en-US" dirty="0"/>
-              <a:t/>
-            </a:r>
             <a:endParaRPr lang="en-US" dirty="0"/>
           </a:p>
         </p:txBody>
@@ -4238,10 +3851,6 @@
           <a:bodyPr/>
           <a:lstStyle/>
           <a:p>
-            <a:r>
-              <a:rPr lang="en-US" dirty="0"/>
-              <a:t/>
-            </a:r>
             <a:endParaRPr lang="en-US" dirty="0"/>
           </a:p>
         </p:txBody>
@@ -4315,6 +3924,11 @@
 <file path=ppt/slideMasters/slideMaster1.xml><?xml version="1.0" encoding="utf-8"?>
 <p:sldMaster xmlns:a="http://schemas.openxmlformats.org/drawingml/2006/main" xmlns:r="http://schemas.openxmlformats.org/officeDocument/2006/relationships" xmlns:p="http://schemas.openxmlformats.org/presentationml/2006/main">
   <p:cSld>
+    <p:bg>
+      <p:bgRef idx="1001">
+        <a:schemeClr val="bg1"/>
+      </p:bgRef>
+    </p:bg>
     <p:spTree>
       <p:nvGrpSpPr>
         <p:cNvPr id="1" name=""/>
@@ -4597,6 +4211,7 @@
         <a:solidFill>
           <a:srgbClr val="12091E"/>
         </a:solidFill>
+        <a:effectLst/>
       </p:bgPr>
     </p:bg>
     <p:spTree>
@@ -4765,11 +4380,11 @@
           <a:bodyPr wrap="square" rtlCol="0" anchor="ctr"/>
           <a:lstStyle/>
           <a:p>
-            <a:pPr indent="0" marL="0">
-              <a:buNone/>
-            </a:pPr>
-            <a:r>
-              <a:rPr lang="en-US" sz="1400" b="1" spc="1000" kern="0" dirty="0">
+            <a:pPr marL="0" indent="0">
+              <a:buNone/>
+            </a:pPr>
+            <a:r>
+              <a:rPr lang="en-US" sz="1400" b="1" kern="0" spc="1000" dirty="0">
                 <a:solidFill>
                   <a:srgbClr val="7C3AED"/>
                 </a:solidFill>
@@ -4804,7 +4419,7 @@
           <a:bodyPr wrap="square" rtlCol="0" anchor="ctr"/>
           <a:lstStyle/>
           <a:p>
-            <a:pPr indent="0" marL="0">
+            <a:pPr marL="0" indent="0">
               <a:buNone/>
             </a:pPr>
             <a:r>
@@ -4843,7 +4458,7 @@
           <a:bodyPr wrap="square" rtlCol="0" anchor="ctr"/>
           <a:lstStyle/>
           <a:p>
-            <a:pPr indent="0" marL="0">
+            <a:pPr marL="0" indent="0">
               <a:buNone/>
             </a:pPr>
             <a:r>
@@ -4882,7 +4497,7 @@
           <a:bodyPr wrap="square" rtlCol="0" anchor="ctr"/>
           <a:lstStyle/>
           <a:p>
-            <a:pPr indent="0" marL="0">
+            <a:pPr marL="0" indent="0">
               <a:buNone/>
             </a:pPr>
             <a:r>
@@ -4946,7 +4561,7 @@
           <a:bodyPr wrap="square" rtlCol="0" anchor="ctr"/>
           <a:lstStyle/>
           <a:p>
-            <a:pPr indent="0" marL="0">
+            <a:pPr marL="0" indent="0">
               <a:buNone/>
             </a:pPr>
             <a:r>
@@ -4985,7 +4600,7 @@
           <a:bodyPr wrap="square" rtlCol="0" anchor="ctr"/>
           <a:lstStyle/>
           <a:p>
-            <a:pPr indent="0" marL="0">
+            <a:pPr marL="0" indent="0">
               <a:buNone/>
             </a:pPr>
             <a:r>
@@ -5051,7 +4666,7 @@
           <a:bodyPr wrap="square" lIns="0" tIns="0" rIns="0" bIns="0" rtlCol="0" anchor="ctr"/>
           <a:lstStyle/>
           <a:p>
-            <a:pPr algn="ctr" indent="0" marL="0">
+            <a:pPr marL="0" indent="0" algn="ctr">
               <a:buNone/>
             </a:pPr>
             <a:r>
@@ -5117,7 +4732,7 @@
           <a:bodyPr wrap="square" lIns="0" tIns="0" rIns="0" bIns="0" rtlCol="0" anchor="ctr"/>
           <a:lstStyle/>
           <a:p>
-            <a:pPr algn="ctr" indent="0" marL="0">
+            <a:pPr marL="0" indent="0" algn="ctr">
               <a:buNone/>
             </a:pPr>
             <a:r>
@@ -5183,7 +4798,7 @@
           <a:bodyPr wrap="square" lIns="0" tIns="0" rIns="0" bIns="0" rtlCol="0" anchor="ctr"/>
           <a:lstStyle/>
           <a:p>
-            <a:pPr algn="ctr" indent="0" marL="0">
+            <a:pPr marL="0" indent="0" algn="ctr">
               <a:buNone/>
             </a:pPr>
             <a:r>
@@ -5249,7 +4864,7 @@
           <a:bodyPr wrap="square" lIns="0" tIns="0" rIns="0" bIns="0" rtlCol="0" anchor="ctr"/>
           <a:lstStyle/>
           <a:p>
-            <a:pPr algn="ctr" indent="0" marL="0">
+            <a:pPr marL="0" indent="0" algn="ctr">
               <a:buNone/>
             </a:pPr>
             <a:r>
@@ -5315,7 +4930,7 @@
           <a:bodyPr wrap="square" lIns="0" tIns="0" rIns="0" bIns="0" rtlCol="0" anchor="ctr"/>
           <a:lstStyle/>
           <a:p>
-            <a:pPr algn="ctr" indent="0" marL="0">
+            <a:pPr marL="0" indent="0" algn="ctr">
               <a:buNone/>
             </a:pPr>
             <a:r>
@@ -5381,7 +4996,7 @@
           <a:bodyPr wrap="square" lIns="0" tIns="0" rIns="0" bIns="0" rtlCol="0" anchor="ctr"/>
           <a:lstStyle/>
           <a:p>
-            <a:pPr algn="ctr" indent="0" marL="0">
+            <a:pPr marL="0" indent="0" algn="ctr">
               <a:buNone/>
             </a:pPr>
             <a:r>
@@ -5447,7 +5062,7 @@
           <a:bodyPr wrap="square" lIns="0" tIns="0" rIns="0" bIns="0" rtlCol="0" anchor="ctr"/>
           <a:lstStyle/>
           <a:p>
-            <a:pPr algn="ctr" indent="0" marL="0">
+            <a:pPr marL="0" indent="0" algn="ctr">
               <a:buNone/>
             </a:pPr>
             <a:r>
@@ -5513,7 +5128,7 @@
           <a:bodyPr wrap="square" lIns="0" tIns="0" rIns="0" bIns="0" rtlCol="0" anchor="ctr"/>
           <a:lstStyle/>
           <a:p>
-            <a:pPr algn="ctr" indent="0" marL="0">
+            <a:pPr marL="0" indent="0" algn="ctr">
               <a:buNone/>
             </a:pPr>
             <a:r>
@@ -5579,7 +5194,7 @@
           <a:bodyPr wrap="square" lIns="0" tIns="0" rIns="0" bIns="0" rtlCol="0" anchor="ctr"/>
           <a:lstStyle/>
           <a:p>
-            <a:pPr algn="ctr" indent="0" marL="0">
+            <a:pPr marL="0" indent="0" algn="ctr">
               <a:buNone/>
             </a:pPr>
             <a:r>
@@ -5645,7 +5260,7 @@
           <a:bodyPr wrap="square" lIns="0" tIns="0" rIns="0" bIns="0" rtlCol="0" anchor="ctr"/>
           <a:lstStyle/>
           <a:p>
-            <a:pPr algn="ctr" indent="0" marL="0">
+            <a:pPr marL="0" indent="0" algn="ctr">
               <a:buNone/>
             </a:pPr>
             <a:r>
@@ -5711,7 +5326,7 @@
           <a:bodyPr wrap="square" lIns="0" tIns="0" rIns="0" bIns="0" rtlCol="0" anchor="ctr"/>
           <a:lstStyle/>
           <a:p>
-            <a:pPr algn="ctr" indent="0" marL="0">
+            <a:pPr marL="0" indent="0" algn="ctr">
               <a:buNone/>
             </a:pPr>
             <a:r>
@@ -5777,7 +5392,7 @@
           <a:bodyPr wrap="square" lIns="0" tIns="0" rIns="0" bIns="0" rtlCol="0" anchor="ctr"/>
           <a:lstStyle/>
           <a:p>
-            <a:pPr algn="ctr" indent="0" marL="0">
+            <a:pPr marL="0" indent="0" algn="ctr">
               <a:buNone/>
             </a:pPr>
             <a:r>
@@ -5811,6 +5426,7 @@
         <a:solidFill>
           <a:srgbClr val="F5F3FF"/>
         </a:solidFill>
+        <a:effectLst/>
       </p:bgPr>
     </p:bg>
     <p:spTree>
@@ -5898,7 +5514,7 @@
           <a:bodyPr wrap="square" lIns="0" tIns="0" rIns="0" bIns="0" rtlCol="0" anchor="ctr"/>
           <a:lstStyle/>
           <a:p>
-            <a:pPr indent="0" marL="0">
+            <a:pPr marL="0" indent="0">
               <a:buNone/>
             </a:pPr>
             <a:r>
@@ -5937,7 +5553,7 @@
           <a:bodyPr wrap="square" lIns="0" tIns="0" rIns="0" bIns="0" rtlCol="0" anchor="ctr"/>
           <a:lstStyle/>
           <a:p>
-            <a:pPr indent="0" marL="0">
+            <a:pPr marL="0" indent="0">
               <a:buNone/>
             </a:pPr>
             <a:r>
@@ -5951,9 +5567,6 @@
               </a:rPr>
               <a:t>❯ </a:t>
             </a:r>
-            <a:pPr indent="0" marL="0">
-              <a:buNone/>
-            </a:pPr>
             <a:r>
               <a:rPr lang="en-US" sz="1350" b="1" dirty="0">
                 <a:solidFill>
@@ -5977,7 +5590,7 @@
         </p:nvSpPr>
         <p:spPr>
           <a:xfrm>
-            <a:off x="310896" y="1591056"/>
+            <a:off x="320040" y="1494129"/>
             <a:ext cx="8503920" cy="404165"/>
           </a:xfrm>
           <a:prstGeom prst="rect">
@@ -5990,7 +5603,7 @@
           <a:bodyPr wrap="square" lIns="0" tIns="0" rIns="0" bIns="0" rtlCol="0" anchor="ctr"/>
           <a:lstStyle/>
           <a:p>
-            <a:pPr indent="0" marL="0">
+            <a:pPr marL="0" indent="0">
               <a:buNone/>
             </a:pPr>
             <a:r>
@@ -6004,9 +5617,6 @@
               </a:rPr>
               <a:t>❯ </a:t>
             </a:r>
-            <a:pPr indent="0" marL="0">
-              <a:buNone/>
-            </a:pPr>
             <a:r>
               <a:rPr lang="en-US" sz="1350" b="1" dirty="0">
                 <a:solidFill>
@@ -6030,7 +5640,7 @@
         </p:nvSpPr>
         <p:spPr>
           <a:xfrm>
-            <a:off x="310896" y="2066544"/>
+            <a:off x="310896" y="1786737"/>
             <a:ext cx="8503920" cy="404165"/>
           </a:xfrm>
           <a:prstGeom prst="rect">
@@ -6043,7 +5653,7 @@
           <a:bodyPr wrap="square" lIns="0" tIns="0" rIns="0" bIns="0" rtlCol="0" anchor="ctr"/>
           <a:lstStyle/>
           <a:p>
-            <a:pPr indent="0" marL="0">
+            <a:pPr marL="0" indent="0">
               <a:buNone/>
             </a:pPr>
             <a:r>
@@ -6057,9 +5667,6 @@
               </a:rPr>
               <a:t>❯ </a:t>
             </a:r>
-            <a:pPr indent="0" marL="0">
-              <a:buNone/>
-            </a:pPr>
             <a:r>
               <a:rPr lang="en-US" sz="1350" dirty="0">
                 <a:solidFill>
@@ -6083,7 +5690,7 @@
         </p:nvSpPr>
         <p:spPr>
           <a:xfrm>
-            <a:off x="310896" y="2542032"/>
+            <a:off x="310896" y="2057286"/>
             <a:ext cx="8503920" cy="404165"/>
           </a:xfrm>
           <a:prstGeom prst="rect">
@@ -6096,7 +5703,7 @@
           <a:bodyPr wrap="square" lIns="0" tIns="0" rIns="0" bIns="0" rtlCol="0" anchor="ctr"/>
           <a:lstStyle/>
           <a:p>
-            <a:pPr indent="0" marL="0">
+            <a:pPr marL="0" indent="0">
               <a:buNone/>
             </a:pPr>
             <a:r>
@@ -6110,9 +5717,6 @@
               </a:rPr>
               <a:t>❯ </a:t>
             </a:r>
-            <a:pPr indent="0" marL="0">
-              <a:buNone/>
-            </a:pPr>
             <a:r>
               <a:rPr lang="en-US" sz="1350" dirty="0">
                 <a:solidFill>
@@ -6136,7 +5740,7 @@
         </p:nvSpPr>
         <p:spPr>
           <a:xfrm>
-            <a:off x="310896" y="3017520"/>
+            <a:off x="297180" y="2316427"/>
             <a:ext cx="8503920" cy="404165"/>
           </a:xfrm>
           <a:prstGeom prst="rect">
@@ -6149,7 +5753,7 @@
           <a:bodyPr wrap="square" lIns="0" tIns="0" rIns="0" bIns="0" rtlCol="0" anchor="ctr"/>
           <a:lstStyle/>
           <a:p>
-            <a:pPr indent="0" marL="0">
+            <a:pPr marL="0" indent="0">
               <a:buNone/>
             </a:pPr>
             <a:r>
@@ -6163,9 +5767,6 @@
               </a:rPr>
               <a:t>❯ </a:t>
             </a:r>
-            <a:pPr indent="0" marL="0">
-              <a:buNone/>
-            </a:pPr>
             <a:r>
               <a:rPr lang="en-US" sz="1350" dirty="0">
                 <a:solidFill>
@@ -6189,7 +5790,7 @@
         </p:nvSpPr>
         <p:spPr>
           <a:xfrm>
-            <a:off x="256032" y="3447288"/>
+            <a:off x="256032" y="2828125"/>
             <a:ext cx="8631936" cy="418429"/>
           </a:xfrm>
           <a:prstGeom prst="rect">
@@ -6214,7 +5815,7 @@
         </p:nvSpPr>
         <p:spPr>
           <a:xfrm>
-            <a:off x="420624" y="3483864"/>
+            <a:off x="420624" y="2864701"/>
             <a:ext cx="8375904" cy="389900"/>
           </a:xfrm>
           <a:prstGeom prst="rect">
@@ -6227,7 +5828,7 @@
           <a:bodyPr wrap="square" lIns="0" tIns="0" rIns="0" bIns="0" rtlCol="0" anchor="ctr"/>
           <a:lstStyle/>
           <a:p>
-            <a:pPr indent="0" marL="0">
+            <a:pPr marL="0" indent="0">
               <a:buNone/>
             </a:pPr>
             <a:r>
@@ -6253,7 +5854,7 @@
         </p:nvSpPr>
         <p:spPr>
           <a:xfrm>
-            <a:off x="256032" y="3922776"/>
+            <a:off x="256032" y="3303613"/>
             <a:ext cx="8631936" cy="418429"/>
           </a:xfrm>
           <a:prstGeom prst="rect">
@@ -6278,7 +5879,7 @@
         </p:nvSpPr>
         <p:spPr>
           <a:xfrm>
-            <a:off x="420624" y="3959352"/>
+            <a:off x="420624" y="3340189"/>
             <a:ext cx="8375904" cy="389900"/>
           </a:xfrm>
           <a:prstGeom prst="rect">
@@ -6291,7 +5892,7 @@
           <a:bodyPr wrap="square" lIns="0" tIns="0" rIns="0" bIns="0" rtlCol="0" anchor="ctr"/>
           <a:lstStyle/>
           <a:p>
-            <a:pPr indent="0" marL="0">
+            <a:pPr marL="0" indent="0">
               <a:buNone/>
             </a:pPr>
             <a:r>
@@ -6317,7 +5918,7 @@
         </p:nvSpPr>
         <p:spPr>
           <a:xfrm>
-            <a:off x="256032" y="4398264"/>
+            <a:off x="256032" y="3779101"/>
             <a:ext cx="8631936" cy="418429"/>
           </a:xfrm>
           <a:prstGeom prst="rect">
@@ -6342,7 +5943,7 @@
         </p:nvSpPr>
         <p:spPr>
           <a:xfrm>
-            <a:off x="420624" y="4434840"/>
+            <a:off x="420624" y="3815677"/>
             <a:ext cx="8375904" cy="389900"/>
           </a:xfrm>
           <a:prstGeom prst="rect">
@@ -6355,7 +5956,7 @@
           <a:bodyPr wrap="square" lIns="0" tIns="0" rIns="0" bIns="0" rtlCol="0" anchor="ctr"/>
           <a:lstStyle/>
           <a:p>
-            <a:pPr indent="0" marL="0">
+            <a:pPr marL="0" indent="0">
               <a:buNone/>
             </a:pPr>
             <a:r>
@@ -6381,7 +5982,7 @@
         </p:nvSpPr>
         <p:spPr>
           <a:xfrm>
-            <a:off x="256032" y="4873752"/>
+            <a:off x="256032" y="4254589"/>
             <a:ext cx="8631936" cy="418429"/>
           </a:xfrm>
           <a:prstGeom prst="rect">
@@ -6408,7 +6009,7 @@
         </p:nvSpPr>
         <p:spPr>
           <a:xfrm>
-            <a:off x="457200" y="4910328"/>
+            <a:off x="457200" y="4291165"/>
             <a:ext cx="8412480" cy="389900"/>
           </a:xfrm>
           <a:prstGeom prst="rect">
@@ -6421,7 +6022,7 @@
           <a:bodyPr wrap="square" lIns="0" tIns="0" rIns="0" bIns="0" rtlCol="0" anchor="ctr"/>
           <a:lstStyle/>
           <a:p>
-            <a:pPr indent="0" marL="0">
+            <a:pPr marL="0" indent="0">
               <a:buNone/>
             </a:pPr>
             <a:r>
@@ -6497,7 +6098,7 @@
         </p:nvSpPr>
         <p:spPr>
           <a:xfrm>
-            <a:off x="274320" y="4937760"/>
+            <a:off x="256032" y="4927519"/>
             <a:ext cx="5486400" cy="182880"/>
           </a:xfrm>
           <a:prstGeom prst="rect">
@@ -6510,7 +6111,7 @@
           <a:bodyPr wrap="square" lIns="0" tIns="0" rIns="0" bIns="0" rtlCol="0" anchor="ctr"/>
           <a:lstStyle/>
           <a:p>
-            <a:pPr indent="0" marL="0">
+            <a:pPr marL="0" indent="0">
               <a:buNone/>
             </a:pPr>
             <a:r>
@@ -6544,6 +6145,7 @@
         <a:solidFill>
           <a:srgbClr val="F5F3FF"/>
         </a:solidFill>
+        <a:effectLst/>
       </p:bgPr>
     </p:bg>
     <p:spTree>
@@ -6631,7 +6233,7 @@
           <a:bodyPr wrap="square" lIns="0" tIns="0" rIns="0" bIns="0" rtlCol="0" anchor="ctr"/>
           <a:lstStyle/>
           <a:p>
-            <a:pPr indent="0" marL="0">
+            <a:pPr marL="0" indent="0">
               <a:buNone/>
             </a:pPr>
             <a:r>
@@ -6670,7 +6272,7 @@
           <a:bodyPr wrap="square" lIns="0" tIns="0" rIns="0" bIns="0" rtlCol="0" anchor="ctr"/>
           <a:lstStyle/>
           <a:p>
-            <a:pPr indent="0" marL="0">
+            <a:pPr marL="0" indent="0">
               <a:buNone/>
             </a:pPr>
             <a:r>
@@ -6696,8 +6298,8 @@
         </p:nvSpPr>
         <p:spPr>
           <a:xfrm>
-            <a:off x="219456" y="1444752"/>
-            <a:ext cx="8705088" cy="2331720"/>
+            <a:off x="219456" y="1323594"/>
+            <a:ext cx="8705088" cy="3529584"/>
           </a:xfrm>
           <a:prstGeom prst="rect">
             <a:avLst/>
@@ -6712,7 +6314,7 @@
             <a:prstDash val="solid"/>
           </a:ln>
           <a:effectLst>
-            <a:outerShdw sx="100000" sy="100000" kx="0" ky="0" algn="bl" rotWithShape="0" blurRad="101600" dist="38100" dir="8100000">
+            <a:outerShdw blurRad="101600" dist="38100" dir="8100000" algn="bl" rotWithShape="0">
               <a:srgbClr val="000000">
                 <a:alpha val="20000"/>
               </a:srgbClr>
@@ -6728,7 +6330,7 @@
         </p:nvSpPr>
         <p:spPr>
           <a:xfrm>
-            <a:off x="219456" y="1444752"/>
+            <a:off x="219456" y="1323594"/>
             <a:ext cx="109728" cy="2331720"/>
           </a:xfrm>
           <a:prstGeom prst="rect">
@@ -6753,7 +6355,7 @@
         </p:nvSpPr>
         <p:spPr>
           <a:xfrm>
-            <a:off x="475488" y="1572768"/>
+            <a:off x="475488" y="1451610"/>
             <a:ext cx="8339328" cy="2103120"/>
           </a:xfrm>
           <a:prstGeom prst="rect">
@@ -6766,7 +6368,7 @@
           <a:bodyPr wrap="square" lIns="0" tIns="0" rIns="0" bIns="0" rtlCol="0" anchor="t"/>
           <a:lstStyle/>
           <a:p>
-            <a:pPr indent="0" marL="0">
+            <a:pPr marL="0" indent="0">
               <a:buNone/>
             </a:pPr>
             <a:r>
@@ -6783,7 +6385,7 @@
             <a:endParaRPr lang="en-US" sz="1300" dirty="0"/>
           </a:p>
           <a:p>
-            <a:pPr indent="0" marL="0">
+            <a:pPr marL="0" indent="0">
               <a:buNone/>
             </a:pPr>
             <a:r>
@@ -6800,7 +6402,7 @@
             <a:endParaRPr lang="en-US" sz="1300" dirty="0"/>
           </a:p>
           <a:p>
-            <a:pPr indent="0" marL="0">
+            <a:pPr marL="0" indent="0">
               <a:buNone/>
             </a:pPr>
             <a:r>
@@ -6817,7 +6419,7 @@
             <a:endParaRPr lang="en-US" sz="1300" dirty="0"/>
           </a:p>
           <a:p>
-            <a:pPr indent="0" marL="0">
+            <a:pPr marL="0" indent="0">
               <a:buNone/>
             </a:pPr>
             <a:r>
@@ -6834,7 +6436,7 @@
             <a:endParaRPr lang="en-US" sz="1300" dirty="0"/>
           </a:p>
           <a:p>
-            <a:pPr indent="0" marL="0">
+            <a:pPr marL="0" indent="0">
               <a:buNone/>
             </a:pPr>
             <a:r>
@@ -6851,13 +6453,7 @@
             <a:endParaRPr lang="en-US" sz="1300" dirty="0"/>
           </a:p>
           <a:p>
-            <a:pPr indent="0" marL="0">
-              <a:buNone/>
-            </a:pPr>
-            <a:endParaRPr lang="en-US" sz="1300" dirty="0"/>
-          </a:p>
-          <a:p>
-            <a:pPr indent="0" marL="0">
+            <a:pPr marL="0" indent="0">
               <a:buNone/>
             </a:pPr>
             <a:r>
@@ -6874,7 +6470,7 @@
             <a:endParaRPr lang="en-US" sz="1300" dirty="0"/>
           </a:p>
           <a:p>
-            <a:pPr indent="0" marL="0">
+            <a:pPr marL="0" indent="0">
               <a:buNone/>
             </a:pPr>
             <a:r>
@@ -6891,7 +6487,7 @@
             <a:endParaRPr lang="en-US" sz="1300" dirty="0"/>
           </a:p>
           <a:p>
-            <a:pPr indent="0" marL="0">
+            <a:pPr marL="0" indent="0">
               <a:buNone/>
             </a:pPr>
             <a:r>
@@ -6908,7 +6504,7 @@
             <a:endParaRPr lang="en-US" sz="1300" dirty="0"/>
           </a:p>
           <a:p>
-            <a:pPr indent="0" marL="0">
+            <a:pPr marL="0" indent="0">
               <a:buNone/>
             </a:pPr>
             <a:r>
@@ -6925,7 +6521,7 @@
             <a:endParaRPr lang="en-US" sz="1300" dirty="0"/>
           </a:p>
           <a:p>
-            <a:pPr indent="0" marL="0">
+            <a:pPr marL="0" indent="0">
               <a:buNone/>
             </a:pPr>
             <a:r>
@@ -6942,13 +6538,7 @@
             <a:endParaRPr lang="en-US" sz="1300" dirty="0"/>
           </a:p>
           <a:p>
-            <a:pPr indent="0" marL="0">
-              <a:buNone/>
-            </a:pPr>
-            <a:endParaRPr lang="en-US" sz="1300" dirty="0"/>
-          </a:p>
-          <a:p>
-            <a:pPr indent="0" marL="0">
+            <a:pPr marL="0" indent="0">
               <a:buNone/>
             </a:pPr>
             <a:r>
@@ -6965,7 +6555,7 @@
             <a:endParaRPr lang="en-US" sz="1300" dirty="0"/>
           </a:p>
           <a:p>
-            <a:pPr indent="0" marL="0">
+            <a:pPr marL="0" indent="0">
               <a:buNone/>
             </a:pPr>
             <a:r>
@@ -6982,7 +6572,7 @@
             <a:endParaRPr lang="en-US" sz="1300" dirty="0"/>
           </a:p>
           <a:p>
-            <a:pPr indent="0" marL="0">
+            <a:pPr marL="0" indent="0">
               <a:buNone/>
             </a:pPr>
             <a:r>
@@ -6999,7 +6589,7 @@
             <a:endParaRPr lang="en-US" sz="1300" dirty="0"/>
           </a:p>
           <a:p>
-            <a:pPr indent="0" marL="0">
+            <a:pPr marL="0" indent="0">
               <a:buNone/>
             </a:pPr>
             <a:r>
@@ -7016,7 +6606,7 @@
             <a:endParaRPr lang="en-US" sz="1300" dirty="0"/>
           </a:p>
           <a:p>
-            <a:pPr indent="0" marL="0">
+            <a:pPr marL="0" indent="0">
               <a:buNone/>
             </a:pPr>
             <a:r>
@@ -7033,7 +6623,7 @@
             <a:endParaRPr lang="en-US" sz="1300" dirty="0"/>
           </a:p>
           <a:p>
-            <a:pPr indent="0" marL="0">
+            <a:pPr marL="0" indent="0">
               <a:buNone/>
             </a:pPr>
             <a:r>
@@ -7050,7 +6640,7 @@
             <a:endParaRPr lang="en-US" sz="1300" dirty="0"/>
           </a:p>
           <a:p>
-            <a:pPr indent="0" marL="0">
+            <a:pPr marL="0" indent="0">
               <a:buNone/>
             </a:pPr>
             <a:r>
@@ -7066,23 +6656,6 @@
             </a:r>
             <a:endParaRPr lang="en-US" sz="1300" dirty="0"/>
           </a:p>
-          <a:p>
-            <a:pPr indent="0" marL="0">
-              <a:buNone/>
-            </a:pPr>
-            <a:r>
-              <a:rPr lang="en-US" sz="1300" dirty="0">
-                <a:solidFill>
-                  <a:srgbClr val="FFFFFF"/>
-                </a:solidFill>
-                <a:latin typeface="Courier New" pitchFamily="34" charset="0"/>
-                <a:ea typeface="Courier New" pitchFamily="34" charset="-122"/>
-                <a:cs typeface="Courier New" pitchFamily="34" charset="-120"/>
-              </a:rPr>
-              <a:t>}</a:t>
-            </a:r>
-            <a:endParaRPr lang="en-US" sz="1300" dirty="0"/>
-          </a:p>
         </p:txBody>
       </p:sp>
       <p:sp>
@@ -7093,8 +6666,8 @@
         </p:nvSpPr>
         <p:spPr>
           <a:xfrm>
-            <a:off x="219456" y="3922776"/>
-            <a:ext cx="8705088" cy="676656"/>
+            <a:off x="32004" y="5209794"/>
+            <a:ext cx="8705088" cy="344339"/>
           </a:xfrm>
           <a:prstGeom prst="rect">
             <a:avLst/>
@@ -7120,7 +6693,7 @@
         </p:nvSpPr>
         <p:spPr>
           <a:xfrm>
-            <a:off x="402336" y="3995928"/>
+            <a:off x="219456" y="5120640"/>
             <a:ext cx="8458200" cy="530352"/>
           </a:xfrm>
           <a:prstGeom prst="rect">
@@ -7133,7 +6706,7 @@
           <a:bodyPr wrap="square" lIns="0" tIns="0" rIns="0" bIns="0" rtlCol="0" anchor="ctr"/>
           <a:lstStyle/>
           <a:p>
-            <a:pPr indent="0" marL="0">
+            <a:pPr marL="0" indent="0">
               <a:buNone/>
             </a:pPr>
             <a:r>
@@ -7222,7 +6795,7 @@
           <a:bodyPr wrap="square" lIns="0" tIns="0" rIns="0" bIns="0" rtlCol="0" anchor="ctr"/>
           <a:lstStyle/>
           <a:p>
-            <a:pPr indent="0" marL="0">
+            <a:pPr marL="0" indent="0">
               <a:buNone/>
             </a:pPr>
             <a:r>
@@ -7256,6 +6829,7 @@
         <a:solidFill>
           <a:srgbClr val="0C1A2E"/>
         </a:solidFill>
+        <a:effectLst/>
       </p:bgPr>
     </p:bg>
     <p:spTree>
@@ -7368,11 +6942,11 @@
           <a:bodyPr wrap="square" lIns="0" tIns="0" rIns="0" bIns="0" rtlCol="0" anchor="ctr"/>
           <a:lstStyle/>
           <a:p>
-            <a:pPr algn="ctr" indent="0" marL="0">
-              <a:buNone/>
-            </a:pPr>
-            <a:r>
-              <a:rPr lang="en-US" sz="1100" b="1" spc="200" kern="0" dirty="0">
+            <a:pPr marL="0" indent="0" algn="ctr">
+              <a:buNone/>
+            </a:pPr>
+            <a:r>
+              <a:rPr lang="en-US" sz="1100" b="1" kern="0" spc="200" dirty="0">
                 <a:solidFill>
                   <a:srgbClr val="FFFFFF"/>
                 </a:solidFill>
@@ -7407,7 +6981,7 @@
           <a:bodyPr wrap="square" lIns="0" tIns="0" rIns="0" bIns="0" rtlCol="0" anchor="ctr"/>
           <a:lstStyle/>
           <a:p>
-            <a:pPr indent="0" marL="0">
+            <a:pPr marL="0" indent="0">
               <a:buNone/>
             </a:pPr>
             <a:r>
@@ -7446,7 +7020,7 @@
           <a:bodyPr wrap="square" rtlCol="0" anchor="ctr"/>
           <a:lstStyle/>
           <a:p>
-            <a:pPr indent="0" marL="0">
+            <a:pPr marL="0" indent="0">
               <a:buNone/>
             </a:pPr>
             <a:r>
@@ -7512,7 +7086,7 @@
           <a:bodyPr wrap="square" lIns="0" tIns="0" rIns="0" bIns="0" rtlCol="0" anchor="ctr"/>
           <a:lstStyle/>
           <a:p>
-            <a:pPr indent="0" marL="0">
+            <a:pPr marL="0" indent="0">
               <a:buNone/>
             </a:pPr>
             <a:r>
@@ -7526,9 +7100,6 @@
               </a:rPr>
               <a:t>▶ </a:t>
             </a:r>
-            <a:pPr indent="0" marL="0">
-              <a:buNone/>
-            </a:pPr>
             <a:r>
               <a:rPr lang="en-US" sz="1300" b="1" dirty="0">
                 <a:solidFill>
@@ -7565,7 +7136,7 @@
           <a:bodyPr wrap="square" lIns="0" tIns="0" rIns="0" bIns="0" rtlCol="0" anchor="ctr"/>
           <a:lstStyle/>
           <a:p>
-            <a:pPr indent="0" marL="0">
+            <a:pPr marL="0" indent="0">
               <a:buNone/>
             </a:pPr>
             <a:r>
@@ -7579,9 +7150,6 @@
               </a:rPr>
               <a:t>▶ </a:t>
             </a:r>
-            <a:pPr indent="0" marL="0">
-              <a:buNone/>
-            </a:pPr>
             <a:r>
               <a:rPr lang="en-US" sz="1300" dirty="0">
                 <a:solidFill>
@@ -7643,7 +7211,7 @@
           <a:bodyPr wrap="square" lIns="0" tIns="0" rIns="0" bIns="0" rtlCol="0" anchor="ctr"/>
           <a:lstStyle/>
           <a:p>
-            <a:pPr indent="0" marL="0">
+            <a:pPr marL="0" indent="0">
               <a:buNone/>
             </a:pPr>
             <a:r>
@@ -7707,7 +7275,7 @@
           <a:bodyPr wrap="square" lIns="0" tIns="0" rIns="0" bIns="0" rtlCol="0" anchor="ctr"/>
           <a:lstStyle/>
           <a:p>
-            <a:pPr indent="0" marL="0">
+            <a:pPr marL="0" indent="0">
               <a:buNone/>
             </a:pPr>
             <a:r>
@@ -7773,7 +7341,7 @@
           <a:bodyPr wrap="square" lIns="0" tIns="0" rIns="0" bIns="0" rtlCol="0" anchor="ctr"/>
           <a:lstStyle/>
           <a:p>
-            <a:pPr indent="0" marL="0">
+            <a:pPr marL="0" indent="0">
               <a:buNone/>
             </a:pPr>
             <a:r>
@@ -7837,7 +7405,7 @@
           <a:bodyPr wrap="square" lIns="0" tIns="0" rIns="0" bIns="0" rtlCol="0" anchor="ctr"/>
           <a:lstStyle/>
           <a:p>
-            <a:pPr indent="0" marL="0">
+            <a:pPr marL="0" indent="0">
               <a:buNone/>
             </a:pPr>
             <a:r>
@@ -7871,6 +7439,7 @@
         <a:solidFill>
           <a:srgbClr val="0C1A2E"/>
         </a:solidFill>
+        <a:effectLst/>
       </p:bgPr>
     </p:bg>
     <p:spTree>
@@ -7983,11 +7552,11 @@
           <a:bodyPr wrap="square" lIns="0" tIns="0" rIns="0" bIns="0" rtlCol="0" anchor="ctr"/>
           <a:lstStyle/>
           <a:p>
-            <a:pPr algn="ctr" indent="0" marL="0">
-              <a:buNone/>
-            </a:pPr>
-            <a:r>
-              <a:rPr lang="en-US" sz="1100" b="1" spc="200" kern="0" dirty="0">
+            <a:pPr marL="0" indent="0" algn="ctr">
+              <a:buNone/>
+            </a:pPr>
+            <a:r>
+              <a:rPr lang="en-US" sz="1100" b="1" kern="0" spc="200" dirty="0">
                 <a:solidFill>
                   <a:srgbClr val="FFFFFF"/>
                 </a:solidFill>
@@ -8022,7 +7591,7 @@
           <a:bodyPr wrap="square" lIns="0" tIns="0" rIns="0" bIns="0" rtlCol="0" anchor="ctr"/>
           <a:lstStyle/>
           <a:p>
-            <a:pPr indent="0" marL="0">
+            <a:pPr marL="0" indent="0">
               <a:buNone/>
             </a:pPr>
             <a:r>
@@ -8061,7 +7630,7 @@
           <a:bodyPr wrap="square" rtlCol="0" anchor="ctr"/>
           <a:lstStyle/>
           <a:p>
-            <a:pPr indent="0" marL="0">
+            <a:pPr marL="0" indent="0">
               <a:buNone/>
             </a:pPr>
             <a:r>
@@ -8127,7 +7696,7 @@
           <a:bodyPr wrap="square" lIns="0" tIns="0" rIns="0" bIns="0" rtlCol="0" anchor="ctr"/>
           <a:lstStyle/>
           <a:p>
-            <a:pPr indent="0" marL="0">
+            <a:pPr marL="0" indent="0">
               <a:buNone/>
             </a:pPr>
             <a:r>
@@ -8141,9 +7710,6 @@
               </a:rPr>
               <a:t>▶ </a:t>
             </a:r>
-            <a:pPr indent="0" marL="0">
-              <a:buNone/>
-            </a:pPr>
             <a:r>
               <a:rPr lang="en-US" sz="1300" b="1" dirty="0">
                 <a:solidFill>
@@ -8180,7 +7746,7 @@
           <a:bodyPr wrap="square" lIns="0" tIns="0" rIns="0" bIns="0" rtlCol="0" anchor="ctr"/>
           <a:lstStyle/>
           <a:p>
-            <a:pPr indent="0" marL="0">
+            <a:pPr marL="0" indent="0">
               <a:buNone/>
             </a:pPr>
             <a:r>
@@ -8194,9 +7760,6 @@
               </a:rPr>
               <a:t>▶ </a:t>
             </a:r>
-            <a:pPr indent="0" marL="0">
-              <a:buNone/>
-            </a:pPr>
             <a:r>
               <a:rPr lang="en-US" sz="1300" dirty="0">
                 <a:solidFill>
@@ -8233,7 +7796,7 @@
           <a:bodyPr wrap="square" lIns="0" tIns="0" rIns="0" bIns="0" rtlCol="0" anchor="ctr"/>
           <a:lstStyle/>
           <a:p>
-            <a:pPr indent="0" marL="0">
+            <a:pPr marL="0" indent="0">
               <a:buNone/>
             </a:pPr>
             <a:r>
@@ -8247,9 +7810,6 @@
               </a:rPr>
               <a:t>▶ </a:t>
             </a:r>
-            <a:pPr indent="0" marL="0">
-              <a:buNone/>
-            </a:pPr>
             <a:r>
               <a:rPr lang="en-US" sz="1300" dirty="0">
                 <a:solidFill>
@@ -8311,7 +7871,7 @@
           <a:bodyPr wrap="square" lIns="0" tIns="0" rIns="0" bIns="0" rtlCol="0" anchor="ctr"/>
           <a:lstStyle/>
           <a:p>
-            <a:pPr indent="0" marL="0">
+            <a:pPr marL="0" indent="0">
               <a:buNone/>
             </a:pPr>
             <a:r>
@@ -8375,7 +7935,7 @@
           <a:bodyPr wrap="square" lIns="0" tIns="0" rIns="0" bIns="0" rtlCol="0" anchor="ctr"/>
           <a:lstStyle/>
           <a:p>
-            <a:pPr indent="0" marL="0">
+            <a:pPr marL="0" indent="0">
               <a:buNone/>
             </a:pPr>
             <a:r>
@@ -8439,7 +7999,7 @@
           <a:bodyPr wrap="square" lIns="0" tIns="0" rIns="0" bIns="0" rtlCol="0" anchor="ctr"/>
           <a:lstStyle/>
           <a:p>
-            <a:pPr indent="0" marL="0">
+            <a:pPr marL="0" indent="0">
               <a:buNone/>
             </a:pPr>
             <a:r>
@@ -8505,7 +8065,7 @@
           <a:bodyPr wrap="square" lIns="0" tIns="0" rIns="0" bIns="0" rtlCol="0" anchor="ctr"/>
           <a:lstStyle/>
           <a:p>
-            <a:pPr indent="0" marL="0">
+            <a:pPr marL="0" indent="0">
               <a:buNone/>
             </a:pPr>
             <a:r>
@@ -8569,7 +8129,7 @@
           <a:bodyPr wrap="square" lIns="0" tIns="0" rIns="0" bIns="0" rtlCol="0" anchor="ctr"/>
           <a:lstStyle/>
           <a:p>
-            <a:pPr indent="0" marL="0">
+            <a:pPr marL="0" indent="0">
               <a:buNone/>
             </a:pPr>
             <a:r>
@@ -8603,6 +8163,7 @@
         <a:solidFill>
           <a:srgbClr val="0C1A2E"/>
         </a:solidFill>
+        <a:effectLst/>
       </p:bgPr>
     </p:bg>
     <p:spTree>
@@ -8715,11 +8276,11 @@
           <a:bodyPr wrap="square" lIns="0" tIns="0" rIns="0" bIns="0" rtlCol="0" anchor="ctr"/>
           <a:lstStyle/>
           <a:p>
-            <a:pPr algn="ctr" indent="0" marL="0">
-              <a:buNone/>
-            </a:pPr>
-            <a:r>
-              <a:rPr lang="en-US" sz="1100" b="1" spc="200" kern="0" dirty="0">
+            <a:pPr marL="0" indent="0" algn="ctr">
+              <a:buNone/>
+            </a:pPr>
+            <a:r>
+              <a:rPr lang="en-US" sz="1100" b="1" kern="0" spc="200" dirty="0">
                 <a:solidFill>
                   <a:srgbClr val="FFFFFF"/>
                 </a:solidFill>
@@ -8754,7 +8315,7 @@
           <a:bodyPr wrap="square" lIns="0" tIns="0" rIns="0" bIns="0" rtlCol="0" anchor="ctr"/>
           <a:lstStyle/>
           <a:p>
-            <a:pPr indent="0" marL="0">
+            <a:pPr marL="0" indent="0">
               <a:buNone/>
             </a:pPr>
             <a:r>
@@ -8793,7 +8354,7 @@
           <a:bodyPr wrap="square" rtlCol="0" anchor="ctr"/>
           <a:lstStyle/>
           <a:p>
-            <a:pPr indent="0" marL="0">
+            <a:pPr marL="0" indent="0">
               <a:buNone/>
             </a:pPr>
             <a:r>
@@ -8859,7 +8420,7 @@
           <a:bodyPr wrap="square" lIns="0" tIns="0" rIns="0" bIns="0" rtlCol="0" anchor="ctr"/>
           <a:lstStyle/>
           <a:p>
-            <a:pPr indent="0" marL="0">
+            <a:pPr marL="0" indent="0">
               <a:buNone/>
             </a:pPr>
             <a:r>
@@ -8873,9 +8434,6 @@
               </a:rPr>
               <a:t>▶ </a:t>
             </a:r>
-            <a:pPr indent="0" marL="0">
-              <a:buNone/>
-            </a:pPr>
             <a:r>
               <a:rPr lang="en-US" sz="1300" b="1" dirty="0">
                 <a:solidFill>
@@ -8912,7 +8470,7 @@
           <a:bodyPr wrap="square" lIns="0" tIns="0" rIns="0" bIns="0" rtlCol="0" anchor="ctr"/>
           <a:lstStyle/>
           <a:p>
-            <a:pPr indent="0" marL="0">
+            <a:pPr marL="0" indent="0">
               <a:buNone/>
             </a:pPr>
             <a:r>
@@ -8926,9 +8484,6 @@
               </a:rPr>
               <a:t>▶ </a:t>
             </a:r>
-            <a:pPr indent="0" marL="0">
-              <a:buNone/>
-            </a:pPr>
             <a:r>
               <a:rPr lang="en-US" sz="1300" dirty="0">
                 <a:solidFill>
@@ -8990,7 +8545,7 @@
           <a:bodyPr wrap="square" lIns="0" tIns="0" rIns="0" bIns="0" rtlCol="0" anchor="ctr"/>
           <a:lstStyle/>
           <a:p>
-            <a:pPr indent="0" marL="0">
+            <a:pPr marL="0" indent="0">
               <a:buNone/>
             </a:pPr>
             <a:r>
@@ -9029,7 +8584,7 @@
           <a:bodyPr wrap="square" lIns="0" tIns="0" rIns="0" bIns="0" rtlCol="0" anchor="ctr"/>
           <a:lstStyle/>
           <a:p>
-            <a:pPr indent="0" marL="0">
+            <a:pPr marL="0" indent="0">
               <a:buNone/>
             </a:pPr>
             <a:r>
@@ -9043,9 +8598,6 @@
               </a:rPr>
               <a:t>▶ </a:t>
             </a:r>
-            <a:pPr indent="0" marL="0">
-              <a:buNone/>
-            </a:pPr>
             <a:r>
               <a:rPr lang="en-US" sz="1300" dirty="0">
                 <a:solidFill>
@@ -9107,7 +8659,7 @@
           <a:bodyPr wrap="square" lIns="0" tIns="0" rIns="0" bIns="0" rtlCol="0" anchor="ctr"/>
           <a:lstStyle/>
           <a:p>
-            <a:pPr indent="0" marL="0">
+            <a:pPr marL="0" indent="0">
               <a:buNone/>
             </a:pPr>
             <a:r>
@@ -9173,7 +8725,7 @@
           <a:bodyPr wrap="square" lIns="0" tIns="0" rIns="0" bIns="0" rtlCol="0" anchor="ctr"/>
           <a:lstStyle/>
           <a:p>
-            <a:pPr indent="0" marL="0">
+            <a:pPr marL="0" indent="0">
               <a:buNone/>
             </a:pPr>
             <a:r>
@@ -9237,7 +8789,7 @@
           <a:bodyPr wrap="square" lIns="0" tIns="0" rIns="0" bIns="0" rtlCol="0" anchor="ctr"/>
           <a:lstStyle/>
           <a:p>
-            <a:pPr indent="0" marL="0">
+            <a:pPr marL="0" indent="0">
               <a:buNone/>
             </a:pPr>
             <a:r>
@@ -9271,6 +8823,7 @@
         <a:solidFill>
           <a:srgbClr val="0C1A2E"/>
         </a:solidFill>
+        <a:effectLst/>
       </p:bgPr>
     </p:bg>
     <p:spTree>
@@ -9383,11 +8936,11 @@
           <a:bodyPr wrap="square" lIns="0" tIns="0" rIns="0" bIns="0" rtlCol="0" anchor="ctr"/>
           <a:lstStyle/>
           <a:p>
-            <a:pPr algn="ctr" indent="0" marL="0">
-              <a:buNone/>
-            </a:pPr>
-            <a:r>
-              <a:rPr lang="en-US" sz="1100" b="1" spc="200" kern="0" dirty="0">
+            <a:pPr marL="0" indent="0" algn="ctr">
+              <a:buNone/>
+            </a:pPr>
+            <a:r>
+              <a:rPr lang="en-US" sz="1100" b="1" kern="0" spc="200" dirty="0">
                 <a:solidFill>
                   <a:srgbClr val="FFFFFF"/>
                 </a:solidFill>
@@ -9422,7 +8975,7 @@
           <a:bodyPr wrap="square" lIns="0" tIns="0" rIns="0" bIns="0" rtlCol="0" anchor="ctr"/>
           <a:lstStyle/>
           <a:p>
-            <a:pPr indent="0" marL="0">
+            <a:pPr marL="0" indent="0">
               <a:buNone/>
             </a:pPr>
             <a:r>
@@ -9461,7 +9014,7 @@
           <a:bodyPr wrap="square" rtlCol="0" anchor="ctr"/>
           <a:lstStyle/>
           <a:p>
-            <a:pPr indent="0" marL="0">
+            <a:pPr marL="0" indent="0">
               <a:buNone/>
             </a:pPr>
             <a:r>
@@ -9527,7 +9080,7 @@
           <a:bodyPr wrap="square" lIns="0" tIns="0" rIns="0" bIns="0" rtlCol="0" anchor="ctr"/>
           <a:lstStyle/>
           <a:p>
-            <a:pPr indent="0" marL="0">
+            <a:pPr marL="0" indent="0">
               <a:buNone/>
             </a:pPr>
             <a:r>
@@ -9541,9 +9094,6 @@
               </a:rPr>
               <a:t>▶ </a:t>
             </a:r>
-            <a:pPr indent="0" marL="0">
-              <a:buNone/>
-            </a:pPr>
             <a:r>
               <a:rPr lang="en-US" sz="1300" b="1" dirty="0">
                 <a:solidFill>
@@ -9580,7 +9130,7 @@
           <a:bodyPr wrap="square" lIns="0" tIns="0" rIns="0" bIns="0" rtlCol="0" anchor="ctr"/>
           <a:lstStyle/>
           <a:p>
-            <a:pPr indent="0" marL="0">
+            <a:pPr marL="0" indent="0">
               <a:buNone/>
             </a:pPr>
             <a:r>
@@ -9594,9 +9144,6 @@
               </a:rPr>
               <a:t>▶ </a:t>
             </a:r>
-            <a:pPr indent="0" marL="0">
-              <a:buNone/>
-            </a:pPr>
             <a:r>
               <a:rPr lang="en-US" sz="1300" dirty="0">
                 <a:solidFill>
@@ -9658,7 +9205,7 @@
           <a:bodyPr wrap="square" lIns="0" tIns="0" rIns="0" bIns="0" rtlCol="0" anchor="ctr"/>
           <a:lstStyle/>
           <a:p>
-            <a:pPr indent="0" marL="0">
+            <a:pPr marL="0" indent="0">
               <a:buNone/>
             </a:pPr>
             <a:r>
@@ -9722,7 +9269,7 @@
           <a:bodyPr wrap="square" lIns="0" tIns="0" rIns="0" bIns="0" rtlCol="0" anchor="ctr"/>
           <a:lstStyle/>
           <a:p>
-            <a:pPr indent="0" marL="0">
+            <a:pPr marL="0" indent="0">
               <a:buNone/>
             </a:pPr>
             <a:r>
@@ -9761,7 +9308,7 @@
           <a:bodyPr wrap="square" lIns="0" tIns="0" rIns="0" bIns="0" rtlCol="0" anchor="ctr"/>
           <a:lstStyle/>
           <a:p>
-            <a:pPr indent="0" marL="0">
+            <a:pPr marL="0" indent="0">
               <a:buNone/>
             </a:pPr>
             <a:r>
@@ -9775,9 +9322,6 @@
               </a:rPr>
               <a:t>▶ </a:t>
             </a:r>
-            <a:pPr indent="0" marL="0">
-              <a:buNone/>
-            </a:pPr>
             <a:r>
               <a:rPr lang="en-US" sz="1300" dirty="0">
                 <a:solidFill>
@@ -9841,7 +9385,7 @@
           <a:bodyPr wrap="square" lIns="0" tIns="0" rIns="0" bIns="0" rtlCol="0" anchor="ctr"/>
           <a:lstStyle/>
           <a:p>
-            <a:pPr indent="0" marL="0">
+            <a:pPr marL="0" indent="0">
               <a:buNone/>
             </a:pPr>
             <a:r>
@@ -9905,7 +9449,7 @@
           <a:bodyPr wrap="square" lIns="0" tIns="0" rIns="0" bIns="0" rtlCol="0" anchor="ctr"/>
           <a:lstStyle/>
           <a:p>
-            <a:pPr indent="0" marL="0">
+            <a:pPr marL="0" indent="0">
               <a:buNone/>
             </a:pPr>
             <a:r>
@@ -9939,6 +9483,7 @@
         <a:solidFill>
           <a:srgbClr val="0C1A2E"/>
         </a:solidFill>
+        <a:effectLst/>
       </p:bgPr>
     </p:bg>
     <p:spTree>
@@ -10051,11 +9596,11 @@
           <a:bodyPr wrap="square" lIns="0" tIns="0" rIns="0" bIns="0" rtlCol="0" anchor="ctr"/>
           <a:lstStyle/>
           <a:p>
-            <a:pPr algn="ctr" indent="0" marL="0">
-              <a:buNone/>
-            </a:pPr>
-            <a:r>
-              <a:rPr lang="en-US" sz="1100" b="1" spc="200" kern="0" dirty="0">
+            <a:pPr marL="0" indent="0" algn="ctr">
+              <a:buNone/>
+            </a:pPr>
+            <a:r>
+              <a:rPr lang="en-US" sz="1100" b="1" kern="0" spc="200" dirty="0">
                 <a:solidFill>
                   <a:srgbClr val="FFFFFF"/>
                 </a:solidFill>
@@ -10090,7 +9635,7 @@
           <a:bodyPr wrap="square" lIns="0" tIns="0" rIns="0" bIns="0" rtlCol="0" anchor="ctr"/>
           <a:lstStyle/>
           <a:p>
-            <a:pPr indent="0" marL="0">
+            <a:pPr marL="0" indent="0">
               <a:buNone/>
             </a:pPr>
             <a:r>
@@ -10129,7 +9674,7 @@
           <a:bodyPr wrap="square" rtlCol="0" anchor="ctr"/>
           <a:lstStyle/>
           <a:p>
-            <a:pPr indent="0" marL="0">
+            <a:pPr marL="0" indent="0">
               <a:buNone/>
             </a:pPr>
             <a:r>
@@ -10195,7 +9740,7 @@
           <a:bodyPr wrap="square" lIns="0" tIns="0" rIns="0" bIns="0" rtlCol="0" anchor="ctr"/>
           <a:lstStyle/>
           <a:p>
-            <a:pPr indent="0" marL="0">
+            <a:pPr marL="0" indent="0">
               <a:buNone/>
             </a:pPr>
             <a:r>
@@ -10209,9 +9754,6 @@
               </a:rPr>
               <a:t>▶ </a:t>
             </a:r>
-            <a:pPr indent="0" marL="0">
-              <a:buNone/>
-            </a:pPr>
             <a:r>
               <a:rPr lang="en-US" sz="1300" b="1" dirty="0">
                 <a:solidFill>
@@ -10248,7 +9790,7 @@
           <a:bodyPr wrap="square" lIns="0" tIns="0" rIns="0" bIns="0" rtlCol="0" anchor="ctr"/>
           <a:lstStyle/>
           <a:p>
-            <a:pPr indent="0" marL="0">
+            <a:pPr marL="0" indent="0">
               <a:buNone/>
             </a:pPr>
             <a:r>
@@ -10262,9 +9804,6 @@
               </a:rPr>
               <a:t>▶ </a:t>
             </a:r>
-            <a:pPr indent="0" marL="0">
-              <a:buNone/>
-            </a:pPr>
             <a:r>
               <a:rPr lang="en-US" sz="1300" dirty="0">
                 <a:solidFill>
@@ -10326,7 +9865,7 @@
           <a:bodyPr wrap="square" lIns="0" tIns="0" rIns="0" bIns="0" rtlCol="0" anchor="ctr"/>
           <a:lstStyle/>
           <a:p>
-            <a:pPr indent="0" marL="0">
+            <a:pPr marL="0" indent="0">
               <a:buNone/>
             </a:pPr>
             <a:r>
@@ -10390,7 +9929,7 @@
           <a:bodyPr wrap="square" lIns="0" tIns="0" rIns="0" bIns="0" rtlCol="0" anchor="ctr"/>
           <a:lstStyle/>
           <a:p>
-            <a:pPr indent="0" marL="0">
+            <a:pPr marL="0" indent="0">
               <a:buNone/>
             </a:pPr>
             <a:r>
@@ -10454,7 +9993,7 @@
           <a:bodyPr wrap="square" lIns="0" tIns="0" rIns="0" bIns="0" rtlCol="0" anchor="ctr"/>
           <a:lstStyle/>
           <a:p>
-            <a:pPr indent="0" marL="0">
+            <a:pPr marL="0" indent="0">
               <a:buNone/>
             </a:pPr>
             <a:r>
@@ -10493,7 +10032,7 @@
           <a:bodyPr wrap="square" lIns="0" tIns="0" rIns="0" bIns="0" rtlCol="0" anchor="ctr"/>
           <a:lstStyle/>
           <a:p>
-            <a:pPr indent="0" marL="0">
+            <a:pPr marL="0" indent="0">
               <a:buNone/>
             </a:pPr>
             <a:r>
@@ -10507,9 +10046,6 @@
               </a:rPr>
               <a:t>▶ </a:t>
             </a:r>
-            <a:pPr indent="0" marL="0">
-              <a:buNone/>
-            </a:pPr>
             <a:r>
               <a:rPr lang="en-US" sz="1300" dirty="0">
                 <a:solidFill>
@@ -10573,7 +10109,7 @@
           <a:bodyPr wrap="square" lIns="0" tIns="0" rIns="0" bIns="0" rtlCol="0" anchor="ctr"/>
           <a:lstStyle/>
           <a:p>
-            <a:pPr indent="0" marL="0">
+            <a:pPr marL="0" indent="0">
               <a:buNone/>
             </a:pPr>
             <a:r>
@@ -10637,7 +10173,7 @@
           <a:bodyPr wrap="square" lIns="0" tIns="0" rIns="0" bIns="0" rtlCol="0" anchor="ctr"/>
           <a:lstStyle/>
           <a:p>
-            <a:pPr indent="0" marL="0">
+            <a:pPr marL="0" indent="0">
               <a:buNone/>
             </a:pPr>
             <a:r>
@@ -10671,6 +10207,7 @@
         <a:solidFill>
           <a:srgbClr val="1A0E2E"/>
         </a:solidFill>
+        <a:effectLst/>
       </p:bgPr>
     </p:bg>
     <p:spTree>
@@ -10760,7 +10297,7 @@
           <a:bodyPr wrap="square" rtlCol="0" anchor="ctr"/>
           <a:lstStyle/>
           <a:p>
-            <a:pPr indent="0" marL="0">
+            <a:pPr marL="0" indent="0">
               <a:buNone/>
             </a:pPr>
             <a:r>
@@ -10799,11 +10336,11 @@
           <a:bodyPr wrap="square" rtlCol="0" anchor="ctr"/>
           <a:lstStyle/>
           <a:p>
-            <a:pPr indent="0" marL="0">
-              <a:buNone/>
-            </a:pPr>
-            <a:r>
-              <a:rPr lang="en-US" sz="1100" b="1" spc="400" kern="0" dirty="0">
+            <a:pPr marL="0" indent="0">
+              <a:buNone/>
+            </a:pPr>
+            <a:r>
+              <a:rPr lang="en-US" sz="1100" b="1" kern="0" spc="400" dirty="0">
                 <a:solidFill>
                   <a:srgbClr val="C4B5FD"/>
                 </a:solidFill>
@@ -10838,7 +10375,7 @@
           <a:bodyPr wrap="square" rtlCol="0" anchor="ctr"/>
           <a:lstStyle/>
           <a:p>
-            <a:pPr indent="0" marL="0">
+            <a:pPr marL="0" indent="0">
               <a:buNone/>
             </a:pPr>
             <a:r>
@@ -10877,7 +10414,7 @@
           <a:bodyPr wrap="square" rtlCol="0" anchor="ctr"/>
           <a:lstStyle/>
           <a:p>
-            <a:pPr indent="0" marL="0">
+            <a:pPr marL="0" indent="0">
               <a:buNone/>
             </a:pPr>
             <a:r>
@@ -10916,7 +10453,7 @@
           <a:bodyPr wrap="square" rtlCol="0" anchor="ctr"/>
           <a:lstStyle/>
           <a:p>
-            <a:pPr indent="0" marL="0">
+            <a:pPr marL="0" indent="0">
               <a:buNone/>
             </a:pPr>
             <a:r>
@@ -10950,6 +10487,7 @@
         <a:solidFill>
           <a:srgbClr val="F5F3FF"/>
         </a:solidFill>
+        <a:effectLst/>
       </p:bgPr>
     </p:bg>
     <p:spTree>
@@ -11037,7 +10575,7 @@
           <a:bodyPr wrap="square" lIns="0" tIns="0" rIns="0" bIns="0" rtlCol="0" anchor="ctr"/>
           <a:lstStyle/>
           <a:p>
-            <a:pPr indent="0" marL="0">
+            <a:pPr marL="0" indent="0">
               <a:buNone/>
             </a:pPr>
             <a:r>
@@ -11076,7 +10614,7 @@
           <a:bodyPr wrap="square" lIns="0" tIns="0" rIns="0" bIns="0" rtlCol="0" anchor="ctr"/>
           <a:lstStyle/>
           <a:p>
-            <a:pPr indent="0" marL="0">
+            <a:pPr marL="0" indent="0">
               <a:buNone/>
             </a:pPr>
             <a:r>
@@ -11090,9 +10628,6 @@
               </a:rPr>
               <a:t>❯ </a:t>
             </a:r>
-            <a:pPr indent="0" marL="0">
-              <a:buNone/>
-            </a:pPr>
             <a:r>
               <a:rPr lang="en-US" sz="1350" b="1" dirty="0">
                 <a:solidFill>
@@ -11129,7 +10664,7 @@
           <a:bodyPr wrap="square" lIns="0" tIns="0" rIns="0" bIns="0" rtlCol="0" anchor="ctr"/>
           <a:lstStyle/>
           <a:p>
-            <a:pPr indent="0" marL="0">
+            <a:pPr marL="0" indent="0">
               <a:buNone/>
             </a:pPr>
             <a:r>
@@ -11143,9 +10678,6 @@
               </a:rPr>
               <a:t>❯ </a:t>
             </a:r>
-            <a:pPr indent="0" marL="0">
-              <a:buNone/>
-            </a:pPr>
             <a:r>
               <a:rPr lang="en-US" sz="1350" b="1" dirty="0">
                 <a:solidFill>
@@ -11207,7 +10739,7 @@
           <a:bodyPr wrap="square" lIns="0" tIns="0" rIns="0" bIns="0" rtlCol="0" anchor="ctr"/>
           <a:lstStyle/>
           <a:p>
-            <a:pPr indent="0" marL="0">
+            <a:pPr marL="0" indent="0">
               <a:buNone/>
             </a:pPr>
             <a:r>
@@ -11246,7 +10778,7 @@
           <a:bodyPr wrap="square" lIns="0" tIns="0" rIns="0" bIns="0" rtlCol="0" anchor="ctr"/>
           <a:lstStyle/>
           <a:p>
-            <a:pPr indent="0" marL="0">
+            <a:pPr marL="0" indent="0">
               <a:buNone/>
             </a:pPr>
             <a:r>
@@ -11260,9 +10792,6 @@
               </a:rPr>
               <a:t>❯ </a:t>
             </a:r>
-            <a:pPr indent="0" marL="0">
-              <a:buNone/>
-            </a:pPr>
             <a:r>
               <a:rPr lang="en-US" sz="1350" b="1" dirty="0">
                 <a:solidFill>
@@ -11324,7 +10853,7 @@
           <a:bodyPr wrap="square" lIns="0" tIns="0" rIns="0" bIns="0" rtlCol="0" anchor="ctr"/>
           <a:lstStyle/>
           <a:p>
-            <a:pPr indent="0" marL="0">
+            <a:pPr marL="0" indent="0">
               <a:buNone/>
             </a:pPr>
             <a:r>
@@ -11363,7 +10892,7 @@
           <a:bodyPr wrap="square" lIns="0" tIns="0" rIns="0" bIns="0" rtlCol="0" anchor="ctr"/>
           <a:lstStyle/>
           <a:p>
-            <a:pPr indent="0" marL="0">
+            <a:pPr marL="0" indent="0">
               <a:buNone/>
             </a:pPr>
             <a:r>
@@ -11377,9 +10906,6 @@
               </a:rPr>
               <a:t>❯ </a:t>
             </a:r>
-            <a:pPr indent="0" marL="0">
-              <a:buNone/>
-            </a:pPr>
             <a:r>
               <a:rPr lang="en-US" sz="1350" dirty="0">
                 <a:solidFill>
@@ -11443,7 +10969,7 @@
           <a:bodyPr wrap="square" lIns="0" tIns="0" rIns="0" bIns="0" rtlCol="0" anchor="ctr"/>
           <a:lstStyle/>
           <a:p>
-            <a:pPr indent="0" marL="0">
+            <a:pPr marL="0" indent="0">
               <a:buNone/>
             </a:pPr>
             <a:r>
@@ -11532,7 +11058,7 @@
           <a:bodyPr wrap="square" lIns="0" tIns="0" rIns="0" bIns="0" rtlCol="0" anchor="ctr"/>
           <a:lstStyle/>
           <a:p>
-            <a:pPr indent="0" marL="0">
+            <a:pPr marL="0" indent="0">
               <a:buNone/>
             </a:pPr>
             <a:r>
@@ -11566,6 +11092,7 @@
         <a:solidFill>
           <a:srgbClr val="F5F3FF"/>
         </a:solidFill>
+        <a:effectLst/>
       </p:bgPr>
     </p:bg>
     <p:spTree>
@@ -11653,7 +11180,7 @@
           <a:bodyPr wrap="square" lIns="0" tIns="0" rIns="0" bIns="0" rtlCol="0" anchor="ctr"/>
           <a:lstStyle/>
           <a:p>
-            <a:pPr indent="0" marL="0">
+            <a:pPr marL="0" indent="0">
               <a:buNone/>
             </a:pPr>
             <a:r>
@@ -11692,7 +11219,7 @@
           <a:bodyPr wrap="square" lIns="0" tIns="0" rIns="0" bIns="0" rtlCol="0" anchor="ctr"/>
           <a:lstStyle/>
           <a:p>
-            <a:pPr indent="0" marL="0">
+            <a:pPr marL="0" indent="0">
               <a:buNone/>
             </a:pPr>
             <a:r>
@@ -11734,7 +11261,7 @@
             <a:prstDash val="solid"/>
           </a:ln>
           <a:effectLst>
-            <a:outerShdw sx="100000" sy="100000" kx="0" ky="0" algn="bl" rotWithShape="0" blurRad="101600" dist="38100" dir="8100000">
+            <a:outerShdw blurRad="101600" dist="38100" dir="8100000" algn="bl" rotWithShape="0">
               <a:srgbClr val="000000">
                 <a:alpha val="20000"/>
               </a:srgbClr>
@@ -11788,7 +11315,7 @@
           <a:bodyPr wrap="square" lIns="0" tIns="0" rIns="0" bIns="0" rtlCol="0" anchor="t"/>
           <a:lstStyle/>
           <a:p>
-            <a:pPr indent="0" marL="0">
+            <a:pPr marL="0" indent="0">
               <a:buNone/>
             </a:pPr>
             <a:r>
@@ -11805,7 +11332,7 @@
             <a:endParaRPr lang="en-US" sz="1300" dirty="0"/>
           </a:p>
           <a:p>
-            <a:pPr indent="0" marL="0">
+            <a:pPr marL="0" indent="0">
               <a:buNone/>
             </a:pPr>
             <a:r>
@@ -11822,7 +11349,7 @@
             <a:endParaRPr lang="en-US" sz="1300" dirty="0"/>
           </a:p>
           <a:p>
-            <a:pPr indent="0" marL="0">
+            <a:pPr marL="0" indent="0">
               <a:buNone/>
             </a:pPr>
             <a:r>
@@ -11839,7 +11366,7 @@
             <a:endParaRPr lang="en-US" sz="1300" dirty="0"/>
           </a:p>
           <a:p>
-            <a:pPr indent="0" marL="0">
+            <a:pPr marL="0" indent="0">
               <a:buNone/>
             </a:pPr>
             <a:r>
@@ -11856,7 +11383,7 @@
             <a:endParaRPr lang="en-US" sz="1300" dirty="0"/>
           </a:p>
           <a:p>
-            <a:pPr indent="0" marL="0">
+            <a:pPr marL="0" indent="0">
               <a:buNone/>
             </a:pPr>
             <a:r>
@@ -11873,7 +11400,7 @@
             <a:endParaRPr lang="en-US" sz="1300" dirty="0"/>
           </a:p>
           <a:p>
-            <a:pPr indent="0" marL="0">
+            <a:pPr marL="0" indent="0">
               <a:buNone/>
             </a:pPr>
             <a:r>
@@ -11890,7 +11417,7 @@
             <a:endParaRPr lang="en-US" sz="1300" dirty="0"/>
           </a:p>
           <a:p>
-            <a:pPr indent="0" marL="0">
+            <a:pPr marL="0" indent="0">
               <a:buNone/>
             </a:pPr>
             <a:r>
@@ -11907,7 +11434,7 @@
             <a:endParaRPr lang="en-US" sz="1300" dirty="0"/>
           </a:p>
           <a:p>
-            <a:pPr indent="0" marL="0">
+            <a:pPr marL="0" indent="0">
               <a:buNone/>
             </a:pPr>
             <a:r>
@@ -11924,13 +11451,13 @@
             <a:endParaRPr lang="en-US" sz="1300" dirty="0"/>
           </a:p>
           <a:p>
-            <a:pPr indent="0" marL="0">
+            <a:pPr marL="0" indent="0">
               <a:buNone/>
             </a:pPr>
             <a:endParaRPr lang="en-US" sz="1300" dirty="0"/>
           </a:p>
           <a:p>
-            <a:pPr indent="0" marL="0">
+            <a:pPr marL="0" indent="0">
               <a:buNone/>
             </a:pPr>
             <a:r>
@@ -11947,7 +11474,7 @@
             <a:endParaRPr lang="en-US" sz="1300" dirty="0"/>
           </a:p>
           <a:p>
-            <a:pPr indent="0" marL="0">
+            <a:pPr marL="0" indent="0">
               <a:buNone/>
             </a:pPr>
             <a:r>
@@ -11964,7 +11491,7 @@
             <a:endParaRPr lang="en-US" sz="1300" dirty="0"/>
           </a:p>
           <a:p>
-            <a:pPr indent="0" marL="0">
+            <a:pPr marL="0" indent="0">
               <a:buNone/>
             </a:pPr>
             <a:r>
@@ -11981,7 +11508,7 @@
             <a:endParaRPr lang="en-US" sz="1300" dirty="0"/>
           </a:p>
           <a:p>
-            <a:pPr indent="0" marL="0">
+            <a:pPr marL="0" indent="0">
               <a:buNone/>
             </a:pPr>
             <a:r>
@@ -11998,7 +11525,7 @@
             <a:endParaRPr lang="en-US" sz="1300" dirty="0"/>
           </a:p>
           <a:p>
-            <a:pPr indent="0" marL="0">
+            <a:pPr marL="0" indent="0">
               <a:buNone/>
             </a:pPr>
             <a:r>
@@ -12015,7 +11542,7 @@
             <a:endParaRPr lang="en-US" sz="1300" dirty="0"/>
           </a:p>
           <a:p>
-            <a:pPr indent="0" marL="0">
+            <a:pPr marL="0" indent="0">
               <a:buNone/>
             </a:pPr>
             <a:r>
@@ -12032,7 +11559,7 @@
             <a:endParaRPr lang="en-US" sz="1300" dirty="0"/>
           </a:p>
           <a:p>
-            <a:pPr indent="0" marL="0">
+            <a:pPr marL="0" indent="0">
               <a:buNone/>
             </a:pPr>
             <a:r>
@@ -12098,7 +11625,7 @@
           <a:bodyPr wrap="square" lIns="0" tIns="0" rIns="0" bIns="0" rtlCol="0" anchor="ctr"/>
           <a:lstStyle/>
           <a:p>
-            <a:pPr indent="0" marL="0">
+            <a:pPr marL="0" indent="0">
               <a:buNone/>
             </a:pPr>
             <a:r>
@@ -12187,7 +11714,7 @@
           <a:bodyPr wrap="square" lIns="0" tIns="0" rIns="0" bIns="0" rtlCol="0" anchor="ctr"/>
           <a:lstStyle/>
           <a:p>
-            <a:pPr indent="0" marL="0">
+            <a:pPr marL="0" indent="0">
               <a:buNone/>
             </a:pPr>
             <a:r>
@@ -12221,6 +11748,7 @@
         <a:solidFill>
           <a:srgbClr val="F5F3FF"/>
         </a:solidFill>
+        <a:effectLst/>
       </p:bgPr>
     </p:bg>
     <p:spTree>
@@ -12308,7 +11836,7 @@
           <a:bodyPr wrap="square" lIns="0" tIns="0" rIns="0" bIns="0" rtlCol="0" anchor="ctr"/>
           <a:lstStyle/>
           <a:p>
-            <a:pPr indent="0" marL="0">
+            <a:pPr marL="0" indent="0">
               <a:buNone/>
             </a:pPr>
             <a:r>
@@ -12372,7 +11900,7 @@
           <a:bodyPr wrap="square" lIns="0" tIns="0" rIns="0" bIns="0" rtlCol="0" anchor="ctr"/>
           <a:lstStyle/>
           <a:p>
-            <a:pPr algn="ctr" indent="0" marL="0">
+            <a:pPr marL="0" indent="0" algn="ctr">
               <a:buNone/>
             </a:pPr>
             <a:r>
@@ -12411,7 +11939,7 @@
           <a:bodyPr wrap="square" lIns="0" tIns="0" rIns="0" bIns="0" rtlCol="0" anchor="ctr"/>
           <a:lstStyle/>
           <a:p>
-            <a:pPr indent="0" marL="0">
+            <a:pPr marL="0" indent="0">
               <a:buNone/>
             </a:pPr>
             <a:r>
@@ -12450,7 +11978,7 @@
           <a:bodyPr wrap="square" lIns="0" tIns="0" rIns="0" bIns="0" rtlCol="0" anchor="ctr"/>
           <a:lstStyle/>
           <a:p>
-            <a:pPr indent="0" marL="0">
+            <a:pPr marL="0" indent="0">
               <a:buNone/>
             </a:pPr>
             <a:r>
@@ -12514,7 +12042,7 @@
           <a:bodyPr wrap="square" lIns="0" tIns="0" rIns="0" bIns="0" rtlCol="0" anchor="ctr"/>
           <a:lstStyle/>
           <a:p>
-            <a:pPr algn="ctr" indent="0" marL="0">
+            <a:pPr marL="0" indent="0" algn="ctr">
               <a:buNone/>
             </a:pPr>
             <a:r>
@@ -12553,7 +12081,7 @@
           <a:bodyPr wrap="square" lIns="0" tIns="0" rIns="0" bIns="0" rtlCol="0" anchor="ctr"/>
           <a:lstStyle/>
           <a:p>
-            <a:pPr indent="0" marL="0">
+            <a:pPr marL="0" indent="0">
               <a:buNone/>
             </a:pPr>
             <a:r>
@@ -12592,7 +12120,7 @@
           <a:bodyPr wrap="square" lIns="0" tIns="0" rIns="0" bIns="0" rtlCol="0" anchor="ctr"/>
           <a:lstStyle/>
           <a:p>
-            <a:pPr indent="0" marL="0">
+            <a:pPr marL="0" indent="0">
               <a:buNone/>
             </a:pPr>
             <a:r>
@@ -12656,7 +12184,7 @@
           <a:bodyPr wrap="square" lIns="0" tIns="0" rIns="0" bIns="0" rtlCol="0" anchor="ctr"/>
           <a:lstStyle/>
           <a:p>
-            <a:pPr algn="ctr" indent="0" marL="0">
+            <a:pPr marL="0" indent="0" algn="ctr">
               <a:buNone/>
             </a:pPr>
             <a:r>
@@ -12695,7 +12223,7 @@
           <a:bodyPr wrap="square" lIns="0" tIns="0" rIns="0" bIns="0" rtlCol="0" anchor="ctr"/>
           <a:lstStyle/>
           <a:p>
-            <a:pPr indent="0" marL="0">
+            <a:pPr marL="0" indent="0">
               <a:buNone/>
             </a:pPr>
             <a:r>
@@ -12734,7 +12262,7 @@
           <a:bodyPr wrap="square" lIns="0" tIns="0" rIns="0" bIns="0" rtlCol="0" anchor="ctr"/>
           <a:lstStyle/>
           <a:p>
-            <a:pPr indent="0" marL="0">
+            <a:pPr marL="0" indent="0">
               <a:buNone/>
             </a:pPr>
             <a:r>
@@ -12798,7 +12326,7 @@
           <a:bodyPr wrap="square" lIns="0" tIns="0" rIns="0" bIns="0" rtlCol="0" anchor="ctr"/>
           <a:lstStyle/>
           <a:p>
-            <a:pPr algn="ctr" indent="0" marL="0">
+            <a:pPr marL="0" indent="0" algn="ctr">
               <a:buNone/>
             </a:pPr>
             <a:r>
@@ -12837,7 +12365,7 @@
           <a:bodyPr wrap="square" lIns="0" tIns="0" rIns="0" bIns="0" rtlCol="0" anchor="ctr"/>
           <a:lstStyle/>
           <a:p>
-            <a:pPr indent="0" marL="0">
+            <a:pPr marL="0" indent="0">
               <a:buNone/>
             </a:pPr>
             <a:r>
@@ -12876,7 +12404,7 @@
           <a:bodyPr wrap="square" lIns="0" tIns="0" rIns="0" bIns="0" rtlCol="0" anchor="ctr"/>
           <a:lstStyle/>
           <a:p>
-            <a:pPr indent="0" marL="0">
+            <a:pPr marL="0" indent="0">
               <a:buNone/>
             </a:pPr>
             <a:r>
@@ -12940,7 +12468,7 @@
           <a:bodyPr wrap="square" lIns="0" tIns="0" rIns="0" bIns="0" rtlCol="0" anchor="ctr"/>
           <a:lstStyle/>
           <a:p>
-            <a:pPr algn="ctr" indent="0" marL="0">
+            <a:pPr marL="0" indent="0" algn="ctr">
               <a:buNone/>
             </a:pPr>
             <a:r>
@@ -12979,7 +12507,7 @@
           <a:bodyPr wrap="square" lIns="0" tIns="0" rIns="0" bIns="0" rtlCol="0" anchor="ctr"/>
           <a:lstStyle/>
           <a:p>
-            <a:pPr indent="0" marL="0">
+            <a:pPr marL="0" indent="0">
               <a:buNone/>
             </a:pPr>
             <a:r>
@@ -13018,7 +12546,7 @@
           <a:bodyPr wrap="square" lIns="0" tIns="0" rIns="0" bIns="0" rtlCol="0" anchor="ctr"/>
           <a:lstStyle/>
           <a:p>
-            <a:pPr indent="0" marL="0">
+            <a:pPr marL="0" indent="0">
               <a:buNone/>
             </a:pPr>
             <a:r>
@@ -13082,7 +12610,7 @@
           <a:bodyPr wrap="square" lIns="0" tIns="0" rIns="0" bIns="0" rtlCol="0" anchor="ctr"/>
           <a:lstStyle/>
           <a:p>
-            <a:pPr algn="ctr" indent="0" marL="0">
+            <a:pPr marL="0" indent="0" algn="ctr">
               <a:buNone/>
             </a:pPr>
             <a:r>
@@ -13121,7 +12649,7 @@
           <a:bodyPr wrap="square" lIns="0" tIns="0" rIns="0" bIns="0" rtlCol="0" anchor="ctr"/>
           <a:lstStyle/>
           <a:p>
-            <a:pPr indent="0" marL="0">
+            <a:pPr marL="0" indent="0">
               <a:buNone/>
             </a:pPr>
             <a:r>
@@ -13160,7 +12688,7 @@
           <a:bodyPr wrap="square" lIns="0" tIns="0" rIns="0" bIns="0" rtlCol="0" anchor="ctr"/>
           <a:lstStyle/>
           <a:p>
-            <a:pPr indent="0" marL="0">
+            <a:pPr marL="0" indent="0">
               <a:buNone/>
             </a:pPr>
             <a:r>
@@ -13224,7 +12752,7 @@
           <a:bodyPr wrap="square" lIns="0" tIns="0" rIns="0" bIns="0" rtlCol="0" anchor="ctr"/>
           <a:lstStyle/>
           <a:p>
-            <a:pPr algn="ctr" indent="0" marL="0">
+            <a:pPr marL="0" indent="0" algn="ctr">
               <a:buNone/>
             </a:pPr>
             <a:r>
@@ -13263,7 +12791,7 @@
           <a:bodyPr wrap="square" lIns="0" tIns="0" rIns="0" bIns="0" rtlCol="0" anchor="ctr"/>
           <a:lstStyle/>
           <a:p>
-            <a:pPr indent="0" marL="0">
+            <a:pPr marL="0" indent="0">
               <a:buNone/>
             </a:pPr>
             <a:r>
@@ -13302,7 +12830,7 @@
           <a:bodyPr wrap="square" lIns="0" tIns="0" rIns="0" bIns="0" rtlCol="0" anchor="ctr"/>
           <a:lstStyle/>
           <a:p>
-            <a:pPr indent="0" marL="0">
+            <a:pPr marL="0" indent="0">
               <a:buNone/>
             </a:pPr>
             <a:r>
@@ -13391,7 +12919,7 @@
           <a:bodyPr wrap="square" lIns="0" tIns="0" rIns="0" bIns="0" rtlCol="0" anchor="ctr"/>
           <a:lstStyle/>
           <a:p>
-            <a:pPr indent="0" marL="0">
+            <a:pPr marL="0" indent="0">
               <a:buNone/>
             </a:pPr>
             <a:r>
@@ -13425,6 +12953,7 @@
         <a:solidFill>
           <a:srgbClr val="0C1A2E"/>
         </a:solidFill>
+        <a:effectLst/>
       </p:bgPr>
     </p:bg>
     <p:spTree>
@@ -13537,11 +13066,11 @@
           <a:bodyPr wrap="square" lIns="0" tIns="0" rIns="0" bIns="0" rtlCol="0" anchor="ctr"/>
           <a:lstStyle/>
           <a:p>
-            <a:pPr algn="ctr" indent="0" marL="0">
-              <a:buNone/>
-            </a:pPr>
-            <a:r>
-              <a:rPr lang="en-US" sz="1100" b="1" spc="200" kern="0" dirty="0">
+            <a:pPr marL="0" indent="0" algn="ctr">
+              <a:buNone/>
+            </a:pPr>
+            <a:r>
+              <a:rPr lang="en-US" sz="1100" b="1" kern="0" spc="200" dirty="0">
                 <a:solidFill>
                   <a:srgbClr val="FFFFFF"/>
                 </a:solidFill>
@@ -13576,7 +13105,7 @@
           <a:bodyPr wrap="square" lIns="0" tIns="0" rIns="0" bIns="0" rtlCol="0" anchor="ctr"/>
           <a:lstStyle/>
           <a:p>
-            <a:pPr indent="0" marL="0">
+            <a:pPr marL="0" indent="0">
               <a:buNone/>
             </a:pPr>
             <a:r>
@@ -13615,7 +13144,7 @@
           <a:bodyPr wrap="square" rtlCol="0" anchor="ctr"/>
           <a:lstStyle/>
           <a:p>
-            <a:pPr indent="0" marL="0">
+            <a:pPr marL="0" indent="0">
               <a:buNone/>
             </a:pPr>
             <a:r>
@@ -13681,7 +13210,7 @@
           <a:bodyPr wrap="square" lIns="0" tIns="0" rIns="0" bIns="0" rtlCol="0" anchor="ctr"/>
           <a:lstStyle/>
           <a:p>
-            <a:pPr indent="0" marL="0">
+            <a:pPr marL="0" indent="0">
               <a:buNone/>
             </a:pPr>
             <a:r>
@@ -13695,9 +13224,6 @@
               </a:rPr>
               <a:t>▶ </a:t>
             </a:r>
-            <a:pPr indent="0" marL="0">
-              <a:buNone/>
-            </a:pPr>
             <a:r>
               <a:rPr lang="en-US" sz="1300" b="1" dirty="0">
                 <a:solidFill>
@@ -13734,7 +13260,7 @@
           <a:bodyPr wrap="square" lIns="0" tIns="0" rIns="0" bIns="0" rtlCol="0" anchor="ctr"/>
           <a:lstStyle/>
           <a:p>
-            <a:pPr indent="0" marL="0">
+            <a:pPr marL="0" indent="0">
               <a:buNone/>
             </a:pPr>
             <a:r>
@@ -13748,9 +13274,6 @@
               </a:rPr>
               <a:t>▶ </a:t>
             </a:r>
-            <a:pPr indent="0" marL="0">
-              <a:buNone/>
-            </a:pPr>
             <a:r>
               <a:rPr lang="en-US" sz="1300" dirty="0">
                 <a:solidFill>
@@ -13812,7 +13335,7 @@
           <a:bodyPr wrap="square" lIns="0" tIns="0" rIns="0" bIns="0" rtlCol="0" anchor="ctr"/>
           <a:lstStyle/>
           <a:p>
-            <a:pPr indent="0" marL="0">
+            <a:pPr marL="0" indent="0">
               <a:buNone/>
             </a:pPr>
             <a:r>
@@ -13876,7 +13399,7 @@
           <a:bodyPr wrap="square" lIns="0" tIns="0" rIns="0" bIns="0" rtlCol="0" anchor="ctr"/>
           <a:lstStyle/>
           <a:p>
-            <a:pPr indent="0" marL="0">
+            <a:pPr marL="0" indent="0">
               <a:buNone/>
             </a:pPr>
             <a:r>
@@ -13940,7 +13463,7 @@
           <a:bodyPr wrap="square" lIns="0" tIns="0" rIns="0" bIns="0" rtlCol="0" anchor="ctr"/>
           <a:lstStyle/>
           <a:p>
-            <a:pPr indent="0" marL="0">
+            <a:pPr marL="0" indent="0">
               <a:buNone/>
             </a:pPr>
             <a:r>
@@ -14006,7 +13529,7 @@
           <a:bodyPr wrap="square" lIns="0" tIns="0" rIns="0" bIns="0" rtlCol="0" anchor="ctr"/>
           <a:lstStyle/>
           <a:p>
-            <a:pPr indent="0" marL="0">
+            <a:pPr marL="0" indent="0">
               <a:buNone/>
             </a:pPr>
             <a:r>
@@ -14070,7 +13593,7 @@
           <a:bodyPr wrap="square" lIns="0" tIns="0" rIns="0" bIns="0" rtlCol="0" anchor="ctr"/>
           <a:lstStyle/>
           <a:p>
-            <a:pPr indent="0" marL="0">
+            <a:pPr marL="0" indent="0">
               <a:buNone/>
             </a:pPr>
             <a:r>
@@ -14104,6 +13627,7 @@
         <a:solidFill>
           <a:srgbClr val="0C1A2E"/>
         </a:solidFill>
+        <a:effectLst/>
       </p:bgPr>
     </p:bg>
     <p:spTree>
@@ -14216,11 +13740,11 @@
           <a:bodyPr wrap="square" lIns="0" tIns="0" rIns="0" bIns="0" rtlCol="0" anchor="ctr"/>
           <a:lstStyle/>
           <a:p>
-            <a:pPr algn="ctr" indent="0" marL="0">
-              <a:buNone/>
-            </a:pPr>
-            <a:r>
-              <a:rPr lang="en-US" sz="1100" b="1" spc="200" kern="0" dirty="0">
+            <a:pPr marL="0" indent="0" algn="ctr">
+              <a:buNone/>
+            </a:pPr>
+            <a:r>
+              <a:rPr lang="en-US" sz="1100" b="1" kern="0" spc="200" dirty="0">
                 <a:solidFill>
                   <a:srgbClr val="FFFFFF"/>
                 </a:solidFill>
@@ -14255,7 +13779,7 @@
           <a:bodyPr wrap="square" lIns="0" tIns="0" rIns="0" bIns="0" rtlCol="0" anchor="ctr"/>
           <a:lstStyle/>
           <a:p>
-            <a:pPr indent="0" marL="0">
+            <a:pPr marL="0" indent="0">
               <a:buNone/>
             </a:pPr>
             <a:r>
@@ -14294,7 +13818,7 @@
           <a:bodyPr wrap="square" rtlCol="0" anchor="ctr"/>
           <a:lstStyle/>
           <a:p>
-            <a:pPr indent="0" marL="0">
+            <a:pPr marL="0" indent="0">
               <a:buNone/>
             </a:pPr>
             <a:r>
@@ -14360,7 +13884,7 @@
           <a:bodyPr wrap="square" lIns="0" tIns="0" rIns="0" bIns="0" rtlCol="0" anchor="ctr"/>
           <a:lstStyle/>
           <a:p>
-            <a:pPr indent="0" marL="0">
+            <a:pPr marL="0" indent="0">
               <a:buNone/>
             </a:pPr>
             <a:r>
@@ -14374,9 +13898,6 @@
               </a:rPr>
               <a:t>▶ </a:t>
             </a:r>
-            <a:pPr indent="0" marL="0">
-              <a:buNone/>
-            </a:pPr>
             <a:r>
               <a:rPr lang="en-US" sz="1300" b="1" dirty="0">
                 <a:solidFill>
@@ -14413,7 +13934,7 @@
           <a:bodyPr wrap="square" lIns="0" tIns="0" rIns="0" bIns="0" rtlCol="0" anchor="ctr"/>
           <a:lstStyle/>
           <a:p>
-            <a:pPr indent="0" marL="0">
+            <a:pPr marL="0" indent="0">
               <a:buNone/>
             </a:pPr>
             <a:r>
@@ -14427,9 +13948,6 @@
               </a:rPr>
               <a:t>▶ </a:t>
             </a:r>
-            <a:pPr indent="0" marL="0">
-              <a:buNone/>
-            </a:pPr>
             <a:r>
               <a:rPr lang="en-US" sz="1300" dirty="0">
                 <a:solidFill>
@@ -14491,7 +14009,7 @@
           <a:bodyPr wrap="square" lIns="0" tIns="0" rIns="0" bIns="0" rtlCol="0" anchor="ctr"/>
           <a:lstStyle/>
           <a:p>
-            <a:pPr indent="0" marL="0">
+            <a:pPr marL="0" indent="0">
               <a:buNone/>
             </a:pPr>
             <a:r>
@@ -14555,7 +14073,7 @@
           <a:bodyPr wrap="square" lIns="0" tIns="0" rIns="0" bIns="0" rtlCol="0" anchor="ctr"/>
           <a:lstStyle/>
           <a:p>
-            <a:pPr indent="0" marL="0">
+            <a:pPr marL="0" indent="0">
               <a:buNone/>
             </a:pPr>
             <a:r>
@@ -14594,7 +14112,7 @@
           <a:bodyPr wrap="square" lIns="0" tIns="0" rIns="0" bIns="0" rtlCol="0" anchor="ctr"/>
           <a:lstStyle/>
           <a:p>
-            <a:pPr indent="0" marL="0">
+            <a:pPr marL="0" indent="0">
               <a:buNone/>
             </a:pPr>
             <a:r>
@@ -14608,9 +14126,6 @@
               </a:rPr>
               <a:t>▶ </a:t>
             </a:r>
-            <a:pPr indent="0" marL="0">
-              <a:buNone/>
-            </a:pPr>
             <a:r>
               <a:rPr lang="en-US" sz="1300" dirty="0">
                 <a:solidFill>
@@ -14674,7 +14189,7 @@
           <a:bodyPr wrap="square" lIns="0" tIns="0" rIns="0" bIns="0" rtlCol="0" anchor="ctr"/>
           <a:lstStyle/>
           <a:p>
-            <a:pPr indent="0" marL="0">
+            <a:pPr marL="0" indent="0">
               <a:buNone/>
             </a:pPr>
             <a:r>
@@ -14738,7 +14253,7 @@
           <a:bodyPr wrap="square" lIns="0" tIns="0" rIns="0" bIns="0" rtlCol="0" anchor="ctr"/>
           <a:lstStyle/>
           <a:p>
-            <a:pPr indent="0" marL="0">
+            <a:pPr marL="0" indent="0">
               <a:buNone/>
             </a:pPr>
             <a:r>
@@ -14772,6 +14287,7 @@
         <a:solidFill>
           <a:srgbClr val="0C1A2E"/>
         </a:solidFill>
+        <a:effectLst/>
       </p:bgPr>
     </p:bg>
     <p:spTree>
@@ -14884,11 +14400,11 @@
           <a:bodyPr wrap="square" lIns="0" tIns="0" rIns="0" bIns="0" rtlCol="0" anchor="ctr"/>
           <a:lstStyle/>
           <a:p>
-            <a:pPr algn="ctr" indent="0" marL="0">
-              <a:buNone/>
-            </a:pPr>
-            <a:r>
-              <a:rPr lang="en-US" sz="1100" b="1" spc="200" kern="0" dirty="0">
+            <a:pPr marL="0" indent="0" algn="ctr">
+              <a:buNone/>
+            </a:pPr>
+            <a:r>
+              <a:rPr lang="en-US" sz="1100" b="1" kern="0" spc="200" dirty="0">
                 <a:solidFill>
                   <a:srgbClr val="FFFFFF"/>
                 </a:solidFill>
@@ -14923,7 +14439,7 @@
           <a:bodyPr wrap="square" lIns="0" tIns="0" rIns="0" bIns="0" rtlCol="0" anchor="ctr"/>
           <a:lstStyle/>
           <a:p>
-            <a:pPr indent="0" marL="0">
+            <a:pPr marL="0" indent="0">
               <a:buNone/>
             </a:pPr>
             <a:r>
@@ -14962,7 +14478,7 @@
           <a:bodyPr wrap="square" rtlCol="0" anchor="ctr"/>
           <a:lstStyle/>
           <a:p>
-            <a:pPr indent="0" marL="0">
+            <a:pPr marL="0" indent="0">
               <a:buNone/>
             </a:pPr>
             <a:r>
@@ -15028,7 +14544,7 @@
           <a:bodyPr wrap="square" lIns="0" tIns="0" rIns="0" bIns="0" rtlCol="0" anchor="ctr"/>
           <a:lstStyle/>
           <a:p>
-            <a:pPr indent="0" marL="0">
+            <a:pPr marL="0" indent="0">
               <a:buNone/>
             </a:pPr>
             <a:r>
@@ -15042,9 +14558,6 @@
               </a:rPr>
               <a:t>▶ </a:t>
             </a:r>
-            <a:pPr indent="0" marL="0">
-              <a:buNone/>
-            </a:pPr>
             <a:r>
               <a:rPr lang="en-US" sz="1300" b="1" dirty="0">
                 <a:solidFill>
@@ -15081,7 +14594,7 @@
           <a:bodyPr wrap="square" lIns="0" tIns="0" rIns="0" bIns="0" rtlCol="0" anchor="ctr"/>
           <a:lstStyle/>
           <a:p>
-            <a:pPr indent="0" marL="0">
+            <a:pPr marL="0" indent="0">
               <a:buNone/>
             </a:pPr>
             <a:r>
@@ -15095,9 +14608,6 @@
               </a:rPr>
               <a:t>▶ </a:t>
             </a:r>
-            <a:pPr indent="0" marL="0">
-              <a:buNone/>
-            </a:pPr>
             <a:r>
               <a:rPr lang="en-US" sz="1300" dirty="0">
                 <a:solidFill>
@@ -15159,7 +14669,7 @@
           <a:bodyPr wrap="square" lIns="0" tIns="0" rIns="0" bIns="0" rtlCol="0" anchor="ctr"/>
           <a:lstStyle/>
           <a:p>
-            <a:pPr indent="0" marL="0">
+            <a:pPr marL="0" indent="0">
               <a:buNone/>
             </a:pPr>
             <a:r>
@@ -15223,7 +14733,7 @@
           <a:bodyPr wrap="square" lIns="0" tIns="0" rIns="0" bIns="0" rtlCol="0" anchor="ctr"/>
           <a:lstStyle/>
           <a:p>
-            <a:pPr indent="0" marL="0">
+            <a:pPr marL="0" indent="0">
               <a:buNone/>
             </a:pPr>
             <a:r>
@@ -15289,7 +14799,7 @@
           <a:bodyPr wrap="square" lIns="0" tIns="0" rIns="0" bIns="0" rtlCol="0" anchor="ctr"/>
           <a:lstStyle/>
           <a:p>
-            <a:pPr indent="0" marL="0">
+            <a:pPr marL="0" indent="0">
               <a:buNone/>
             </a:pPr>
             <a:r>
@@ -15353,7 +14863,7 @@
           <a:bodyPr wrap="square" lIns="0" tIns="0" rIns="0" bIns="0" rtlCol="0" anchor="ctr"/>
           <a:lstStyle/>
           <a:p>
-            <a:pPr indent="0" marL="0">
+            <a:pPr marL="0" indent="0">
               <a:buNone/>
             </a:pPr>
             <a:r>
@@ -15387,6 +14897,7 @@
         <a:solidFill>
           <a:srgbClr val="0C1A2E"/>
         </a:solidFill>
+        <a:effectLst/>
       </p:bgPr>
     </p:bg>
     <p:spTree>
@@ -15499,11 +15010,11 @@
           <a:bodyPr wrap="square" lIns="0" tIns="0" rIns="0" bIns="0" rtlCol="0" anchor="ctr"/>
           <a:lstStyle/>
           <a:p>
-            <a:pPr algn="ctr" indent="0" marL="0">
-              <a:buNone/>
-            </a:pPr>
-            <a:r>
-              <a:rPr lang="en-US" sz="1100" b="1" spc="200" kern="0" dirty="0">
+            <a:pPr marL="0" indent="0" algn="ctr">
+              <a:buNone/>
+            </a:pPr>
+            <a:r>
+              <a:rPr lang="en-US" sz="1100" b="1" kern="0" spc="200" dirty="0">
                 <a:solidFill>
                   <a:srgbClr val="FFFFFF"/>
                 </a:solidFill>
@@ -15538,7 +15049,7 @@
           <a:bodyPr wrap="square" lIns="0" tIns="0" rIns="0" bIns="0" rtlCol="0" anchor="ctr"/>
           <a:lstStyle/>
           <a:p>
-            <a:pPr indent="0" marL="0">
+            <a:pPr marL="0" indent="0">
               <a:buNone/>
             </a:pPr>
             <a:r>
@@ -15577,7 +15088,7 @@
           <a:bodyPr wrap="square" rtlCol="0" anchor="ctr"/>
           <a:lstStyle/>
           <a:p>
-            <a:pPr indent="0" marL="0">
+            <a:pPr marL="0" indent="0">
               <a:buNone/>
             </a:pPr>
             <a:r>
@@ -15643,7 +15154,7 @@
           <a:bodyPr wrap="square" lIns="0" tIns="0" rIns="0" bIns="0" rtlCol="0" anchor="ctr"/>
           <a:lstStyle/>
           <a:p>
-            <a:pPr indent="0" marL="0">
+            <a:pPr marL="0" indent="0">
               <a:buNone/>
             </a:pPr>
             <a:r>
@@ -15657,9 +15168,6 @@
               </a:rPr>
               <a:t>▶ </a:t>
             </a:r>
-            <a:pPr indent="0" marL="0">
-              <a:buNone/>
-            </a:pPr>
             <a:r>
               <a:rPr lang="en-US" sz="1300" b="1" dirty="0">
                 <a:solidFill>
@@ -15696,7 +15204,7 @@
           <a:bodyPr wrap="square" lIns="0" tIns="0" rIns="0" bIns="0" rtlCol="0" anchor="ctr"/>
           <a:lstStyle/>
           <a:p>
-            <a:pPr indent="0" marL="0">
+            <a:pPr marL="0" indent="0">
               <a:buNone/>
             </a:pPr>
             <a:r>
@@ -15710,9 +15218,6 @@
               </a:rPr>
               <a:t>▶ </a:t>
             </a:r>
-            <a:pPr indent="0" marL="0">
-              <a:buNone/>
-            </a:pPr>
             <a:r>
               <a:rPr lang="en-US" sz="1300" dirty="0">
                 <a:solidFill>
@@ -15774,7 +15279,7 @@
           <a:bodyPr wrap="square" lIns="0" tIns="0" rIns="0" bIns="0" rtlCol="0" anchor="ctr"/>
           <a:lstStyle/>
           <a:p>
-            <a:pPr indent="0" marL="0">
+            <a:pPr marL="0" indent="0">
               <a:buNone/>
             </a:pPr>
             <a:r>
@@ -15838,7 +15343,7 @@
           <a:bodyPr wrap="square" lIns="0" tIns="0" rIns="0" bIns="0" rtlCol="0" anchor="ctr"/>
           <a:lstStyle/>
           <a:p>
-            <a:pPr indent="0" marL="0">
+            <a:pPr marL="0" indent="0">
               <a:buNone/>
             </a:pPr>
             <a:r>
@@ -15904,7 +15409,7 @@
           <a:bodyPr wrap="square" lIns="0" tIns="0" rIns="0" bIns="0" rtlCol="0" anchor="ctr"/>
           <a:lstStyle/>
           <a:p>
-            <a:pPr indent="0" marL="0">
+            <a:pPr marL="0" indent="0">
               <a:buNone/>
             </a:pPr>
             <a:r>
@@ -15968,7 +15473,7 @@
           <a:bodyPr wrap="square" lIns="0" tIns="0" rIns="0" bIns="0" rtlCol="0" anchor="ctr"/>
           <a:lstStyle/>
           <a:p>
-            <a:pPr indent="0" marL="0">
+            <a:pPr marL="0" indent="0">
               <a:buNone/>
             </a:pPr>
             <a:r>
@@ -16002,6 +15507,7 @@
         <a:solidFill>
           <a:srgbClr val="0C1A2E"/>
         </a:solidFill>
+        <a:effectLst/>
       </p:bgPr>
     </p:bg>
     <p:spTree>
@@ -16114,11 +15620,11 @@
           <a:bodyPr wrap="square" lIns="0" tIns="0" rIns="0" bIns="0" rtlCol="0" anchor="ctr"/>
           <a:lstStyle/>
           <a:p>
-            <a:pPr algn="ctr" indent="0" marL="0">
-              <a:buNone/>
-            </a:pPr>
-            <a:r>
-              <a:rPr lang="en-US" sz="1100" b="1" spc="200" kern="0" dirty="0">
+            <a:pPr marL="0" indent="0" algn="ctr">
+              <a:buNone/>
+            </a:pPr>
+            <a:r>
+              <a:rPr lang="en-US" sz="1100" b="1" kern="0" spc="200" dirty="0">
                 <a:solidFill>
                   <a:srgbClr val="FFFFFF"/>
                 </a:solidFill>
@@ -16153,7 +15659,7 @@
           <a:bodyPr wrap="square" lIns="0" tIns="0" rIns="0" bIns="0" rtlCol="0" anchor="ctr"/>
           <a:lstStyle/>
           <a:p>
-            <a:pPr indent="0" marL="0">
+            <a:pPr marL="0" indent="0">
               <a:buNone/>
             </a:pPr>
             <a:r>
@@ -16192,7 +15698,7 @@
           <a:bodyPr wrap="square" rtlCol="0" anchor="ctr"/>
           <a:lstStyle/>
           <a:p>
-            <a:pPr indent="0" marL="0">
+            <a:pPr marL="0" indent="0">
               <a:buNone/>
             </a:pPr>
             <a:r>
@@ -16258,7 +15764,7 @@
           <a:bodyPr wrap="square" lIns="0" tIns="0" rIns="0" bIns="0" rtlCol="0" anchor="ctr"/>
           <a:lstStyle/>
           <a:p>
-            <a:pPr indent="0" marL="0">
+            <a:pPr marL="0" indent="0">
               <a:buNone/>
             </a:pPr>
             <a:r>
@@ -16272,9 +15778,6 @@
               </a:rPr>
               <a:t>▶ </a:t>
             </a:r>
-            <a:pPr indent="0" marL="0">
-              <a:buNone/>
-            </a:pPr>
             <a:r>
               <a:rPr lang="en-US" sz="1300" b="1" dirty="0">
                 <a:solidFill>
@@ -16311,7 +15814,7 @@
           <a:bodyPr wrap="square" lIns="0" tIns="0" rIns="0" bIns="0" rtlCol="0" anchor="ctr"/>
           <a:lstStyle/>
           <a:p>
-            <a:pPr indent="0" marL="0">
+            <a:pPr marL="0" indent="0">
               <a:buNone/>
             </a:pPr>
             <a:r>
@@ -16325,9 +15828,6 @@
               </a:rPr>
               <a:t>▶ </a:t>
             </a:r>
-            <a:pPr indent="0" marL="0">
-              <a:buNone/>
-            </a:pPr>
             <a:r>
               <a:rPr lang="en-US" sz="1300" dirty="0">
                 <a:solidFill>
@@ -16389,7 +15889,7 @@
           <a:bodyPr wrap="square" lIns="0" tIns="0" rIns="0" bIns="0" rtlCol="0" anchor="ctr"/>
           <a:lstStyle/>
           <a:p>
-            <a:pPr indent="0" marL="0">
+            <a:pPr marL="0" indent="0">
               <a:buNone/>
             </a:pPr>
             <a:r>
@@ -16453,7 +15953,7 @@
           <a:bodyPr wrap="square" lIns="0" tIns="0" rIns="0" bIns="0" rtlCol="0" anchor="ctr"/>
           <a:lstStyle/>
           <a:p>
-            <a:pPr indent="0" marL="0">
+            <a:pPr marL="0" indent="0">
               <a:buNone/>
             </a:pPr>
             <a:r>
@@ -16492,7 +15992,7 @@
           <a:bodyPr wrap="square" lIns="0" tIns="0" rIns="0" bIns="0" rtlCol="0" anchor="ctr"/>
           <a:lstStyle/>
           <a:p>
-            <a:pPr indent="0" marL="0">
+            <a:pPr marL="0" indent="0">
               <a:buNone/>
             </a:pPr>
             <a:r>
@@ -16506,9 +16006,6 @@
               </a:rPr>
               <a:t>▶ </a:t>
             </a:r>
-            <a:pPr indent="0" marL="0">
-              <a:buNone/>
-            </a:pPr>
             <a:r>
               <a:rPr lang="en-US" sz="1300" dirty="0">
                 <a:solidFill>
@@ -16572,7 +16069,7 @@
           <a:bodyPr wrap="square" lIns="0" tIns="0" rIns="0" bIns="0" rtlCol="0" anchor="ctr"/>
           <a:lstStyle/>
           <a:p>
-            <a:pPr indent="0" marL="0">
+            <a:pPr marL="0" indent="0">
               <a:buNone/>
             </a:pPr>
             <a:r>
@@ -16636,7 +16133,7 @@
           <a:bodyPr wrap="square" lIns="0" tIns="0" rIns="0" bIns="0" rtlCol="0" anchor="ctr"/>
           <a:lstStyle/>
           <a:p>
-            <a:pPr indent="0" marL="0">
+            <a:pPr marL="0" indent="0">
               <a:buNone/>
             </a:pPr>
             <a:r>
@@ -16670,6 +16167,7 @@
         <a:solidFill>
           <a:srgbClr val="1A0E2E"/>
         </a:solidFill>
+        <a:effectLst/>
       </p:bgPr>
     </p:bg>
     <p:spTree>
@@ -16759,7 +16257,7 @@
           <a:bodyPr wrap="square" rtlCol="0" anchor="ctr"/>
           <a:lstStyle/>
           <a:p>
-            <a:pPr indent="0" marL="0">
+            <a:pPr marL="0" indent="0">
               <a:buNone/>
             </a:pPr>
             <a:r>
@@ -16798,11 +16296,11 @@
           <a:bodyPr wrap="square" rtlCol="0" anchor="ctr"/>
           <a:lstStyle/>
           <a:p>
-            <a:pPr indent="0" marL="0">
-              <a:buNone/>
-            </a:pPr>
-            <a:r>
-              <a:rPr lang="en-US" sz="1100" b="1" spc="400" kern="0" dirty="0">
+            <a:pPr marL="0" indent="0">
+              <a:buNone/>
+            </a:pPr>
+            <a:r>
+              <a:rPr lang="en-US" sz="1100" b="1" kern="0" spc="400" dirty="0">
                 <a:solidFill>
                   <a:srgbClr val="C4B5FD"/>
                 </a:solidFill>
@@ -16837,7 +16335,7 @@
           <a:bodyPr wrap="square" rtlCol="0" anchor="ctr"/>
           <a:lstStyle/>
           <a:p>
-            <a:pPr indent="0" marL="0">
+            <a:pPr marL="0" indent="0">
               <a:buNone/>
             </a:pPr>
             <a:r>
@@ -16876,7 +16374,7 @@
           <a:bodyPr wrap="square" rtlCol="0" anchor="ctr"/>
           <a:lstStyle/>
           <a:p>
-            <a:pPr indent="0" marL="0">
+            <a:pPr marL="0" indent="0">
               <a:buNone/>
             </a:pPr>
             <a:r>
@@ -16915,7 +16413,7 @@
           <a:bodyPr wrap="square" rtlCol="0" anchor="ctr"/>
           <a:lstStyle/>
           <a:p>
-            <a:pPr indent="0" marL="0">
+            <a:pPr marL="0" indent="0">
               <a:buNone/>
             </a:pPr>
             <a:r>
@@ -16949,6 +16447,7 @@
         <a:solidFill>
           <a:srgbClr val="F5F3FF"/>
         </a:solidFill>
+        <a:effectLst/>
       </p:bgPr>
     </p:bg>
     <p:spTree>
@@ -17036,7 +16535,7 @@
           <a:bodyPr wrap="square" lIns="0" tIns="0" rIns="0" bIns="0" rtlCol="0" anchor="ctr"/>
           <a:lstStyle/>
           <a:p>
-            <a:pPr indent="0" marL="0">
+            <a:pPr marL="0" indent="0">
               <a:buNone/>
             </a:pPr>
             <a:r>
@@ -17075,7 +16574,7 @@
           <a:bodyPr wrap="square" lIns="0" tIns="0" rIns="0" bIns="0" rtlCol="0" anchor="ctr"/>
           <a:lstStyle/>
           <a:p>
-            <a:pPr indent="0" marL="0">
+            <a:pPr marL="0" indent="0">
               <a:buNone/>
             </a:pPr>
             <a:r>
@@ -17089,9 +16588,6 @@
               </a:rPr>
               <a:t>❯ </a:t>
             </a:r>
-            <a:pPr indent="0" marL="0">
-              <a:buNone/>
-            </a:pPr>
             <a:r>
               <a:rPr lang="en-US" sz="1350" b="1" dirty="0">
                 <a:solidFill>
@@ -17128,7 +16624,7 @@
           <a:bodyPr wrap="square" lIns="0" tIns="0" rIns="0" bIns="0" rtlCol="0" anchor="ctr"/>
           <a:lstStyle/>
           <a:p>
-            <a:pPr indent="0" marL="0">
+            <a:pPr marL="0" indent="0">
               <a:buNone/>
             </a:pPr>
             <a:r>
@@ -17142,9 +16638,6 @@
               </a:rPr>
               <a:t>❯ </a:t>
             </a:r>
-            <a:pPr indent="0" marL="0">
-              <a:buNone/>
-            </a:pPr>
             <a:r>
               <a:rPr lang="en-US" sz="1350" b="1" dirty="0">
                 <a:solidFill>
@@ -17181,7 +16674,7 @@
           <a:bodyPr wrap="square" lIns="0" tIns="0" rIns="0" bIns="0" rtlCol="0" anchor="ctr"/>
           <a:lstStyle/>
           <a:p>
-            <a:pPr indent="0" marL="0">
+            <a:pPr marL="0" indent="0">
               <a:buNone/>
             </a:pPr>
             <a:r>
@@ -17195,9 +16688,6 @@
               </a:rPr>
               <a:t>❯ </a:t>
             </a:r>
-            <a:pPr indent="0" marL="0">
-              <a:buNone/>
-            </a:pPr>
             <a:r>
               <a:rPr lang="en-US" sz="1350" dirty="0">
                 <a:solidFill>
@@ -17234,7 +16724,7 @@
           <a:bodyPr wrap="square" lIns="0" tIns="0" rIns="0" bIns="0" rtlCol="0" anchor="ctr"/>
           <a:lstStyle/>
           <a:p>
-            <a:pPr indent="0" marL="0">
+            <a:pPr marL="0" indent="0">
               <a:buNone/>
             </a:pPr>
             <a:r>
@@ -17248,9 +16738,6 @@
               </a:rPr>
               <a:t>❯ </a:t>
             </a:r>
-            <a:pPr indent="0" marL="0">
-              <a:buNone/>
-            </a:pPr>
             <a:r>
               <a:rPr lang="en-US" sz="1350" dirty="0">
                 <a:solidFill>
@@ -17312,7 +16799,7 @@
           <a:bodyPr wrap="square" lIns="0" tIns="0" rIns="0" bIns="0" rtlCol="0" anchor="ctr"/>
           <a:lstStyle/>
           <a:p>
-            <a:pPr indent="0" marL="0">
+            <a:pPr marL="0" indent="0">
               <a:buNone/>
             </a:pPr>
             <a:r>
@@ -17376,7 +16863,7 @@
           <a:bodyPr wrap="square" lIns="0" tIns="0" rIns="0" bIns="0" rtlCol="0" anchor="ctr"/>
           <a:lstStyle/>
           <a:p>
-            <a:pPr indent="0" marL="0">
+            <a:pPr marL="0" indent="0">
               <a:buNone/>
             </a:pPr>
             <a:r>
@@ -17440,7 +16927,7 @@
           <a:bodyPr wrap="square" lIns="0" tIns="0" rIns="0" bIns="0" rtlCol="0" anchor="ctr"/>
           <a:lstStyle/>
           <a:p>
-            <a:pPr indent="0" marL="0">
+            <a:pPr marL="0" indent="0">
               <a:buNone/>
             </a:pPr>
             <a:r>
@@ -17504,7 +16991,7 @@
           <a:bodyPr wrap="square" lIns="0" tIns="0" rIns="0" bIns="0" rtlCol="0" anchor="ctr"/>
           <a:lstStyle/>
           <a:p>
-            <a:pPr indent="0" marL="0">
+            <a:pPr marL="0" indent="0">
               <a:buNone/>
             </a:pPr>
             <a:r>
@@ -17570,7 +17057,7 @@
           <a:bodyPr wrap="square" lIns="0" tIns="0" rIns="0" bIns="0" rtlCol="0" anchor="ctr"/>
           <a:lstStyle/>
           <a:p>
-            <a:pPr indent="0" marL="0">
+            <a:pPr marL="0" indent="0">
               <a:buNone/>
             </a:pPr>
             <a:r>
@@ -17659,7 +17146,7 @@
           <a:bodyPr wrap="square" lIns="0" tIns="0" rIns="0" bIns="0" rtlCol="0" anchor="ctr"/>
           <a:lstStyle/>
           <a:p>
-            <a:pPr indent="0" marL="0">
+            <a:pPr marL="0" indent="0">
               <a:buNone/>
             </a:pPr>
             <a:r>
@@ -17693,6 +17180,7 @@
         <a:solidFill>
           <a:srgbClr val="F5F3FF"/>
         </a:solidFill>
+        <a:effectLst/>
       </p:bgPr>
     </p:bg>
     <p:spTree>
@@ -17780,7 +17268,7 @@
           <a:bodyPr wrap="square" lIns="0" tIns="0" rIns="0" bIns="0" rtlCol="0" anchor="ctr"/>
           <a:lstStyle/>
           <a:p>
-            <a:pPr indent="0" marL="0">
+            <a:pPr marL="0" indent="0">
               <a:buNone/>
             </a:pPr>
             <a:r>
@@ -17822,7 +17310,7 @@
             <a:prstDash val="solid"/>
           </a:ln>
           <a:effectLst>
-            <a:outerShdw sx="100000" sy="100000" kx="0" ky="0" algn="bl" rotWithShape="0" blurRad="101600" dist="38100" dir="8100000">
+            <a:outerShdw blurRad="101600" dist="38100" dir="8100000" algn="bl" rotWithShape="0">
               <a:srgbClr val="000000">
                 <a:alpha val="20000"/>
               </a:srgbClr>
@@ -17876,7 +17364,7 @@
           <a:bodyPr wrap="square" lIns="0" tIns="0" rIns="0" bIns="0" rtlCol="0" anchor="ctr"/>
           <a:lstStyle/>
           <a:p>
-            <a:pPr indent="0" marL="0">
+            <a:pPr marL="0" indent="0">
               <a:buNone/>
             </a:pPr>
             <a:r>
@@ -17915,7 +17403,7 @@
           <a:bodyPr wrap="square" lIns="0" tIns="0" rIns="0" bIns="0" rtlCol="0" anchor="ctr"/>
           <a:lstStyle/>
           <a:p>
-            <a:pPr indent="0" marL="0">
+            <a:pPr marL="0" indent="0">
               <a:buNone/>
             </a:pPr>
             <a:r>
@@ -17929,9 +17417,6 @@
               </a:rPr>
               <a:t>▸ </a:t>
             </a:r>
-            <a:pPr indent="0" marL="0">
-              <a:buNone/>
-            </a:pPr>
             <a:r>
               <a:rPr lang="en-US" sz="1300" dirty="0">
                 <a:solidFill>
@@ -17968,7 +17453,7 @@
           <a:bodyPr wrap="square" lIns="0" tIns="0" rIns="0" bIns="0" rtlCol="0" anchor="ctr"/>
           <a:lstStyle/>
           <a:p>
-            <a:pPr indent="0" marL="0">
+            <a:pPr marL="0" indent="0">
               <a:buNone/>
             </a:pPr>
             <a:r>
@@ -17982,9 +17467,6 @@
               </a:rPr>
               <a:t>▸ </a:t>
             </a:r>
-            <a:pPr indent="0" marL="0">
-              <a:buNone/>
-            </a:pPr>
             <a:r>
               <a:rPr lang="en-US" sz="1300" dirty="0">
                 <a:solidFill>
@@ -18021,7 +17503,7 @@
           <a:bodyPr wrap="square" lIns="0" tIns="0" rIns="0" bIns="0" rtlCol="0" anchor="ctr"/>
           <a:lstStyle/>
           <a:p>
-            <a:pPr indent="0" marL="0">
+            <a:pPr marL="0" indent="0">
               <a:buNone/>
             </a:pPr>
             <a:r>
@@ -18035,9 +17517,6 @@
               </a:rPr>
               <a:t>▸ </a:t>
             </a:r>
-            <a:pPr indent="0" marL="0">
-              <a:buNone/>
-            </a:pPr>
             <a:r>
               <a:rPr lang="en-US" sz="1300" dirty="0">
                 <a:solidFill>
@@ -18074,7 +17553,7 @@
           <a:bodyPr wrap="square" lIns="0" tIns="0" rIns="0" bIns="0" rtlCol="0" anchor="ctr"/>
           <a:lstStyle/>
           <a:p>
-            <a:pPr indent="0" marL="0">
+            <a:pPr marL="0" indent="0">
               <a:buNone/>
             </a:pPr>
             <a:r>
@@ -18088,9 +17567,6 @@
               </a:rPr>
               <a:t>▸ </a:t>
             </a:r>
-            <a:pPr indent="0" marL="0">
-              <a:buNone/>
-            </a:pPr>
             <a:r>
               <a:rPr lang="en-US" sz="1300" dirty="0">
                 <a:solidFill>
@@ -18127,7 +17603,7 @@
           <a:bodyPr wrap="square" lIns="0" tIns="0" rIns="0" bIns="0" rtlCol="0" anchor="ctr"/>
           <a:lstStyle/>
           <a:p>
-            <a:pPr indent="0" marL="0">
+            <a:pPr marL="0" indent="0">
               <a:buNone/>
             </a:pPr>
             <a:r>
@@ -18141,9 +17617,6 @@
               </a:rPr>
               <a:t>▸ </a:t>
             </a:r>
-            <a:pPr indent="0" marL="0">
-              <a:buNone/>
-            </a:pPr>
             <a:r>
               <a:rPr lang="en-US" sz="1300" dirty="0">
                 <a:solidFill>
@@ -18180,7 +17653,7 @@
           <a:bodyPr wrap="square" lIns="0" tIns="0" rIns="0" bIns="0" rtlCol="0" anchor="ctr"/>
           <a:lstStyle/>
           <a:p>
-            <a:pPr indent="0" marL="0">
+            <a:pPr marL="0" indent="0">
               <a:buNone/>
             </a:pPr>
             <a:r>
@@ -18194,9 +17667,6 @@
               </a:rPr>
               <a:t>▸ </a:t>
             </a:r>
-            <a:pPr indent="0" marL="0">
-              <a:buNone/>
-            </a:pPr>
             <a:r>
               <a:rPr lang="en-US" sz="1300" dirty="0">
                 <a:solidFill>
@@ -18236,7 +17706,7 @@
             <a:prstDash val="solid"/>
           </a:ln>
           <a:effectLst>
-            <a:outerShdw sx="100000" sy="100000" kx="0" ky="0" algn="bl" rotWithShape="0" blurRad="101600" dist="38100" dir="8100000">
+            <a:outerShdw blurRad="101600" dist="38100" dir="8100000" algn="bl" rotWithShape="0">
               <a:srgbClr val="000000">
                 <a:alpha val="20000"/>
               </a:srgbClr>
@@ -18290,7 +17760,7 @@
           <a:bodyPr wrap="square" lIns="0" tIns="0" rIns="0" bIns="0" rtlCol="0" anchor="ctr"/>
           <a:lstStyle/>
           <a:p>
-            <a:pPr indent="0" marL="0">
+            <a:pPr marL="0" indent="0">
               <a:buNone/>
             </a:pPr>
             <a:r>
@@ -18329,7 +17799,7 @@
           <a:bodyPr wrap="square" lIns="0" tIns="0" rIns="0" bIns="0" rtlCol="0" anchor="ctr"/>
           <a:lstStyle/>
           <a:p>
-            <a:pPr indent="0" marL="0">
+            <a:pPr marL="0" indent="0">
               <a:buNone/>
             </a:pPr>
             <a:r>
@@ -18343,9 +17813,6 @@
               </a:rPr>
               <a:t>▸ </a:t>
             </a:r>
-            <a:pPr indent="0" marL="0">
-              <a:buNone/>
-            </a:pPr>
             <a:r>
               <a:rPr lang="en-US" sz="1300" dirty="0">
                 <a:solidFill>
@@ -18382,7 +17849,7 @@
           <a:bodyPr wrap="square" lIns="0" tIns="0" rIns="0" bIns="0" rtlCol="0" anchor="ctr"/>
           <a:lstStyle/>
           <a:p>
-            <a:pPr indent="0" marL="0">
+            <a:pPr marL="0" indent="0">
               <a:buNone/>
             </a:pPr>
             <a:r>
@@ -18396,9 +17863,6 @@
               </a:rPr>
               <a:t>▸ </a:t>
             </a:r>
-            <a:pPr indent="0" marL="0">
-              <a:buNone/>
-            </a:pPr>
             <a:r>
               <a:rPr lang="en-US" sz="1300" dirty="0">
                 <a:solidFill>
@@ -18435,7 +17899,7 @@
           <a:bodyPr wrap="square" lIns="0" tIns="0" rIns="0" bIns="0" rtlCol="0" anchor="ctr"/>
           <a:lstStyle/>
           <a:p>
-            <a:pPr indent="0" marL="0">
+            <a:pPr marL="0" indent="0">
               <a:buNone/>
             </a:pPr>
             <a:r>
@@ -18449,9 +17913,6 @@
               </a:rPr>
               <a:t>▸ </a:t>
             </a:r>
-            <a:pPr indent="0" marL="0">
-              <a:buNone/>
-            </a:pPr>
             <a:r>
               <a:rPr lang="en-US" sz="1300" dirty="0">
                 <a:solidFill>
@@ -18488,7 +17949,7 @@
           <a:bodyPr wrap="square" lIns="0" tIns="0" rIns="0" bIns="0" rtlCol="0" anchor="ctr"/>
           <a:lstStyle/>
           <a:p>
-            <a:pPr indent="0" marL="0">
+            <a:pPr marL="0" indent="0">
               <a:buNone/>
             </a:pPr>
             <a:r>
@@ -18502,9 +17963,6 @@
               </a:rPr>
               <a:t>▸ </a:t>
             </a:r>
-            <a:pPr indent="0" marL="0">
-              <a:buNone/>
-            </a:pPr>
             <a:r>
               <a:rPr lang="en-US" sz="1300" dirty="0">
                 <a:solidFill>
@@ -18541,7 +17999,7 @@
           <a:bodyPr wrap="square" lIns="0" tIns="0" rIns="0" bIns="0" rtlCol="0" anchor="ctr"/>
           <a:lstStyle/>
           <a:p>
-            <a:pPr indent="0" marL="0">
+            <a:pPr marL="0" indent="0">
               <a:buNone/>
             </a:pPr>
             <a:r>
@@ -18555,9 +18013,6 @@
               </a:rPr>
               <a:t>▸ </a:t>
             </a:r>
-            <a:pPr indent="0" marL="0">
-              <a:buNone/>
-            </a:pPr>
             <a:r>
               <a:rPr lang="en-US" sz="1300" dirty="0">
                 <a:solidFill>
@@ -18594,7 +18049,7 @@
           <a:bodyPr wrap="square" lIns="0" tIns="0" rIns="0" bIns="0" rtlCol="0" anchor="ctr"/>
           <a:lstStyle/>
           <a:p>
-            <a:pPr indent="0" marL="0">
+            <a:pPr marL="0" indent="0">
               <a:buNone/>
             </a:pPr>
             <a:r>
@@ -18608,9 +18063,6 @@
               </a:rPr>
               <a:t>▸ </a:t>
             </a:r>
-            <a:pPr indent="0" marL="0">
-              <a:buNone/>
-            </a:pPr>
             <a:r>
               <a:rPr lang="en-US" sz="1300" dirty="0">
                 <a:solidFill>
@@ -18697,7 +18149,7 @@
           <a:bodyPr wrap="square" lIns="0" tIns="0" rIns="0" bIns="0" rtlCol="0" anchor="ctr"/>
           <a:lstStyle/>
           <a:p>
-            <a:pPr indent="0" marL="0">
+            <a:pPr marL="0" indent="0">
               <a:buNone/>
             </a:pPr>
             <a:r>
@@ -18731,6 +18183,7 @@
         <a:solidFill>
           <a:srgbClr val="1A0E2E"/>
         </a:solidFill>
+        <a:effectLst/>
       </p:bgPr>
     </p:bg>
     <p:spTree>
@@ -18820,7 +18273,7 @@
           <a:bodyPr wrap="square" rtlCol="0" anchor="ctr"/>
           <a:lstStyle/>
           <a:p>
-            <a:pPr indent="0" marL="0">
+            <a:pPr marL="0" indent="0">
               <a:buNone/>
             </a:pPr>
             <a:r>
@@ -18859,11 +18312,11 @@
           <a:bodyPr wrap="square" rtlCol="0" anchor="ctr"/>
           <a:lstStyle/>
           <a:p>
-            <a:pPr indent="0" marL="0">
-              <a:buNone/>
-            </a:pPr>
-            <a:r>
-              <a:rPr lang="en-US" sz="1100" b="1" spc="400" kern="0" dirty="0">
+            <a:pPr marL="0" indent="0">
+              <a:buNone/>
+            </a:pPr>
+            <a:r>
+              <a:rPr lang="en-US" sz="1100" b="1" kern="0" spc="400" dirty="0">
                 <a:solidFill>
                   <a:srgbClr val="C4B5FD"/>
                 </a:solidFill>
@@ -18898,7 +18351,7 @@
           <a:bodyPr wrap="square" rtlCol="0" anchor="ctr"/>
           <a:lstStyle/>
           <a:p>
-            <a:pPr indent="0" marL="0">
+            <a:pPr marL="0" indent="0">
               <a:buNone/>
             </a:pPr>
             <a:r>
@@ -18937,7 +18390,7 @@
           <a:bodyPr wrap="square" rtlCol="0" anchor="ctr"/>
           <a:lstStyle/>
           <a:p>
-            <a:pPr indent="0" marL="0">
+            <a:pPr marL="0" indent="0">
               <a:buNone/>
             </a:pPr>
             <a:r>
@@ -18976,7 +18429,7 @@
           <a:bodyPr wrap="square" rtlCol="0" anchor="ctr"/>
           <a:lstStyle/>
           <a:p>
-            <a:pPr indent="0" marL="0">
+            <a:pPr marL="0" indent="0">
               <a:buNone/>
             </a:pPr>
             <a:r>
@@ -19010,6 +18463,7 @@
         <a:solidFill>
           <a:srgbClr val="F5F3FF"/>
         </a:solidFill>
+        <a:effectLst/>
       </p:bgPr>
     </p:bg>
     <p:spTree>
@@ -19097,7 +18551,7 @@
           <a:bodyPr wrap="square" lIns="0" tIns="0" rIns="0" bIns="0" rtlCol="0" anchor="ctr"/>
           <a:lstStyle/>
           <a:p>
-            <a:pPr indent="0" marL="0">
+            <a:pPr marL="0" indent="0">
               <a:buNone/>
             </a:pPr>
             <a:r>
@@ -19136,7 +18590,7 @@
           <a:bodyPr wrap="square" lIns="0" tIns="0" rIns="0" bIns="0" rtlCol="0" anchor="ctr"/>
           <a:lstStyle/>
           <a:p>
-            <a:pPr indent="0" marL="0">
+            <a:pPr marL="0" indent="0">
               <a:buNone/>
             </a:pPr>
             <a:r>
@@ -19150,9 +18604,6 @@
               </a:rPr>
               <a:t>❯ </a:t>
             </a:r>
-            <a:pPr indent="0" marL="0">
-              <a:buNone/>
-            </a:pPr>
             <a:r>
               <a:rPr lang="en-US" sz="1350" b="1" dirty="0">
                 <a:solidFill>
@@ -19189,7 +18640,7 @@
           <a:bodyPr wrap="square" lIns="0" tIns="0" rIns="0" bIns="0" rtlCol="0" anchor="ctr"/>
           <a:lstStyle/>
           <a:p>
-            <a:pPr indent="0" marL="0">
+            <a:pPr marL="0" indent="0">
               <a:buNone/>
             </a:pPr>
             <a:r>
@@ -19203,9 +18654,6 @@
               </a:rPr>
               <a:t>❯ </a:t>
             </a:r>
-            <a:pPr indent="0" marL="0">
-              <a:buNone/>
-            </a:pPr>
             <a:r>
               <a:rPr lang="en-US" sz="1350" b="1" dirty="0">
                 <a:solidFill>
@@ -19242,7 +18690,7 @@
           <a:bodyPr wrap="square" lIns="0" tIns="0" rIns="0" bIns="0" rtlCol="0" anchor="ctr"/>
           <a:lstStyle/>
           <a:p>
-            <a:pPr indent="0" marL="0">
+            <a:pPr marL="0" indent="0">
               <a:buNone/>
             </a:pPr>
             <a:r>
@@ -19256,9 +18704,6 @@
               </a:rPr>
               <a:t>❯ </a:t>
             </a:r>
-            <a:pPr indent="0" marL="0">
-              <a:buNone/>
-            </a:pPr>
             <a:r>
               <a:rPr lang="en-US" sz="1350" dirty="0">
                 <a:solidFill>
@@ -19320,7 +18765,7 @@
           <a:bodyPr wrap="square" lIns="0" tIns="0" rIns="0" bIns="0" rtlCol="0" anchor="ctr"/>
           <a:lstStyle/>
           <a:p>
-            <a:pPr indent="0" marL="0">
+            <a:pPr marL="0" indent="0">
               <a:buNone/>
             </a:pPr>
             <a:r>
@@ -19384,7 +18829,7 @@
           <a:bodyPr wrap="square" lIns="0" tIns="0" rIns="0" bIns="0" rtlCol="0" anchor="ctr"/>
           <a:lstStyle/>
           <a:p>
-            <a:pPr indent="0" marL="0">
+            <a:pPr marL="0" indent="0">
               <a:buNone/>
             </a:pPr>
             <a:r>
@@ -19423,7 +18868,7 @@
           <a:bodyPr wrap="square" lIns="0" tIns="0" rIns="0" bIns="0" rtlCol="0" anchor="ctr"/>
           <a:lstStyle/>
           <a:p>
-            <a:pPr indent="0" marL="0">
+            <a:pPr marL="0" indent="0">
               <a:buNone/>
             </a:pPr>
             <a:r>
@@ -19437,9 +18882,6 @@
               </a:rPr>
               <a:t>❯ </a:t>
             </a:r>
-            <a:pPr indent="0" marL="0">
-              <a:buNone/>
-            </a:pPr>
             <a:r>
               <a:rPr lang="en-US" sz="1350" b="1" dirty="0">
                 <a:solidFill>
@@ -19476,7 +18918,7 @@
           <a:bodyPr wrap="square" lIns="0" tIns="0" rIns="0" bIns="0" rtlCol="0" anchor="ctr"/>
           <a:lstStyle/>
           <a:p>
-            <a:pPr indent="0" marL="0">
+            <a:pPr marL="0" indent="0">
               <a:buNone/>
             </a:pPr>
             <a:r>
@@ -19490,9 +18932,6 @@
               </a:rPr>
               <a:t>❯ </a:t>
             </a:r>
-            <a:pPr indent="0" marL="0">
-              <a:buNone/>
-            </a:pPr>
             <a:r>
               <a:rPr lang="en-US" sz="1350" b="1" dirty="0">
                 <a:solidFill>
@@ -19529,7 +18968,7 @@
           <a:bodyPr wrap="square" lIns="0" tIns="0" rIns="0" bIns="0" rtlCol="0" anchor="ctr"/>
           <a:lstStyle/>
           <a:p>
-            <a:pPr indent="0" marL="0">
+            <a:pPr marL="0" indent="0">
               <a:buNone/>
             </a:pPr>
             <a:r>
@@ -19543,9 +18982,6 @@
               </a:rPr>
               <a:t>❯ </a:t>
             </a:r>
-            <a:pPr indent="0" marL="0">
-              <a:buNone/>
-            </a:pPr>
             <a:r>
               <a:rPr lang="en-US" sz="1350" dirty="0">
                 <a:solidFill>
@@ -19609,7 +19045,7 @@
           <a:bodyPr wrap="square" lIns="0" tIns="0" rIns="0" bIns="0" rtlCol="0" anchor="ctr"/>
           <a:lstStyle/>
           <a:p>
-            <a:pPr indent="0" marL="0">
+            <a:pPr marL="0" indent="0">
               <a:buNone/>
             </a:pPr>
             <a:r>
@@ -19698,7 +19134,7 @@
           <a:bodyPr wrap="square" lIns="0" tIns="0" rIns="0" bIns="0" rtlCol="0" anchor="ctr"/>
           <a:lstStyle/>
           <a:p>
-            <a:pPr indent="0" marL="0">
+            <a:pPr marL="0" indent="0">
               <a:buNone/>
             </a:pPr>
             <a:r>
@@ -19732,6 +19168,7 @@
         <a:solidFill>
           <a:srgbClr val="1A0E2E"/>
         </a:solidFill>
+        <a:effectLst/>
       </p:bgPr>
     </p:bg>
     <p:spTree>
@@ -19821,7 +19258,7 @@
           <a:bodyPr wrap="square" rtlCol="0" anchor="ctr"/>
           <a:lstStyle/>
           <a:p>
-            <a:pPr indent="0" marL="0">
+            <a:pPr marL="0" indent="0">
               <a:buNone/>
             </a:pPr>
             <a:r>
@@ -19860,11 +19297,11 @@
           <a:bodyPr wrap="square" rtlCol="0" anchor="ctr"/>
           <a:lstStyle/>
           <a:p>
-            <a:pPr indent="0" marL="0">
-              <a:buNone/>
-            </a:pPr>
-            <a:r>
-              <a:rPr lang="en-US" sz="1100" b="1" spc="400" kern="0" dirty="0">
+            <a:pPr marL="0" indent="0">
+              <a:buNone/>
+            </a:pPr>
+            <a:r>
+              <a:rPr lang="en-US" sz="1100" b="1" kern="0" spc="400" dirty="0">
                 <a:solidFill>
                   <a:srgbClr val="C4B5FD"/>
                 </a:solidFill>
@@ -19899,7 +19336,7 @@
           <a:bodyPr wrap="square" rtlCol="0" anchor="ctr"/>
           <a:lstStyle/>
           <a:p>
-            <a:pPr indent="0" marL="0">
+            <a:pPr marL="0" indent="0">
               <a:buNone/>
             </a:pPr>
             <a:r>
@@ -19938,7 +19375,7 @@
           <a:bodyPr wrap="square" rtlCol="0" anchor="ctr"/>
           <a:lstStyle/>
           <a:p>
-            <a:pPr indent="0" marL="0">
+            <a:pPr marL="0" indent="0">
               <a:buNone/>
             </a:pPr>
             <a:r>
@@ -19977,7 +19414,7 @@
           <a:bodyPr wrap="square" rtlCol="0" anchor="ctr"/>
           <a:lstStyle/>
           <a:p>
-            <a:pPr indent="0" marL="0">
+            <a:pPr marL="0" indent="0">
               <a:buNone/>
             </a:pPr>
             <a:r>
@@ -20011,6 +19448,7 @@
         <a:solidFill>
           <a:srgbClr val="1A0E2E"/>
         </a:solidFill>
+        <a:effectLst/>
       </p:bgPr>
     </p:bg>
     <p:spTree>
@@ -20100,7 +19538,7 @@
           <a:bodyPr wrap="square" rtlCol="0" anchor="ctr"/>
           <a:lstStyle/>
           <a:p>
-            <a:pPr indent="0" marL="0">
+            <a:pPr marL="0" indent="0">
               <a:buNone/>
             </a:pPr>
             <a:r>
@@ -20139,11 +19577,11 @@
           <a:bodyPr wrap="square" rtlCol="0" anchor="ctr"/>
           <a:lstStyle/>
           <a:p>
-            <a:pPr indent="0" marL="0">
-              <a:buNone/>
-            </a:pPr>
-            <a:r>
-              <a:rPr lang="en-US" sz="1100" b="1" spc="400" kern="0" dirty="0">
+            <a:pPr marL="0" indent="0">
+              <a:buNone/>
+            </a:pPr>
+            <a:r>
+              <a:rPr lang="en-US" sz="1100" b="1" kern="0" spc="400" dirty="0">
                 <a:solidFill>
                   <a:srgbClr val="C4B5FD"/>
                 </a:solidFill>
@@ -20178,7 +19616,7 @@
           <a:bodyPr wrap="square" rtlCol="0" anchor="ctr"/>
           <a:lstStyle/>
           <a:p>
-            <a:pPr indent="0" marL="0">
+            <a:pPr marL="0" indent="0">
               <a:buNone/>
             </a:pPr>
             <a:r>
@@ -20217,7 +19655,7 @@
           <a:bodyPr wrap="square" rtlCol="0" anchor="ctr"/>
           <a:lstStyle/>
           <a:p>
-            <a:pPr indent="0" marL="0">
+            <a:pPr marL="0" indent="0">
               <a:buNone/>
             </a:pPr>
             <a:r>
@@ -20256,7 +19694,7 @@
           <a:bodyPr wrap="square" rtlCol="0" anchor="ctr"/>
           <a:lstStyle/>
           <a:p>
-            <a:pPr indent="0" marL="0">
+            <a:pPr marL="0" indent="0">
               <a:buNone/>
             </a:pPr>
             <a:r>
@@ -20290,6 +19728,7 @@
         <a:solidFill>
           <a:srgbClr val="F5F3FF"/>
         </a:solidFill>
+        <a:effectLst/>
       </p:bgPr>
     </p:bg>
     <p:spTree>
@@ -20377,7 +19816,7 @@
           <a:bodyPr wrap="square" lIns="0" tIns="0" rIns="0" bIns="0" rtlCol="0" anchor="ctr"/>
           <a:lstStyle/>
           <a:p>
-            <a:pPr indent="0" marL="0">
+            <a:pPr marL="0" indent="0">
               <a:buNone/>
             </a:pPr>
             <a:r>
@@ -20416,7 +19855,7 @@
           <a:bodyPr wrap="square" lIns="0" tIns="0" rIns="0" bIns="0" rtlCol="0" anchor="ctr"/>
           <a:lstStyle/>
           <a:p>
-            <a:pPr indent="0" marL="0">
+            <a:pPr marL="0" indent="0">
               <a:buNone/>
             </a:pPr>
             <a:r>
@@ -20430,9 +19869,6 @@
               </a:rPr>
               <a:t>❯ </a:t>
             </a:r>
-            <a:pPr indent="0" marL="0">
-              <a:buNone/>
-            </a:pPr>
             <a:r>
               <a:rPr lang="en-US" sz="1350" b="1" dirty="0">
                 <a:solidFill>
@@ -20469,7 +19905,7 @@
           <a:bodyPr wrap="square" lIns="0" tIns="0" rIns="0" bIns="0" rtlCol="0" anchor="ctr"/>
           <a:lstStyle/>
           <a:p>
-            <a:pPr indent="0" marL="0">
+            <a:pPr marL="0" indent="0">
               <a:buNone/>
             </a:pPr>
             <a:r>
@@ -20483,9 +19919,6 @@
               </a:rPr>
               <a:t>❯ </a:t>
             </a:r>
-            <a:pPr indent="0" marL="0">
-              <a:buNone/>
-            </a:pPr>
             <a:r>
               <a:rPr lang="en-US" sz="1350" b="1" dirty="0">
                 <a:solidFill>
@@ -20547,7 +19980,7 @@
           <a:bodyPr wrap="square" lIns="0" tIns="0" rIns="0" bIns="0" rtlCol="0" anchor="ctr"/>
           <a:lstStyle/>
           <a:p>
-            <a:pPr indent="0" marL="0">
+            <a:pPr marL="0" indent="0">
               <a:buNone/>
             </a:pPr>
             <a:r>
@@ -20611,7 +20044,7 @@
           <a:bodyPr wrap="square" lIns="0" tIns="0" rIns="0" bIns="0" rtlCol="0" anchor="ctr"/>
           <a:lstStyle/>
           <a:p>
-            <a:pPr indent="0" marL="0">
+            <a:pPr marL="0" indent="0">
               <a:buNone/>
             </a:pPr>
             <a:r>
@@ -20675,7 +20108,7 @@
           <a:bodyPr wrap="square" lIns="0" tIns="0" rIns="0" bIns="0" rtlCol="0" anchor="ctr"/>
           <a:lstStyle/>
           <a:p>
-            <a:pPr indent="0" marL="0">
+            <a:pPr marL="0" indent="0">
               <a:buNone/>
             </a:pPr>
             <a:r>
@@ -20714,7 +20147,7 @@
           <a:bodyPr wrap="square" lIns="0" tIns="0" rIns="0" bIns="0" rtlCol="0" anchor="ctr"/>
           <a:lstStyle/>
           <a:p>
-            <a:pPr indent="0" marL="0">
+            <a:pPr marL="0" indent="0">
               <a:buNone/>
             </a:pPr>
             <a:r>
@@ -20728,9 +20161,6 @@
               </a:rPr>
               <a:t>❯ </a:t>
             </a:r>
-            <a:pPr indent="0" marL="0">
-              <a:buNone/>
-            </a:pPr>
             <a:r>
               <a:rPr lang="en-US" sz="1350" b="1" dirty="0">
                 <a:solidFill>
@@ -20792,7 +20222,7 @@
           <a:bodyPr wrap="square" lIns="0" tIns="0" rIns="0" bIns="0" rtlCol="0" anchor="ctr"/>
           <a:lstStyle/>
           <a:p>
-            <a:pPr indent="0" marL="0">
+            <a:pPr marL="0" indent="0">
               <a:buNone/>
             </a:pPr>
             <a:r>
@@ -20858,7 +20288,7 @@
           <a:bodyPr wrap="square" lIns="0" tIns="0" rIns="0" bIns="0" rtlCol="0" anchor="ctr"/>
           <a:lstStyle/>
           <a:p>
-            <a:pPr indent="0" marL="0">
+            <a:pPr marL="0" indent="0">
               <a:buNone/>
             </a:pPr>
             <a:r>
@@ -20947,7 +20377,7 @@
           <a:bodyPr wrap="square" lIns="0" tIns="0" rIns="0" bIns="0" rtlCol="0" anchor="ctr"/>
           <a:lstStyle/>
           <a:p>
-            <a:pPr indent="0" marL="0">
+            <a:pPr marL="0" indent="0">
               <a:buNone/>
             </a:pPr>
             <a:r>
@@ -20981,6 +20411,7 @@
         <a:solidFill>
           <a:srgbClr val="F5F3FF"/>
         </a:solidFill>
+        <a:effectLst/>
       </p:bgPr>
     </p:bg>
     <p:spTree>
@@ -21068,7 +20499,7 @@
           <a:bodyPr wrap="square" lIns="0" tIns="0" rIns="0" bIns="0" rtlCol="0" anchor="ctr"/>
           <a:lstStyle/>
           <a:p>
-            <a:pPr indent="0" marL="0">
+            <a:pPr marL="0" indent="0">
               <a:buNone/>
             </a:pPr>
             <a:r>
@@ -21107,7 +20538,7 @@
           <a:bodyPr wrap="square" lIns="0" tIns="0" rIns="0" bIns="0" rtlCol="0" anchor="ctr"/>
           <a:lstStyle/>
           <a:p>
-            <a:pPr indent="0" marL="0">
+            <a:pPr marL="0" indent="0">
               <a:buNone/>
             </a:pPr>
             <a:r>
@@ -21149,7 +20580,7 @@
             <a:prstDash val="solid"/>
           </a:ln>
           <a:effectLst>
-            <a:outerShdw sx="100000" sy="100000" kx="0" ky="0" algn="bl" rotWithShape="0" blurRad="101600" dist="38100" dir="8100000">
+            <a:outerShdw blurRad="101600" dist="38100" dir="8100000" algn="bl" rotWithShape="0">
               <a:srgbClr val="000000">
                 <a:alpha val="20000"/>
               </a:srgbClr>
@@ -21203,7 +20634,7 @@
           <a:bodyPr wrap="square" lIns="0" tIns="0" rIns="0" bIns="0" rtlCol="0" anchor="t"/>
           <a:lstStyle/>
           <a:p>
-            <a:pPr indent="0" marL="0">
+            <a:pPr marL="0" indent="0">
               <a:buNone/>
             </a:pPr>
             <a:r>
@@ -21220,13 +20651,13 @@
             <a:endParaRPr lang="en-US" sz="1300" dirty="0"/>
           </a:p>
           <a:p>
-            <a:pPr indent="0" marL="0">
+            <a:pPr marL="0" indent="0">
               <a:buNone/>
             </a:pPr>
             <a:endParaRPr lang="en-US" sz="1300" dirty="0"/>
           </a:p>
           <a:p>
-            <a:pPr indent="0" marL="0">
+            <a:pPr marL="0" indent="0">
               <a:buNone/>
             </a:pPr>
             <a:r>
@@ -21243,7 +20674,7 @@
             <a:endParaRPr lang="en-US" sz="1300" dirty="0"/>
           </a:p>
           <a:p>
-            <a:pPr indent="0" marL="0">
+            <a:pPr marL="0" indent="0">
               <a:buNone/>
             </a:pPr>
             <a:r>
@@ -21260,13 +20691,13 @@
             <a:endParaRPr lang="en-US" sz="1300" dirty="0"/>
           </a:p>
           <a:p>
-            <a:pPr indent="0" marL="0">
+            <a:pPr marL="0" indent="0">
               <a:buNone/>
             </a:pPr>
             <a:endParaRPr lang="en-US" sz="1300" dirty="0"/>
           </a:p>
           <a:p>
-            <a:pPr indent="0" marL="0">
+            <a:pPr marL="0" indent="0">
               <a:buNone/>
             </a:pPr>
             <a:r>
@@ -21283,7 +20714,7 @@
             <a:endParaRPr lang="en-US" sz="1300" dirty="0"/>
           </a:p>
           <a:p>
-            <a:pPr indent="0" marL="0">
+            <a:pPr marL="0" indent="0">
               <a:buNone/>
             </a:pPr>
             <a:r>
@@ -21300,7 +20731,7 @@
             <a:endParaRPr lang="en-US" sz="1300" dirty="0"/>
           </a:p>
           <a:p>
-            <a:pPr indent="0" marL="0">
+            <a:pPr marL="0" indent="0">
               <a:buNone/>
             </a:pPr>
             <a:r>
@@ -21317,7 +20748,7 @@
             <a:endParaRPr lang="en-US" sz="1300" dirty="0"/>
           </a:p>
           <a:p>
-            <a:pPr indent="0" marL="0">
+            <a:pPr marL="0" indent="0">
               <a:buNone/>
             </a:pPr>
             <a:r>
@@ -21334,7 +20765,7 @@
             <a:endParaRPr lang="en-US" sz="1300" dirty="0"/>
           </a:p>
           <a:p>
-            <a:pPr indent="0" marL="0">
+            <a:pPr marL="0" indent="0">
               <a:buNone/>
             </a:pPr>
             <a:r>
@@ -21351,7 +20782,7 @@
             <a:endParaRPr lang="en-US" sz="1300" dirty="0"/>
           </a:p>
           <a:p>
-            <a:pPr indent="0" marL="0">
+            <a:pPr marL="0" indent="0">
               <a:buNone/>
             </a:pPr>
             <a:r>
@@ -21368,7 +20799,7 @@
             <a:endParaRPr lang="en-US" sz="1300" dirty="0"/>
           </a:p>
           <a:p>
-            <a:pPr indent="0" marL="0">
+            <a:pPr marL="0" indent="0">
               <a:buNone/>
             </a:pPr>
             <a:r>
@@ -21385,7 +20816,7 @@
             <a:endParaRPr lang="en-US" sz="1300" dirty="0"/>
           </a:p>
           <a:p>
-            <a:pPr indent="0" marL="0">
+            <a:pPr marL="0" indent="0">
               <a:buNone/>
             </a:pPr>
             <a:r>
@@ -21402,7 +20833,7 @@
             <a:endParaRPr lang="en-US" sz="1300" dirty="0"/>
           </a:p>
           <a:p>
-            <a:pPr indent="0" marL="0">
+            <a:pPr marL="0" indent="0">
               <a:buNone/>
             </a:pPr>
             <a:r>
@@ -21419,7 +20850,7 @@
             <a:endParaRPr lang="en-US" sz="1300" dirty="0"/>
           </a:p>
           <a:p>
-            <a:pPr indent="0" marL="0">
+            <a:pPr marL="0" indent="0">
               <a:buNone/>
             </a:pPr>
             <a:r>
@@ -21436,7 +20867,7 @@
             <a:endParaRPr lang="en-US" sz="1300" dirty="0"/>
           </a:p>
           <a:p>
-            <a:pPr indent="0" marL="0">
+            <a:pPr marL="0" indent="0">
               <a:buNone/>
             </a:pPr>
             <a:r>
@@ -21453,7 +20884,7 @@
             <a:endParaRPr lang="en-US" sz="1300" dirty="0"/>
           </a:p>
           <a:p>
-            <a:pPr indent="0" marL="0">
+            <a:pPr marL="0" indent="0">
               <a:buNone/>
             </a:pPr>
             <a:r>
@@ -21519,7 +20950,7 @@
           <a:bodyPr wrap="square" lIns="0" tIns="0" rIns="0" bIns="0" rtlCol="0" anchor="ctr"/>
           <a:lstStyle/>
           <a:p>
-            <a:pPr indent="0" marL="0">
+            <a:pPr marL="0" indent="0">
               <a:buNone/>
             </a:pPr>
             <a:r>
@@ -21608,7 +21039,7 @@
           <a:bodyPr wrap="square" lIns="0" tIns="0" rIns="0" bIns="0" rtlCol="0" anchor="ctr"/>
           <a:lstStyle/>
           <a:p>
-            <a:pPr indent="0" marL="0">
+            <a:pPr marL="0" indent="0">
               <a:buNone/>
             </a:pPr>
             <a:r>
@@ -21642,6 +21073,7 @@
         <a:solidFill>
           <a:srgbClr val="0C1A2E"/>
         </a:solidFill>
+        <a:effectLst/>
       </p:bgPr>
     </p:bg>
     <p:spTree>
@@ -21754,11 +21186,11 @@
           <a:bodyPr wrap="square" lIns="0" tIns="0" rIns="0" bIns="0" rtlCol="0" anchor="ctr"/>
           <a:lstStyle/>
           <a:p>
-            <a:pPr algn="ctr" indent="0" marL="0">
-              <a:buNone/>
-            </a:pPr>
-            <a:r>
-              <a:rPr lang="en-US" sz="1100" b="1" spc="200" kern="0" dirty="0">
+            <a:pPr marL="0" indent="0" algn="ctr">
+              <a:buNone/>
+            </a:pPr>
+            <a:r>
+              <a:rPr lang="en-US" sz="1100" b="1" kern="0" spc="200" dirty="0">
                 <a:solidFill>
                   <a:srgbClr val="FFFFFF"/>
                 </a:solidFill>
@@ -21793,7 +21225,7 @@
           <a:bodyPr wrap="square" lIns="0" tIns="0" rIns="0" bIns="0" rtlCol="0" anchor="ctr"/>
           <a:lstStyle/>
           <a:p>
-            <a:pPr indent="0" marL="0">
+            <a:pPr marL="0" indent="0">
               <a:buNone/>
             </a:pPr>
             <a:r>
@@ -21832,7 +21264,7 @@
           <a:bodyPr wrap="square" rtlCol="0" anchor="ctr"/>
           <a:lstStyle/>
           <a:p>
-            <a:pPr indent="0" marL="0">
+            <a:pPr marL="0" indent="0">
               <a:buNone/>
             </a:pPr>
             <a:r>
@@ -21898,7 +21330,7 @@
           <a:bodyPr wrap="square" lIns="0" tIns="0" rIns="0" bIns="0" rtlCol="0" anchor="ctr"/>
           <a:lstStyle/>
           <a:p>
-            <a:pPr indent="0" marL="0">
+            <a:pPr marL="0" indent="0">
               <a:buNone/>
             </a:pPr>
             <a:r>
@@ -21912,9 +21344,6 @@
               </a:rPr>
               <a:t>▶ </a:t>
             </a:r>
-            <a:pPr indent="0" marL="0">
-              <a:buNone/>
-            </a:pPr>
             <a:r>
               <a:rPr lang="en-US" sz="1300" b="1" dirty="0">
                 <a:solidFill>
@@ -21951,7 +21380,7 @@
           <a:bodyPr wrap="square" lIns="0" tIns="0" rIns="0" bIns="0" rtlCol="0" anchor="ctr"/>
           <a:lstStyle/>
           <a:p>
-            <a:pPr indent="0" marL="0">
+            <a:pPr marL="0" indent="0">
               <a:buNone/>
             </a:pPr>
             <a:r>
@@ -21965,9 +21394,6 @@
               </a:rPr>
               <a:t>▶ </a:t>
             </a:r>
-            <a:pPr indent="0" marL="0">
-              <a:buNone/>
-            </a:pPr>
             <a:r>
               <a:rPr lang="en-US" sz="1300" dirty="0">
                 <a:solidFill>
@@ -22029,7 +21455,7 @@
           <a:bodyPr wrap="square" lIns="0" tIns="0" rIns="0" bIns="0" rtlCol="0" anchor="ctr"/>
           <a:lstStyle/>
           <a:p>
-            <a:pPr indent="0" marL="0">
+            <a:pPr marL="0" indent="0">
               <a:buNone/>
             </a:pPr>
             <a:r>
@@ -22093,7 +21519,7 @@
           <a:bodyPr wrap="square" lIns="0" tIns="0" rIns="0" bIns="0" rtlCol="0" anchor="ctr"/>
           <a:lstStyle/>
           <a:p>
-            <a:pPr indent="0" marL="0">
+            <a:pPr marL="0" indent="0">
               <a:buNone/>
             </a:pPr>
             <a:r>
@@ -22157,7 +21583,7 @@
           <a:bodyPr wrap="square" lIns="0" tIns="0" rIns="0" bIns="0" rtlCol="0" anchor="ctr"/>
           <a:lstStyle/>
           <a:p>
-            <a:pPr indent="0" marL="0">
+            <a:pPr marL="0" indent="0">
               <a:buNone/>
             </a:pPr>
             <a:r>
@@ -22223,7 +21649,7 @@
           <a:bodyPr wrap="square" lIns="0" tIns="0" rIns="0" bIns="0" rtlCol="0" anchor="ctr"/>
           <a:lstStyle/>
           <a:p>
-            <a:pPr indent="0" marL="0">
+            <a:pPr marL="0" indent="0">
               <a:buNone/>
             </a:pPr>
             <a:r>
@@ -22287,7 +21713,7 @@
           <a:bodyPr wrap="square" lIns="0" tIns="0" rIns="0" bIns="0" rtlCol="0" anchor="ctr"/>
           <a:lstStyle/>
           <a:p>
-            <a:pPr indent="0" marL="0">
+            <a:pPr marL="0" indent="0">
               <a:buNone/>
             </a:pPr>
             <a:r>
@@ -22321,6 +21747,7 @@
         <a:solidFill>
           <a:srgbClr val="0C1A2E"/>
         </a:solidFill>
+        <a:effectLst/>
       </p:bgPr>
     </p:bg>
     <p:spTree>
@@ -22433,11 +21860,11 @@
           <a:bodyPr wrap="square" lIns="0" tIns="0" rIns="0" bIns="0" rtlCol="0" anchor="ctr"/>
           <a:lstStyle/>
           <a:p>
-            <a:pPr algn="ctr" indent="0" marL="0">
-              <a:buNone/>
-            </a:pPr>
-            <a:r>
-              <a:rPr lang="en-US" sz="1100" b="1" spc="200" kern="0" dirty="0">
+            <a:pPr marL="0" indent="0" algn="ctr">
+              <a:buNone/>
+            </a:pPr>
+            <a:r>
+              <a:rPr lang="en-US" sz="1100" b="1" kern="0" spc="200" dirty="0">
                 <a:solidFill>
                   <a:srgbClr val="FFFFFF"/>
                 </a:solidFill>
@@ -22472,7 +21899,7 @@
           <a:bodyPr wrap="square" lIns="0" tIns="0" rIns="0" bIns="0" rtlCol="0" anchor="ctr"/>
           <a:lstStyle/>
           <a:p>
-            <a:pPr indent="0" marL="0">
+            <a:pPr marL="0" indent="0">
               <a:buNone/>
             </a:pPr>
             <a:r>
@@ -22511,7 +21938,7 @@
           <a:bodyPr wrap="square" rtlCol="0" anchor="ctr"/>
           <a:lstStyle/>
           <a:p>
-            <a:pPr indent="0" marL="0">
+            <a:pPr marL="0" indent="0">
               <a:buNone/>
             </a:pPr>
             <a:r>
@@ -22577,7 +22004,7 @@
           <a:bodyPr wrap="square" lIns="0" tIns="0" rIns="0" bIns="0" rtlCol="0" anchor="ctr"/>
           <a:lstStyle/>
           <a:p>
-            <a:pPr indent="0" marL="0">
+            <a:pPr marL="0" indent="0">
               <a:buNone/>
             </a:pPr>
             <a:r>
@@ -22591,9 +22018,6 @@
               </a:rPr>
               <a:t>▶ </a:t>
             </a:r>
-            <a:pPr indent="0" marL="0">
-              <a:buNone/>
-            </a:pPr>
             <a:r>
               <a:rPr lang="en-US" sz="1300" b="1" dirty="0">
                 <a:solidFill>
@@ -22630,7 +22054,7 @@
           <a:bodyPr wrap="square" lIns="0" tIns="0" rIns="0" bIns="0" rtlCol="0" anchor="ctr"/>
           <a:lstStyle/>
           <a:p>
-            <a:pPr indent="0" marL="0">
+            <a:pPr marL="0" indent="0">
               <a:buNone/>
             </a:pPr>
             <a:r>
@@ -22644,9 +22068,6 @@
               </a:rPr>
               <a:t>▶ </a:t>
             </a:r>
-            <a:pPr indent="0" marL="0">
-              <a:buNone/>
-            </a:pPr>
             <a:r>
               <a:rPr lang="en-US" sz="1300" dirty="0">
                 <a:solidFill>
@@ -22656,7 +22077,51 @@
                 <a:ea typeface="Calibri" pitchFamily="34" charset="-122"/>
                 <a:cs typeface="Calibri" pitchFamily="34" charset="-120"/>
               </a:rPr>
-              <a:t>Funcione para números inteiros positivos e negativos.</a:t>
+              <a:t>Funcione para números </a:t>
+            </a:r>
+            <a:r>
+              <a:rPr lang="en-US" sz="1300" dirty="0" err="1">
+                <a:solidFill>
+                  <a:srgbClr val="FFFFFF"/>
+                </a:solidFill>
+                <a:latin typeface="Calibri" pitchFamily="34" charset="0"/>
+                <a:ea typeface="Calibri" pitchFamily="34" charset="-122"/>
+                <a:cs typeface="Calibri" pitchFamily="34" charset="-120"/>
+              </a:rPr>
+              <a:t>inteiros</a:t>
+            </a:r>
+            <a:r>
+              <a:rPr lang="en-US" sz="1300" dirty="0">
+                <a:solidFill>
+                  <a:srgbClr val="FFFFFF"/>
+                </a:solidFill>
+                <a:latin typeface="Calibri" pitchFamily="34" charset="0"/>
+                <a:ea typeface="Calibri" pitchFamily="34" charset="-122"/>
+                <a:cs typeface="Calibri" pitchFamily="34" charset="-120"/>
+              </a:rPr>
+              <a:t> </a:t>
+            </a:r>
+            <a:r>
+              <a:rPr lang="en-US" sz="1300" dirty="0" err="1">
+                <a:solidFill>
+                  <a:srgbClr val="FFFFFF"/>
+                </a:solidFill>
+                <a:latin typeface="Calibri" pitchFamily="34" charset="0"/>
+                <a:ea typeface="Calibri" pitchFamily="34" charset="-122"/>
+                <a:cs typeface="Calibri" pitchFamily="34" charset="-120"/>
+              </a:rPr>
+              <a:t>positivos</a:t>
+            </a:r>
+            <a:r>
+              <a:rPr lang="en-US" sz="1300" dirty="0">
+                <a:solidFill>
+                  <a:srgbClr val="FFFFFF"/>
+                </a:solidFill>
+                <a:latin typeface="Calibri" pitchFamily="34" charset="0"/>
+                <a:ea typeface="Calibri" pitchFamily="34" charset="-122"/>
+                <a:cs typeface="Calibri" pitchFamily="34" charset="-120"/>
+              </a:rPr>
+              <a:t>.</a:t>
             </a:r>
             <a:endParaRPr lang="en-US" sz="1300" dirty="0"/>
           </a:p>
@@ -22708,7 +22173,7 @@
           <a:bodyPr wrap="square" lIns="0" tIns="0" rIns="0" bIns="0" rtlCol="0" anchor="ctr"/>
           <a:lstStyle/>
           <a:p>
-            <a:pPr indent="0" marL="0">
+            <a:pPr marL="0" indent="0">
               <a:buNone/>
             </a:pPr>
             <a:r>
@@ -22772,7 +22237,7 @@
           <a:bodyPr wrap="square" lIns="0" tIns="0" rIns="0" bIns="0" rtlCol="0" anchor="ctr"/>
           <a:lstStyle/>
           <a:p>
-            <a:pPr indent="0" marL="0">
+            <a:pPr marL="0" indent="0">
               <a:buNone/>
             </a:pPr>
             <a:r>
@@ -22784,7 +22249,7 @@
                 <a:ea typeface="Courier New" pitchFamily="34" charset="-122"/>
                 <a:cs typeface="Courier New" pitchFamily="34" charset="-120"/>
               </a:rPr>
-              <a:t>12 → "um dois" | -15 → "menos um cinco"</a:t>
+              <a:t>12 → "um dois" | 15 → "um cinco"</a:t>
             </a:r>
             <a:endParaRPr lang="en-US" sz="1250" dirty="0"/>
           </a:p>
@@ -22811,7 +22276,7 @@
           <a:bodyPr wrap="square" lIns="0" tIns="0" rIns="0" bIns="0" rtlCol="0" anchor="ctr"/>
           <a:lstStyle/>
           <a:p>
-            <a:pPr indent="0" marL="0">
+            <a:pPr marL="0" indent="0">
               <a:buNone/>
             </a:pPr>
             <a:r>
@@ -22825,9 +22290,6 @@
               </a:rPr>
               <a:t>▶ </a:t>
             </a:r>
-            <a:pPr indent="0" marL="0">
-              <a:buNone/>
-            </a:pPr>
             <a:r>
               <a:rPr lang="en-US" sz="1300" dirty="0">
                 <a:solidFill>
@@ -22891,7 +22353,7 @@
           <a:bodyPr wrap="square" lIns="0" tIns="0" rIns="0" bIns="0" rtlCol="0" anchor="ctr"/>
           <a:lstStyle/>
           <a:p>
-            <a:pPr indent="0" marL="0">
+            <a:pPr marL="0" indent="0">
               <a:buNone/>
             </a:pPr>
             <a:r>
@@ -22955,7 +22417,7 @@
           <a:bodyPr wrap="square" lIns="0" tIns="0" rIns="0" bIns="0" rtlCol="0" anchor="ctr"/>
           <a:lstStyle/>
           <a:p>
-            <a:pPr indent="0" marL="0">
+            <a:pPr marL="0" indent="0">
               <a:buNone/>
             </a:pPr>
             <a:r>
@@ -22989,6 +22451,7 @@
         <a:solidFill>
           <a:srgbClr val="0C1A2E"/>
         </a:solidFill>
+        <a:effectLst/>
       </p:bgPr>
     </p:bg>
     <p:spTree>
@@ -23101,11 +22564,11 @@
           <a:bodyPr wrap="square" lIns="0" tIns="0" rIns="0" bIns="0" rtlCol="0" anchor="ctr"/>
           <a:lstStyle/>
           <a:p>
-            <a:pPr algn="ctr" indent="0" marL="0">
-              <a:buNone/>
-            </a:pPr>
-            <a:r>
-              <a:rPr lang="en-US" sz="1100" b="1" spc="200" kern="0" dirty="0">
+            <a:pPr marL="0" indent="0" algn="ctr">
+              <a:buNone/>
+            </a:pPr>
+            <a:r>
+              <a:rPr lang="en-US" sz="1100" b="1" kern="0" spc="200" dirty="0">
                 <a:solidFill>
                   <a:srgbClr val="FFFFFF"/>
                 </a:solidFill>
@@ -23140,7 +22603,7 @@
           <a:bodyPr wrap="square" lIns="0" tIns="0" rIns="0" bIns="0" rtlCol="0" anchor="ctr"/>
           <a:lstStyle/>
           <a:p>
-            <a:pPr indent="0" marL="0">
+            <a:pPr marL="0" indent="0">
               <a:buNone/>
             </a:pPr>
             <a:r>
@@ -23179,7 +22642,7 @@
           <a:bodyPr wrap="square" rtlCol="0" anchor="ctr"/>
           <a:lstStyle/>
           <a:p>
-            <a:pPr indent="0" marL="0">
+            <a:pPr marL="0" indent="0">
               <a:buNone/>
             </a:pPr>
             <a:r>
@@ -23245,7 +22708,7 @@
           <a:bodyPr wrap="square" lIns="0" tIns="0" rIns="0" bIns="0" rtlCol="0" anchor="ctr"/>
           <a:lstStyle/>
           <a:p>
-            <a:pPr indent="0" marL="0">
+            <a:pPr marL="0" indent="0">
               <a:buNone/>
             </a:pPr>
             <a:r>
@@ -23259,9 +22722,6 @@
               </a:rPr>
               <a:t>▶ </a:t>
             </a:r>
-            <a:pPr indent="0" marL="0">
-              <a:buNone/>
-            </a:pPr>
             <a:r>
               <a:rPr lang="en-US" sz="1300" b="1" dirty="0">
                 <a:solidFill>
@@ -23298,7 +22758,7 @@
           <a:bodyPr wrap="square" lIns="0" tIns="0" rIns="0" bIns="0" rtlCol="0" anchor="ctr"/>
           <a:lstStyle/>
           <a:p>
-            <a:pPr indent="0" marL="0">
+            <a:pPr marL="0" indent="0">
               <a:buNone/>
             </a:pPr>
             <a:r>
@@ -23312,9 +22772,6 @@
               </a:rPr>
               <a:t>▶ </a:t>
             </a:r>
-            <a:pPr indent="0" marL="0">
-              <a:buNone/>
-            </a:pPr>
             <a:r>
               <a:rPr lang="en-US" sz="1300" dirty="0">
                 <a:solidFill>
@@ -23376,7 +22833,7 @@
           <a:bodyPr wrap="square" lIns="0" tIns="0" rIns="0" bIns="0" rtlCol="0" anchor="ctr"/>
           <a:lstStyle/>
           <a:p>
-            <a:pPr indent="0" marL="0">
+            <a:pPr marL="0" indent="0">
               <a:buNone/>
             </a:pPr>
             <a:r>
@@ -23440,7 +22897,7 @@
           <a:bodyPr wrap="square" lIns="0" tIns="0" rIns="0" bIns="0" rtlCol="0" anchor="ctr"/>
           <a:lstStyle/>
           <a:p>
-            <a:pPr indent="0" marL="0">
+            <a:pPr marL="0" indent="0">
               <a:buNone/>
             </a:pPr>
             <a:r>
@@ -23479,7 +22936,7 @@
           <a:bodyPr wrap="square" lIns="0" tIns="0" rIns="0" bIns="0" rtlCol="0" anchor="ctr"/>
           <a:lstStyle/>
           <a:p>
-            <a:pPr indent="0" marL="0">
+            <a:pPr marL="0" indent="0">
               <a:buNone/>
             </a:pPr>
             <a:r>
@@ -23493,9 +22950,6 @@
               </a:rPr>
               <a:t>▶ </a:t>
             </a:r>
-            <a:pPr indent="0" marL="0">
-              <a:buNone/>
-            </a:pPr>
             <a:r>
               <a:rPr lang="en-US" sz="1300" dirty="0">
                 <a:solidFill>
@@ -23559,7 +23013,7 @@
           <a:bodyPr wrap="square" lIns="0" tIns="0" rIns="0" bIns="0" rtlCol="0" anchor="ctr"/>
           <a:lstStyle/>
           <a:p>
-            <a:pPr indent="0" marL="0">
+            <a:pPr marL="0" indent="0">
               <a:buNone/>
             </a:pPr>
             <a:r>
@@ -23623,7 +23077,7 @@
           <a:bodyPr wrap="square" lIns="0" tIns="0" rIns="0" bIns="0" rtlCol="0" anchor="ctr"/>
           <a:lstStyle/>
           <a:p>
-            <a:pPr indent="0" marL="0">
+            <a:pPr marL="0" indent="0">
               <a:buNone/>
             </a:pPr>
             <a:r>
@@ -23657,6 +23111,7 @@
         <a:solidFill>
           <a:srgbClr val="0C1A2E"/>
         </a:solidFill>
+        <a:effectLst/>
       </p:bgPr>
     </p:bg>
     <p:spTree>
@@ -23769,11 +23224,11 @@
           <a:bodyPr wrap="square" lIns="0" tIns="0" rIns="0" bIns="0" rtlCol="0" anchor="ctr"/>
           <a:lstStyle/>
           <a:p>
-            <a:pPr algn="ctr" indent="0" marL="0">
-              <a:buNone/>
-            </a:pPr>
-            <a:r>
-              <a:rPr lang="en-US" sz="1100" b="1" spc="200" kern="0" dirty="0">
+            <a:pPr marL="0" indent="0" algn="ctr">
+              <a:buNone/>
+            </a:pPr>
+            <a:r>
+              <a:rPr lang="en-US" sz="1100" b="1" kern="0" spc="200" dirty="0">
                 <a:solidFill>
                   <a:srgbClr val="FFFFFF"/>
                 </a:solidFill>
@@ -23808,7 +23263,7 @@
           <a:bodyPr wrap="square" lIns="0" tIns="0" rIns="0" bIns="0" rtlCol="0" anchor="ctr"/>
           <a:lstStyle/>
           <a:p>
-            <a:pPr indent="0" marL="0">
+            <a:pPr marL="0" indent="0">
               <a:buNone/>
             </a:pPr>
             <a:r>
@@ -23847,7 +23302,7 @@
           <a:bodyPr wrap="square" rtlCol="0" anchor="ctr"/>
           <a:lstStyle/>
           <a:p>
-            <a:pPr indent="0" marL="0">
+            <a:pPr marL="0" indent="0">
               <a:buNone/>
             </a:pPr>
             <a:r>
@@ -23913,7 +23368,7 @@
           <a:bodyPr wrap="square" lIns="0" tIns="0" rIns="0" bIns="0" rtlCol="0" anchor="ctr"/>
           <a:lstStyle/>
           <a:p>
-            <a:pPr indent="0" marL="0">
+            <a:pPr marL="0" indent="0">
               <a:buNone/>
             </a:pPr>
             <a:r>
@@ -23927,9 +23382,6 @@
               </a:rPr>
               <a:t>▶ </a:t>
             </a:r>
-            <a:pPr indent="0" marL="0">
-              <a:buNone/>
-            </a:pPr>
             <a:r>
               <a:rPr lang="en-US" sz="1300" b="1" dirty="0">
                 <a:solidFill>
@@ -23966,7 +23418,7 @@
           <a:bodyPr wrap="square" lIns="0" tIns="0" rIns="0" bIns="0" rtlCol="0" anchor="ctr"/>
           <a:lstStyle/>
           <a:p>
-            <a:pPr indent="0" marL="0">
+            <a:pPr marL="0" indent="0">
               <a:buNone/>
             </a:pPr>
             <a:r>
@@ -23980,9 +23432,6 @@
               </a:rPr>
               <a:t>▶ </a:t>
             </a:r>
-            <a:pPr indent="0" marL="0">
-              <a:buNone/>
-            </a:pPr>
             <a:r>
               <a:rPr lang="en-US" sz="1300" dirty="0">
                 <a:solidFill>
@@ -24019,7 +23468,7 @@
           <a:bodyPr wrap="square" lIns="0" tIns="0" rIns="0" bIns="0" rtlCol="0" anchor="ctr"/>
           <a:lstStyle/>
           <a:p>
-            <a:pPr indent="0" marL="0">
+            <a:pPr marL="0" indent="0">
               <a:buNone/>
             </a:pPr>
             <a:r>
@@ -24033,9 +23482,6 @@
               </a:rPr>
               <a:t>▶ </a:t>
             </a:r>
-            <a:pPr indent="0" marL="0">
-              <a:buNone/>
-            </a:pPr>
             <a:r>
               <a:rPr lang="en-US" sz="1300" dirty="0">
                 <a:solidFill>
@@ -24097,7 +23543,7 @@
           <a:bodyPr wrap="square" lIns="0" tIns="0" rIns="0" bIns="0" rtlCol="0" anchor="ctr"/>
           <a:lstStyle/>
           <a:p>
-            <a:pPr indent="0" marL="0">
+            <a:pPr marL="0" indent="0">
               <a:buNone/>
             </a:pPr>
             <a:r>
@@ -24161,7 +23607,7 @@
           <a:bodyPr wrap="square" lIns="0" tIns="0" rIns="0" bIns="0" rtlCol="0" anchor="ctr"/>
           <a:lstStyle/>
           <a:p>
-            <a:pPr indent="0" marL="0">
+            <a:pPr marL="0" indent="0">
               <a:buNone/>
             </a:pPr>
             <a:r>
@@ -24227,7 +23673,7 @@
           <a:bodyPr wrap="square" lIns="0" tIns="0" rIns="0" bIns="0" rtlCol="0" anchor="ctr"/>
           <a:lstStyle/>
           <a:p>
-            <a:pPr indent="0" marL="0">
+            <a:pPr marL="0" indent="0">
               <a:buNone/>
             </a:pPr>
             <a:r>
@@ -24291,7 +23737,7 @@
           <a:bodyPr wrap="square" lIns="0" tIns="0" rIns="0" bIns="0" rtlCol="0" anchor="ctr"/>
           <a:lstStyle/>
           <a:p>
-            <a:pPr indent="0" marL="0">
+            <a:pPr marL="0" indent="0">
               <a:buNone/>
             </a:pPr>
             <a:r>
@@ -24325,6 +23771,7 @@
         <a:solidFill>
           <a:srgbClr val="0C1A2E"/>
         </a:solidFill>
+        <a:effectLst/>
       </p:bgPr>
     </p:bg>
     <p:spTree>
@@ -24437,11 +23884,11 @@
           <a:bodyPr wrap="square" lIns="0" tIns="0" rIns="0" bIns="0" rtlCol="0" anchor="ctr"/>
           <a:lstStyle/>
           <a:p>
-            <a:pPr algn="ctr" indent="0" marL="0">
-              <a:buNone/>
-            </a:pPr>
-            <a:r>
-              <a:rPr lang="en-US" sz="1100" b="1" spc="200" kern="0" dirty="0">
+            <a:pPr marL="0" indent="0" algn="ctr">
+              <a:buNone/>
+            </a:pPr>
+            <a:r>
+              <a:rPr lang="en-US" sz="1100" b="1" kern="0" spc="200" dirty="0">
                 <a:solidFill>
                   <a:srgbClr val="FFFFFF"/>
                 </a:solidFill>
@@ -24476,7 +23923,7 @@
           <a:bodyPr wrap="square" lIns="0" tIns="0" rIns="0" bIns="0" rtlCol="0" anchor="ctr"/>
           <a:lstStyle/>
           <a:p>
-            <a:pPr indent="0" marL="0">
+            <a:pPr marL="0" indent="0">
               <a:buNone/>
             </a:pPr>
             <a:r>
@@ -24515,7 +23962,7 @@
           <a:bodyPr wrap="square" rtlCol="0" anchor="ctr"/>
           <a:lstStyle/>
           <a:p>
-            <a:pPr indent="0" marL="0">
+            <a:pPr marL="0" indent="0">
               <a:buNone/>
             </a:pPr>
             <a:r>
@@ -24581,7 +24028,7 @@
           <a:bodyPr wrap="square" lIns="0" tIns="0" rIns="0" bIns="0" rtlCol="0" anchor="ctr"/>
           <a:lstStyle/>
           <a:p>
-            <a:pPr indent="0" marL="0">
+            <a:pPr marL="0" indent="0">
               <a:buNone/>
             </a:pPr>
             <a:r>
@@ -24595,9 +24042,6 @@
               </a:rPr>
               <a:t>▶ </a:t>
             </a:r>
-            <a:pPr indent="0" marL="0">
-              <a:buNone/>
-            </a:pPr>
             <a:r>
               <a:rPr lang="en-US" sz="1300" b="1" dirty="0">
                 <a:solidFill>
@@ -24634,7 +24078,7 @@
           <a:bodyPr wrap="square" lIns="0" tIns="0" rIns="0" bIns="0" rtlCol="0" anchor="ctr"/>
           <a:lstStyle/>
           <a:p>
-            <a:pPr indent="0" marL="0">
+            <a:pPr marL="0" indent="0">
               <a:buNone/>
             </a:pPr>
             <a:r>
@@ -24648,9 +24092,6 @@
               </a:rPr>
               <a:t>▶ </a:t>
             </a:r>
-            <a:pPr indent="0" marL="0">
-              <a:buNone/>
-            </a:pPr>
             <a:r>
               <a:rPr lang="en-US" sz="1300" dirty="0">
                 <a:solidFill>
@@ -24712,7 +24153,7 @@
           <a:bodyPr wrap="square" lIns="0" tIns="0" rIns="0" bIns="0" rtlCol="0" anchor="ctr"/>
           <a:lstStyle/>
           <a:p>
-            <a:pPr indent="0" marL="0">
+            <a:pPr marL="0" indent="0">
               <a:buNone/>
             </a:pPr>
             <a:r>
@@ -24776,7 +24217,7 @@
           <a:bodyPr wrap="square" lIns="0" tIns="0" rIns="0" bIns="0" rtlCol="0" anchor="ctr"/>
           <a:lstStyle/>
           <a:p>
-            <a:pPr indent="0" marL="0">
+            <a:pPr marL="0" indent="0">
               <a:buNone/>
             </a:pPr>
             <a:r>
@@ -24815,7 +24256,7 @@
           <a:bodyPr wrap="square" lIns="0" tIns="0" rIns="0" bIns="0" rtlCol="0" anchor="ctr"/>
           <a:lstStyle/>
           <a:p>
-            <a:pPr indent="0" marL="0">
+            <a:pPr marL="0" indent="0">
               <a:buNone/>
             </a:pPr>
             <a:r>
@@ -24829,9 +24270,6 @@
               </a:rPr>
               <a:t>▶ </a:t>
             </a:r>
-            <a:pPr indent="0" marL="0">
-              <a:buNone/>
-            </a:pPr>
             <a:r>
               <a:rPr lang="en-US" sz="1300" dirty="0">
                 <a:solidFill>
@@ -24895,7 +24333,7 @@
           <a:bodyPr wrap="square" lIns="0" tIns="0" rIns="0" bIns="0" rtlCol="0" anchor="ctr"/>
           <a:lstStyle/>
           <a:p>
-            <a:pPr indent="0" marL="0">
+            <a:pPr marL="0" indent="0">
               <a:buNone/>
             </a:pPr>
             <a:r>
@@ -24959,7 +24397,7 @@
           <a:bodyPr wrap="square" lIns="0" tIns="0" rIns="0" bIns="0" rtlCol="0" anchor="ctr"/>
           <a:lstStyle/>
           <a:p>
-            <a:pPr indent="0" marL="0">
+            <a:pPr marL="0" indent="0">
               <a:buNone/>
             </a:pPr>
             <a:r>
@@ -24993,6 +24431,7 @@
         <a:solidFill>
           <a:srgbClr val="1A0E2E"/>
         </a:solidFill>
+        <a:effectLst/>
       </p:bgPr>
     </p:bg>
     <p:spTree>
@@ -25082,7 +24521,7 @@
           <a:bodyPr wrap="square" rtlCol="0" anchor="ctr"/>
           <a:lstStyle/>
           <a:p>
-            <a:pPr indent="0" marL="0">
+            <a:pPr marL="0" indent="0">
               <a:buNone/>
             </a:pPr>
             <a:r>
@@ -25121,11 +24560,11 @@
           <a:bodyPr wrap="square" rtlCol="0" anchor="ctr"/>
           <a:lstStyle/>
           <a:p>
-            <a:pPr indent="0" marL="0">
-              <a:buNone/>
-            </a:pPr>
-            <a:r>
-              <a:rPr lang="en-US" sz="1100" b="1" spc="400" kern="0" dirty="0">
+            <a:pPr marL="0" indent="0">
+              <a:buNone/>
+            </a:pPr>
+            <a:r>
+              <a:rPr lang="en-US" sz="1100" b="1" kern="0" spc="400" dirty="0">
                 <a:solidFill>
                   <a:srgbClr val="C4B5FD"/>
                 </a:solidFill>
@@ -25160,7 +24599,7 @@
           <a:bodyPr wrap="square" rtlCol="0" anchor="ctr"/>
           <a:lstStyle/>
           <a:p>
-            <a:pPr indent="0" marL="0">
+            <a:pPr marL="0" indent="0">
               <a:buNone/>
             </a:pPr>
             <a:r>
@@ -25199,7 +24638,7 @@
           <a:bodyPr wrap="square" rtlCol="0" anchor="ctr"/>
           <a:lstStyle/>
           <a:p>
-            <a:pPr indent="0" marL="0">
+            <a:pPr marL="0" indent="0">
               <a:buNone/>
             </a:pPr>
             <a:r>
@@ -25238,7 +24677,7 @@
           <a:bodyPr wrap="square" rtlCol="0" anchor="ctr"/>
           <a:lstStyle/>
           <a:p>
-            <a:pPr indent="0" marL="0">
+            <a:pPr marL="0" indent="0">
               <a:buNone/>
             </a:pPr>
             <a:r>
@@ -25272,6 +24711,7 @@
         <a:solidFill>
           <a:srgbClr val="F5F3FF"/>
         </a:solidFill>
+        <a:effectLst/>
       </p:bgPr>
     </p:bg>
     <p:spTree>
@@ -25359,7 +24799,7 @@
           <a:bodyPr wrap="square" lIns="0" tIns="0" rIns="0" bIns="0" rtlCol="0" anchor="ctr"/>
           <a:lstStyle/>
           <a:p>
-            <a:pPr indent="0" marL="0">
+            <a:pPr marL="0" indent="0">
               <a:buNone/>
             </a:pPr>
             <a:r>
@@ -25398,7 +24838,7 @@
           <a:bodyPr wrap="square" lIns="0" tIns="0" rIns="0" bIns="0" rtlCol="0" anchor="ctr"/>
           <a:lstStyle/>
           <a:p>
-            <a:pPr indent="0" marL="0">
+            <a:pPr marL="0" indent="0">
               <a:buNone/>
             </a:pPr>
             <a:r>
@@ -25412,9 +24852,6 @@
               </a:rPr>
               <a:t>❯ </a:t>
             </a:r>
-            <a:pPr indent="0" marL="0">
-              <a:buNone/>
-            </a:pPr>
             <a:r>
               <a:rPr lang="en-US" sz="1350" b="1" dirty="0">
                 <a:solidFill>
@@ -25451,7 +24888,7 @@
           <a:bodyPr wrap="square" lIns="0" tIns="0" rIns="0" bIns="0" rtlCol="0" anchor="ctr"/>
           <a:lstStyle/>
           <a:p>
-            <a:pPr indent="0" marL="0">
+            <a:pPr marL="0" indent="0">
               <a:buNone/>
             </a:pPr>
             <a:r>
@@ -25465,9 +24902,6 @@
               </a:rPr>
               <a:t>❯ </a:t>
             </a:r>
-            <a:pPr indent="0" marL="0">
-              <a:buNone/>
-            </a:pPr>
             <a:r>
               <a:rPr lang="en-US" sz="1350" b="1" dirty="0">
                 <a:solidFill>
@@ -25504,7 +24938,7 @@
           <a:bodyPr wrap="square" lIns="0" tIns="0" rIns="0" bIns="0" rtlCol="0" anchor="ctr"/>
           <a:lstStyle/>
           <a:p>
-            <a:pPr indent="0" marL="0">
+            <a:pPr marL="0" indent="0">
               <a:buNone/>
             </a:pPr>
             <a:r>
@@ -25518,9 +24952,6 @@
               </a:rPr>
               <a:t>❯ </a:t>
             </a:r>
-            <a:pPr indent="0" marL="0">
-              <a:buNone/>
-            </a:pPr>
             <a:r>
               <a:rPr lang="en-US" sz="1350" dirty="0">
                 <a:solidFill>
@@ -25557,7 +24988,7 @@
           <a:bodyPr wrap="square" lIns="0" tIns="0" rIns="0" bIns="0" rtlCol="0" anchor="ctr"/>
           <a:lstStyle/>
           <a:p>
-            <a:pPr indent="0" marL="0">
+            <a:pPr marL="0" indent="0">
               <a:buNone/>
             </a:pPr>
             <a:r>
@@ -25571,9 +25002,6 @@
               </a:rPr>
               <a:t>❯ </a:t>
             </a:r>
-            <a:pPr indent="0" marL="0">
-              <a:buNone/>
-            </a:pPr>
             <a:r>
               <a:rPr lang="en-US" sz="1350" dirty="0">
                 <a:solidFill>
@@ -25610,7 +25038,7 @@
           <a:bodyPr wrap="square" lIns="0" tIns="0" rIns="0" bIns="0" rtlCol="0" anchor="ctr"/>
           <a:lstStyle/>
           <a:p>
-            <a:pPr indent="0" marL="0">
+            <a:pPr marL="0" indent="0">
               <a:buNone/>
             </a:pPr>
             <a:r>
@@ -25624,9 +25052,6 @@
               </a:rPr>
               <a:t>❯ </a:t>
             </a:r>
-            <a:pPr indent="0" marL="0">
-              <a:buNone/>
-            </a:pPr>
             <a:r>
               <a:rPr lang="en-US" sz="1350" dirty="0">
                 <a:solidFill>
@@ -25663,7 +25088,7 @@
           <a:bodyPr wrap="square" lIns="0" tIns="0" rIns="0" bIns="0" rtlCol="0" anchor="ctr"/>
           <a:lstStyle/>
           <a:p>
-            <a:pPr indent="0" marL="0">
+            <a:pPr marL="0" indent="0">
               <a:buNone/>
             </a:pPr>
             <a:r>
@@ -25677,9 +25102,6 @@
               </a:rPr>
               <a:t>❯ </a:t>
             </a:r>
-            <a:pPr indent="0" marL="0">
-              <a:buNone/>
-            </a:pPr>
             <a:r>
               <a:rPr lang="en-US" sz="1350" dirty="0">
                 <a:solidFill>
@@ -25716,7 +25138,7 @@
           <a:bodyPr wrap="square" lIns="0" tIns="0" rIns="0" bIns="0" rtlCol="0" anchor="ctr"/>
           <a:lstStyle/>
           <a:p>
-            <a:pPr indent="0" marL="0">
+            <a:pPr marL="0" indent="0">
               <a:buNone/>
             </a:pPr>
             <a:r>
@@ -25730,9 +25152,6 @@
               </a:rPr>
               <a:t>❯ </a:t>
             </a:r>
-            <a:pPr indent="0" marL="0">
-              <a:buNone/>
-            </a:pPr>
             <a:r>
               <a:rPr lang="en-US" sz="1350" dirty="0">
                 <a:solidFill>
@@ -25796,7 +25215,7 @@
           <a:bodyPr wrap="square" lIns="0" tIns="0" rIns="0" bIns="0" rtlCol="0" anchor="ctr"/>
           <a:lstStyle/>
           <a:p>
-            <a:pPr indent="0" marL="0">
+            <a:pPr marL="0" indent="0">
               <a:buNone/>
             </a:pPr>
             <a:r>
@@ -25885,7 +25304,7 @@
           <a:bodyPr wrap="square" lIns="0" tIns="0" rIns="0" bIns="0" rtlCol="0" anchor="ctr"/>
           <a:lstStyle/>
           <a:p>
-            <a:pPr indent="0" marL="0">
+            <a:pPr marL="0" indent="0">
               <a:buNone/>
             </a:pPr>
             <a:r>
@@ -25919,6 +25338,7 @@
         <a:solidFill>
           <a:srgbClr val="F5F3FF"/>
         </a:solidFill>
+        <a:effectLst/>
       </p:bgPr>
     </p:bg>
     <p:spTree>
@@ -26006,7 +25426,7 @@
           <a:bodyPr wrap="square" lIns="0" tIns="0" rIns="0" bIns="0" rtlCol="0" anchor="ctr"/>
           <a:lstStyle/>
           <a:p>
-            <a:pPr indent="0" marL="0">
+            <a:pPr marL="0" indent="0">
               <a:buNone/>
             </a:pPr>
             <a:r>
@@ -26045,7 +25465,7 @@
           <a:bodyPr wrap="square" lIns="0" tIns="0" rIns="0" bIns="0" rtlCol="0" anchor="ctr"/>
           <a:lstStyle/>
           <a:p>
-            <a:pPr indent="0" marL="0">
+            <a:pPr marL="0" indent="0">
               <a:buNone/>
             </a:pPr>
             <a:r>
@@ -26059,9 +25479,6 @@
               </a:rPr>
               <a:t>❯ </a:t>
             </a:r>
-            <a:pPr indent="0" marL="0">
-              <a:buNone/>
-            </a:pPr>
             <a:r>
               <a:rPr lang="en-US" sz="1350" b="1" dirty="0">
                 <a:solidFill>
@@ -26098,7 +25515,7 @@
           <a:bodyPr wrap="square" lIns="0" tIns="0" rIns="0" bIns="0" rtlCol="0" anchor="ctr"/>
           <a:lstStyle/>
           <a:p>
-            <a:pPr indent="0" marL="0">
+            <a:pPr marL="0" indent="0">
               <a:buNone/>
             </a:pPr>
             <a:r>
@@ -26112,9 +25529,6 @@
               </a:rPr>
               <a:t>❯ </a:t>
             </a:r>
-            <a:pPr indent="0" marL="0">
-              <a:buNone/>
-            </a:pPr>
             <a:r>
               <a:rPr lang="en-US" sz="1350" dirty="0">
                 <a:solidFill>
@@ -26151,7 +25565,7 @@
           <a:bodyPr wrap="square" lIns="0" tIns="0" rIns="0" bIns="0" rtlCol="0" anchor="ctr"/>
           <a:lstStyle/>
           <a:p>
-            <a:pPr indent="0" marL="0">
+            <a:pPr marL="0" indent="0">
               <a:buNone/>
             </a:pPr>
             <a:r>
@@ -26165,9 +25579,6 @@
               </a:rPr>
               <a:t>❯ </a:t>
             </a:r>
-            <a:pPr indent="0" marL="0">
-              <a:buNone/>
-            </a:pPr>
             <a:r>
               <a:rPr lang="en-US" sz="1350" b="1" dirty="0">
                 <a:solidFill>
@@ -26204,7 +25615,7 @@
           <a:bodyPr wrap="square" lIns="0" tIns="0" rIns="0" bIns="0" rtlCol="0" anchor="ctr"/>
           <a:lstStyle/>
           <a:p>
-            <a:pPr indent="0" marL="0">
+            <a:pPr marL="0" indent="0">
               <a:buNone/>
             </a:pPr>
             <a:r>
@@ -26218,9 +25629,6 @@
               </a:rPr>
               <a:t>❯ </a:t>
             </a:r>
-            <a:pPr indent="0" marL="0">
-              <a:buNone/>
-            </a:pPr>
             <a:r>
               <a:rPr lang="en-US" sz="1350" b="1" dirty="0">
                 <a:solidFill>
@@ -26284,7 +25692,7 @@
           <a:bodyPr wrap="square" lIns="0" tIns="0" rIns="0" bIns="0" rtlCol="0" anchor="ctr"/>
           <a:lstStyle/>
           <a:p>
-            <a:pPr indent="0" marL="0">
+            <a:pPr marL="0" indent="0">
               <a:buNone/>
             </a:pPr>
             <a:r>
@@ -26373,7 +25781,7 @@
           <a:bodyPr wrap="square" lIns="0" tIns="0" rIns="0" bIns="0" rtlCol="0" anchor="ctr"/>
           <a:lstStyle/>
           <a:p>
-            <a:pPr indent="0" marL="0">
+            <a:pPr marL="0" indent="0">
               <a:buNone/>
             </a:pPr>
             <a:r>
@@ -26407,6 +25815,7 @@
         <a:solidFill>
           <a:srgbClr val="F5F3FF"/>
         </a:solidFill>
+        <a:effectLst/>
       </p:bgPr>
     </p:bg>
     <p:spTree>
@@ -26494,7 +25903,7 @@
           <a:bodyPr wrap="square" lIns="0" tIns="0" rIns="0" bIns="0" rtlCol="0" anchor="ctr"/>
           <a:lstStyle/>
           <a:p>
-            <a:pPr indent="0" marL="0">
+            <a:pPr marL="0" indent="0">
               <a:buNone/>
             </a:pPr>
             <a:r>
@@ -26533,7 +25942,7 @@
           <a:bodyPr wrap="square" lIns="0" tIns="0" rIns="0" bIns="0" rtlCol="0" anchor="ctr"/>
           <a:lstStyle/>
           <a:p>
-            <a:pPr indent="0" marL="0">
+            <a:pPr marL="0" indent="0">
               <a:buNone/>
             </a:pPr>
             <a:r>
@@ -26547,9 +25956,6 @@
               </a:rPr>
               <a:t>❯ </a:t>
             </a:r>
-            <a:pPr indent="0" marL="0">
-              <a:buNone/>
-            </a:pPr>
             <a:r>
               <a:rPr lang="en-US" sz="1350" b="1" dirty="0">
                 <a:solidFill>
@@ -26586,7 +25992,7 @@
           <a:bodyPr wrap="square" lIns="0" tIns="0" rIns="0" bIns="0" rtlCol="0" anchor="ctr"/>
           <a:lstStyle/>
           <a:p>
-            <a:pPr indent="0" marL="0">
+            <a:pPr marL="0" indent="0">
               <a:buNone/>
             </a:pPr>
             <a:r>
@@ -26600,9 +26006,6 @@
               </a:rPr>
               <a:t>❯ </a:t>
             </a:r>
-            <a:pPr indent="0" marL="0">
-              <a:buNone/>
-            </a:pPr>
             <a:r>
               <a:rPr lang="en-US" sz="1350" dirty="0">
                 <a:solidFill>
@@ -26639,7 +26042,7 @@
           <a:bodyPr wrap="square" lIns="0" tIns="0" rIns="0" bIns="0" rtlCol="0" anchor="ctr"/>
           <a:lstStyle/>
           <a:p>
-            <a:pPr indent="0" marL="0">
+            <a:pPr marL="0" indent="0">
               <a:buNone/>
             </a:pPr>
             <a:r>
@@ -26653,9 +26056,6 @@
               </a:rPr>
               <a:t>❯ </a:t>
             </a:r>
-            <a:pPr indent="0" marL="0">
-              <a:buNone/>
-            </a:pPr>
             <a:r>
               <a:rPr lang="en-US" sz="1350" dirty="0">
                 <a:solidFill>
@@ -26692,7 +26092,7 @@
           <a:bodyPr wrap="square" lIns="0" tIns="0" rIns="0" bIns="0" rtlCol="0" anchor="ctr"/>
           <a:lstStyle/>
           <a:p>
-            <a:pPr indent="0" marL="0">
+            <a:pPr marL="0" indent="0">
               <a:buNone/>
             </a:pPr>
             <a:r>
@@ -26706,9 +26106,6 @@
               </a:rPr>
               <a:t>❯ </a:t>
             </a:r>
-            <a:pPr indent="0" marL="0">
-              <a:buNone/>
-            </a:pPr>
             <a:r>
               <a:rPr lang="en-US" sz="1350" dirty="0">
                 <a:solidFill>
@@ -26770,7 +26167,7 @@
           <a:bodyPr wrap="square" lIns="0" tIns="0" rIns="0" bIns="0" rtlCol="0" anchor="ctr"/>
           <a:lstStyle/>
           <a:p>
-            <a:pPr indent="0" marL="0">
+            <a:pPr marL="0" indent="0">
               <a:buNone/>
             </a:pPr>
             <a:r>
@@ -26834,7 +26231,7 @@
           <a:bodyPr wrap="square" lIns="0" tIns="0" rIns="0" bIns="0" rtlCol="0" anchor="ctr"/>
           <a:lstStyle/>
           <a:p>
-            <a:pPr indent="0" marL="0">
+            <a:pPr marL="0" indent="0">
               <a:buNone/>
             </a:pPr>
             <a:r>
@@ -26898,7 +26295,7 @@
           <a:bodyPr wrap="square" lIns="0" tIns="0" rIns="0" bIns="0" rtlCol="0" anchor="ctr"/>
           <a:lstStyle/>
           <a:p>
-            <a:pPr indent="0" marL="0">
+            <a:pPr marL="0" indent="0">
               <a:buNone/>
             </a:pPr>
             <a:r>
@@ -26962,7 +26359,7 @@
           <a:bodyPr wrap="square" lIns="0" tIns="0" rIns="0" bIns="0" rtlCol="0" anchor="ctr"/>
           <a:lstStyle/>
           <a:p>
-            <a:pPr indent="0" marL="0">
+            <a:pPr marL="0" indent="0">
               <a:buNone/>
             </a:pPr>
             <a:r>
@@ -27026,7 +26423,7 @@
           <a:bodyPr wrap="square" lIns="0" tIns="0" rIns="0" bIns="0" rtlCol="0" anchor="ctr"/>
           <a:lstStyle/>
           <a:p>
-            <a:pPr indent="0" marL="0">
+            <a:pPr marL="0" indent="0">
               <a:buNone/>
             </a:pPr>
             <a:r>
@@ -27092,7 +26489,7 @@
           <a:bodyPr wrap="square" lIns="0" tIns="0" rIns="0" bIns="0" rtlCol="0" anchor="ctr"/>
           <a:lstStyle/>
           <a:p>
-            <a:pPr indent="0" marL="0">
+            <a:pPr marL="0" indent="0">
               <a:buNone/>
             </a:pPr>
             <a:r>
@@ -27181,7 +26578,7 @@
           <a:bodyPr wrap="square" lIns="0" tIns="0" rIns="0" bIns="0" rtlCol="0" anchor="ctr"/>
           <a:lstStyle/>
           <a:p>
-            <a:pPr indent="0" marL="0">
+            <a:pPr marL="0" indent="0">
               <a:buNone/>
             </a:pPr>
             <a:r>
@@ -27215,6 +26612,7 @@
         <a:solidFill>
           <a:srgbClr val="F5F3FF"/>
         </a:solidFill>
+        <a:effectLst/>
       </p:bgPr>
     </p:bg>
     <p:spTree>
@@ -27302,7 +26700,7 @@
           <a:bodyPr wrap="square" lIns="0" tIns="0" rIns="0" bIns="0" rtlCol="0" anchor="ctr"/>
           <a:lstStyle/>
           <a:p>
-            <a:pPr indent="0" marL="0">
+            <a:pPr marL="0" indent="0">
               <a:buNone/>
             </a:pPr>
             <a:r>
@@ -27341,7 +26739,7 @@
           <a:bodyPr wrap="square" lIns="0" tIns="0" rIns="0" bIns="0" rtlCol="0" anchor="ctr"/>
           <a:lstStyle/>
           <a:p>
-            <a:pPr indent="0" marL="0">
+            <a:pPr marL="0" indent="0">
               <a:buNone/>
             </a:pPr>
             <a:r>
@@ -27355,9 +26753,6 @@
               </a:rPr>
               <a:t>❯ </a:t>
             </a:r>
-            <a:pPr indent="0" marL="0">
-              <a:buNone/>
-            </a:pPr>
             <a:r>
               <a:rPr lang="en-US" sz="1350" b="1" dirty="0">
                 <a:solidFill>
@@ -27394,7 +26789,7 @@
           <a:bodyPr wrap="square" lIns="0" tIns="0" rIns="0" bIns="0" rtlCol="0" anchor="ctr"/>
           <a:lstStyle/>
           <a:p>
-            <a:pPr indent="0" marL="0">
+            <a:pPr marL="0" indent="0">
               <a:buNone/>
             </a:pPr>
             <a:r>
@@ -27408,9 +26803,6 @@
               </a:rPr>
               <a:t>❯ </a:t>
             </a:r>
-            <a:pPr indent="0" marL="0">
-              <a:buNone/>
-            </a:pPr>
             <a:r>
               <a:rPr lang="en-US" sz="1350" b="1" dirty="0">
                 <a:solidFill>
@@ -27472,7 +26864,7 @@
           <a:bodyPr wrap="square" lIns="0" tIns="0" rIns="0" bIns="0" rtlCol="0" anchor="ctr"/>
           <a:lstStyle/>
           <a:p>
-            <a:pPr indent="0" marL="0">
+            <a:pPr marL="0" indent="0">
               <a:buNone/>
             </a:pPr>
             <a:r>
@@ -27536,7 +26928,7 @@
           <a:bodyPr wrap="square" lIns="0" tIns="0" rIns="0" bIns="0" rtlCol="0" anchor="ctr"/>
           <a:lstStyle/>
           <a:p>
-            <a:pPr indent="0" marL="0">
+            <a:pPr marL="0" indent="0">
               <a:buNone/>
             </a:pPr>
             <a:r>
@@ -27600,7 +26992,7 @@
           <a:bodyPr wrap="square" lIns="0" tIns="0" rIns="0" bIns="0" rtlCol="0" anchor="ctr"/>
           <a:lstStyle/>
           <a:p>
-            <a:pPr indent="0" marL="0">
+            <a:pPr marL="0" indent="0">
               <a:buNone/>
             </a:pPr>
             <a:r>
@@ -27664,7 +27056,7 @@
           <a:bodyPr wrap="square" lIns="0" tIns="0" rIns="0" bIns="0" rtlCol="0" anchor="ctr"/>
           <a:lstStyle/>
           <a:p>
-            <a:pPr indent="0" marL="0">
+            <a:pPr marL="0" indent="0">
               <a:buNone/>
             </a:pPr>
             <a:r>
@@ -27728,7 +27120,7 @@
           <a:bodyPr wrap="square" lIns="0" tIns="0" rIns="0" bIns="0" rtlCol="0" anchor="ctr"/>
           <a:lstStyle/>
           <a:p>
-            <a:pPr indent="0" marL="0">
+            <a:pPr marL="0" indent="0">
               <a:buNone/>
             </a:pPr>
             <a:r>
@@ -27792,7 +27184,7 @@
           <a:bodyPr wrap="square" lIns="0" tIns="0" rIns="0" bIns="0" rtlCol="0" anchor="ctr"/>
           <a:lstStyle/>
           <a:p>
-            <a:pPr indent="0" marL="0">
+            <a:pPr marL="0" indent="0">
               <a:buNone/>
             </a:pPr>
             <a:r>
@@ -27856,7 +27248,7 @@
           <a:bodyPr wrap="square" lIns="0" tIns="0" rIns="0" bIns="0" rtlCol="0" anchor="ctr"/>
           <a:lstStyle/>
           <a:p>
-            <a:pPr indent="0" marL="0">
+            <a:pPr marL="0" indent="0">
               <a:buNone/>
             </a:pPr>
             <a:r>
@@ -27920,7 +27312,7 @@
           <a:bodyPr wrap="square" lIns="0" tIns="0" rIns="0" bIns="0" rtlCol="0" anchor="ctr"/>
           <a:lstStyle/>
           <a:p>
-            <a:pPr indent="0" marL="0">
+            <a:pPr marL="0" indent="0">
               <a:buNone/>
             </a:pPr>
             <a:r>
@@ -27984,7 +27376,7 @@
           <a:bodyPr wrap="square" lIns="0" tIns="0" rIns="0" bIns="0" rtlCol="0" anchor="ctr"/>
           <a:lstStyle/>
           <a:p>
-            <a:pPr indent="0" marL="0">
+            <a:pPr marL="0" indent="0">
               <a:buNone/>
             </a:pPr>
             <a:r>
@@ -28048,7 +27440,7 @@
           <a:bodyPr wrap="square" lIns="0" tIns="0" rIns="0" bIns="0" rtlCol="0" anchor="ctr"/>
           <a:lstStyle/>
           <a:p>
-            <a:pPr indent="0" marL="0">
+            <a:pPr marL="0" indent="0">
               <a:buNone/>
             </a:pPr>
             <a:r>
@@ -28112,7 +27504,7 @@
           <a:bodyPr wrap="square" lIns="0" tIns="0" rIns="0" bIns="0" rtlCol="0" anchor="ctr"/>
           <a:lstStyle/>
           <a:p>
-            <a:pPr indent="0" marL="0">
+            <a:pPr marL="0" indent="0">
               <a:buNone/>
             </a:pPr>
             <a:r>
@@ -28201,7 +27593,7 @@
           <a:bodyPr wrap="square" lIns="0" tIns="0" rIns="0" bIns="0" rtlCol="0" anchor="ctr"/>
           <a:lstStyle/>
           <a:p>
-            <a:pPr indent="0" marL="0">
+            <a:pPr marL="0" indent="0">
               <a:buNone/>
             </a:pPr>
             <a:r>
@@ -28235,6 +27627,7 @@
         <a:solidFill>
           <a:srgbClr val="F5F3FF"/>
         </a:solidFill>
+        <a:effectLst/>
       </p:bgPr>
     </p:bg>
     <p:spTree>
@@ -28322,7 +27715,7 @@
           <a:bodyPr wrap="square" lIns="0" tIns="0" rIns="0" bIns="0" rtlCol="0" anchor="ctr"/>
           <a:lstStyle/>
           <a:p>
-            <a:pPr indent="0" marL="0">
+            <a:pPr marL="0" indent="0">
               <a:buNone/>
             </a:pPr>
             <a:r>
@@ -28361,7 +27754,7 @@
           <a:bodyPr wrap="square" lIns="0" tIns="0" rIns="0" bIns="0" rtlCol="0" anchor="ctr"/>
           <a:lstStyle/>
           <a:p>
-            <a:pPr indent="0" marL="0">
+            <a:pPr marL="0" indent="0">
               <a:buNone/>
             </a:pPr>
             <a:r>
@@ -28375,9 +27768,6 @@
               </a:rPr>
               <a:t>❯ </a:t>
             </a:r>
-            <a:pPr indent="0" marL="0">
-              <a:buNone/>
-            </a:pPr>
             <a:r>
               <a:rPr lang="en-US" sz="1350" b="1" dirty="0">
                 <a:solidFill>
@@ -28414,7 +27804,7 @@
           <a:bodyPr wrap="square" lIns="0" tIns="0" rIns="0" bIns="0" rtlCol="0" anchor="ctr"/>
           <a:lstStyle/>
           <a:p>
-            <a:pPr indent="0" marL="0">
+            <a:pPr marL="0" indent="0">
               <a:buNone/>
             </a:pPr>
             <a:r>
@@ -28428,9 +27818,6 @@
               </a:rPr>
               <a:t>❯ </a:t>
             </a:r>
-            <a:pPr indent="0" marL="0">
-              <a:buNone/>
-            </a:pPr>
             <a:r>
               <a:rPr lang="en-US" sz="1350" b="1" dirty="0">
                 <a:solidFill>
@@ -28492,7 +27879,7 @@
           <a:bodyPr wrap="square" lIns="0" tIns="0" rIns="0" bIns="0" rtlCol="0" anchor="ctr"/>
           <a:lstStyle/>
           <a:p>
-            <a:pPr indent="0" marL="0">
+            <a:pPr marL="0" indent="0">
               <a:buNone/>
             </a:pPr>
             <a:r>
@@ -28556,7 +27943,7 @@
           <a:bodyPr wrap="square" lIns="0" tIns="0" rIns="0" bIns="0" rtlCol="0" anchor="ctr"/>
           <a:lstStyle/>
           <a:p>
-            <a:pPr indent="0" marL="0">
+            <a:pPr marL="0" indent="0">
               <a:buNone/>
             </a:pPr>
             <a:r>
@@ -28620,7 +28007,7 @@
           <a:bodyPr wrap="square" lIns="0" tIns="0" rIns="0" bIns="0" rtlCol="0" anchor="ctr"/>
           <a:lstStyle/>
           <a:p>
-            <a:pPr indent="0" marL="0">
+            <a:pPr marL="0" indent="0">
               <a:buNone/>
             </a:pPr>
             <a:r>
@@ -28684,7 +28071,7 @@
           <a:bodyPr wrap="square" lIns="0" tIns="0" rIns="0" bIns="0" rtlCol="0" anchor="ctr"/>
           <a:lstStyle/>
           <a:p>
-            <a:pPr indent="0" marL="0">
+            <a:pPr marL="0" indent="0">
               <a:buNone/>
             </a:pPr>
             <a:r>
@@ -28748,7 +28135,7 @@
           <a:bodyPr wrap="square" lIns="0" tIns="0" rIns="0" bIns="0" rtlCol="0" anchor="ctr"/>
           <a:lstStyle/>
           <a:p>
-            <a:pPr indent="0" marL="0">
+            <a:pPr marL="0" indent="0">
               <a:buNone/>
             </a:pPr>
             <a:r>
@@ -28812,7 +28199,7 @@
           <a:bodyPr wrap="square" lIns="0" tIns="0" rIns="0" bIns="0" rtlCol="0" anchor="ctr"/>
           <a:lstStyle/>
           <a:p>
-            <a:pPr indent="0" marL="0">
+            <a:pPr marL="0" indent="0">
               <a:buNone/>
             </a:pPr>
             <a:r>
@@ -28876,7 +28263,7 @@
           <a:bodyPr wrap="square" lIns="0" tIns="0" rIns="0" bIns="0" rtlCol="0" anchor="ctr"/>
           <a:lstStyle/>
           <a:p>
-            <a:pPr indent="0" marL="0">
+            <a:pPr marL="0" indent="0">
               <a:buNone/>
             </a:pPr>
             <a:r>
@@ -28915,7 +28302,7 @@
           <a:bodyPr wrap="square" lIns="0" tIns="0" rIns="0" bIns="0" rtlCol="0" anchor="ctr"/>
           <a:lstStyle/>
           <a:p>
-            <a:pPr indent="0" marL="0">
+            <a:pPr marL="0" indent="0">
               <a:buNone/>
             </a:pPr>
             <a:r>
@@ -28929,9 +28316,6 @@
               </a:rPr>
               <a:t>❯ </a:t>
             </a:r>
-            <a:pPr indent="0" marL="0">
-              <a:buNone/>
-            </a:pPr>
             <a:r>
               <a:rPr lang="en-US" sz="1350" dirty="0">
                 <a:solidFill>
@@ -28993,7 +28377,7 @@
           <a:bodyPr wrap="square" lIns="0" tIns="0" rIns="0" bIns="0" rtlCol="0" anchor="ctr"/>
           <a:lstStyle/>
           <a:p>
-            <a:pPr indent="0" marL="0">
+            <a:pPr marL="0" indent="0">
               <a:buNone/>
             </a:pPr>
             <a:r>
@@ -29057,7 +28441,7 @@
           <a:bodyPr wrap="square" lIns="0" tIns="0" rIns="0" bIns="0" rtlCol="0" anchor="ctr"/>
           <a:lstStyle/>
           <a:p>
-            <a:pPr indent="0" marL="0">
+            <a:pPr marL="0" indent="0">
               <a:buNone/>
             </a:pPr>
             <a:r>
@@ -29123,7 +28507,7 @@
           <a:bodyPr wrap="square" lIns="0" tIns="0" rIns="0" bIns="0" rtlCol="0" anchor="ctr"/>
           <a:lstStyle/>
           <a:p>
-            <a:pPr indent="0" marL="0">
+            <a:pPr marL="0" indent="0">
               <a:buNone/>
             </a:pPr>
             <a:r>
@@ -29212,7 +28596,7 @@
           <a:bodyPr wrap="square" lIns="0" tIns="0" rIns="0" bIns="0" rtlCol="0" anchor="ctr"/>
           <a:lstStyle/>
           <a:p>
-            <a:pPr indent="0" marL="0">
+            <a:pPr marL="0" indent="0">
               <a:buNone/>
             </a:pPr>
             <a:r>
@@ -29246,6 +28630,7 @@
         <a:solidFill>
           <a:srgbClr val="12091E"/>
         </a:solidFill>
+        <a:effectLst/>
       </p:bgPr>
     </p:bg>
     <p:spTree>
@@ -29360,7 +28745,7 @@
           <a:bodyPr wrap="square" rtlCol="0" anchor="ctr"/>
           <a:lstStyle/>
           <a:p>
-            <a:pPr indent="0" marL="0">
+            <a:pPr marL="0" indent="0">
               <a:buNone/>
             </a:pPr>
             <a:r>
@@ -29399,7 +28784,7 @@
           <a:bodyPr wrap="square" rtlCol="0" anchor="ctr"/>
           <a:lstStyle/>
           <a:p>
-            <a:pPr indent="0" marL="0">
+            <a:pPr marL="0" indent="0">
               <a:buNone/>
             </a:pPr>
             <a:r>
@@ -29463,7 +28848,7 @@
           <a:bodyPr wrap="square" lIns="0" tIns="0" rIns="0" bIns="0" rtlCol="0" anchor="ctr"/>
           <a:lstStyle/>
           <a:p>
-            <a:pPr indent="0" marL="0">
+            <a:pPr marL="0" indent="0">
               <a:buNone/>
             </a:pPr>
             <a:r>
@@ -29527,7 +28912,7 @@
           <a:bodyPr wrap="square" lIns="0" tIns="0" rIns="0" bIns="0" rtlCol="0" anchor="ctr"/>
           <a:lstStyle/>
           <a:p>
-            <a:pPr indent="0" marL="0">
+            <a:pPr marL="0" indent="0">
               <a:buNone/>
             </a:pPr>
             <a:r>
@@ -29591,7 +28976,7 @@
           <a:bodyPr wrap="square" lIns="0" tIns="0" rIns="0" bIns="0" rtlCol="0" anchor="ctr"/>
           <a:lstStyle/>
           <a:p>
-            <a:pPr indent="0" marL="0">
+            <a:pPr marL="0" indent="0">
               <a:buNone/>
             </a:pPr>
             <a:r>
@@ -29655,7 +29040,7 @@
           <a:bodyPr wrap="square" lIns="0" tIns="0" rIns="0" bIns="0" rtlCol="0" anchor="ctr"/>
           <a:lstStyle/>
           <a:p>
-            <a:pPr indent="0" marL="0">
+            <a:pPr marL="0" indent="0">
               <a:buNone/>
             </a:pPr>
             <a:r>
@@ -29719,7 +29104,7 @@
           <a:bodyPr wrap="square" lIns="0" tIns="0" rIns="0" bIns="0" rtlCol="0" anchor="ctr"/>
           <a:lstStyle/>
           <a:p>
-            <a:pPr indent="0" marL="0">
+            <a:pPr marL="0" indent="0">
               <a:buNone/>
             </a:pPr>
             <a:r>
@@ -29783,7 +29168,7 @@
           <a:bodyPr wrap="square" lIns="0" tIns="0" rIns="0" bIns="0" rtlCol="0" anchor="ctr"/>
           <a:lstStyle/>
           <a:p>
-            <a:pPr indent="0" marL="0">
+            <a:pPr marL="0" indent="0">
               <a:buNone/>
             </a:pPr>
             <a:r>
@@ -29847,7 +29232,7 @@
           <a:bodyPr wrap="square" lIns="0" tIns="0" rIns="0" bIns="0" rtlCol="0" anchor="ctr"/>
           <a:lstStyle/>
           <a:p>
-            <a:pPr indent="0" marL="0">
+            <a:pPr marL="0" indent="0">
               <a:buNone/>
             </a:pPr>
             <a:r>
@@ -29911,7 +29296,7 @@
           <a:bodyPr wrap="square" lIns="0" tIns="0" rIns="0" bIns="0" rtlCol="0" anchor="ctr"/>
           <a:lstStyle/>
           <a:p>
-            <a:pPr algn="ctr" indent="0" marL="0">
+            <a:pPr marL="0" indent="0" algn="ctr">
               <a:buNone/>
             </a:pPr>
             <a:r>
@@ -29945,6 +29330,7 @@
         <a:solidFill>
           <a:srgbClr val="F5F3FF"/>
         </a:solidFill>
+        <a:effectLst/>
       </p:bgPr>
     </p:bg>
     <p:spTree>
@@ -30032,7 +29418,7 @@
           <a:bodyPr wrap="square" lIns="0" tIns="0" rIns="0" bIns="0" rtlCol="0" anchor="ctr"/>
           <a:lstStyle/>
           <a:p>
-            <a:pPr indent="0" marL="0">
+            <a:pPr marL="0" indent="0">
               <a:buNone/>
             </a:pPr>
             <a:r>
@@ -30071,7 +29457,7 @@
           <a:bodyPr wrap="square" lIns="0" tIns="0" rIns="0" bIns="0" rtlCol="0" anchor="ctr"/>
           <a:lstStyle/>
           <a:p>
-            <a:pPr indent="0" marL="0">
+            <a:pPr marL="0" indent="0">
               <a:buNone/>
             </a:pPr>
             <a:r>
@@ -30098,7 +29484,7 @@
         <p:spPr>
           <a:xfrm>
             <a:off x="219456" y="1444752"/>
-            <a:ext cx="8705088" cy="2331720"/>
+            <a:ext cx="8705088" cy="2953512"/>
           </a:xfrm>
           <a:prstGeom prst="rect">
             <a:avLst/>
@@ -30113,7 +29499,7 @@
             <a:prstDash val="solid"/>
           </a:ln>
           <a:effectLst>
-            <a:outerShdw sx="100000" sy="100000" kx="0" ky="0" algn="bl" rotWithShape="0" blurRad="101600" dist="38100" dir="8100000">
+            <a:outerShdw blurRad="101600" dist="38100" dir="8100000" algn="bl" rotWithShape="0">
               <a:srgbClr val="000000">
                 <a:alpha val="20000"/>
               </a:srgbClr>
@@ -30155,7 +29541,7 @@
         <p:spPr>
           <a:xfrm>
             <a:off x="475488" y="1572768"/>
-            <a:ext cx="8339328" cy="2103120"/>
+            <a:ext cx="8339328" cy="3364992"/>
           </a:xfrm>
           <a:prstGeom prst="rect">
             <a:avLst/>
@@ -30167,7 +29553,7 @@
           <a:bodyPr wrap="square" lIns="0" tIns="0" rIns="0" bIns="0" rtlCol="0" anchor="t"/>
           <a:lstStyle/>
           <a:p>
-            <a:pPr indent="0" marL="0">
+            <a:pPr marL="0" indent="0">
               <a:buNone/>
             </a:pPr>
             <a:r>
@@ -30184,7 +29570,7 @@
             <a:endParaRPr lang="en-US" sz="1300" dirty="0"/>
           </a:p>
           <a:p>
-            <a:pPr indent="0" marL="0">
+            <a:pPr marL="0" indent="0">
               <a:buNone/>
             </a:pPr>
             <a:r>
@@ -30201,7 +29587,7 @@
             <a:endParaRPr lang="en-US" sz="1300" dirty="0"/>
           </a:p>
           <a:p>
-            <a:pPr indent="0" marL="0">
+            <a:pPr marL="0" indent="0">
               <a:buNone/>
             </a:pPr>
             <a:r>
@@ -30218,7 +29604,7 @@
             <a:endParaRPr lang="en-US" sz="1300" dirty="0"/>
           </a:p>
           <a:p>
-            <a:pPr indent="0" marL="0">
+            <a:pPr marL="0" indent="0">
               <a:buNone/>
             </a:pPr>
             <a:r>
@@ -30235,7 +29621,7 @@
             <a:endParaRPr lang="en-US" sz="1300" dirty="0"/>
           </a:p>
           <a:p>
-            <a:pPr indent="0" marL="0">
+            <a:pPr marL="0" indent="0">
               <a:buNone/>
             </a:pPr>
             <a:r>
@@ -30252,7 +29638,7 @@
             <a:endParaRPr lang="en-US" sz="1300" dirty="0"/>
           </a:p>
           <a:p>
-            <a:pPr indent="0" marL="0">
+            <a:pPr marL="0" indent="0">
               <a:buNone/>
             </a:pPr>
             <a:r>
@@ -30269,13 +29655,13 @@
             <a:endParaRPr lang="en-US" sz="1300" dirty="0"/>
           </a:p>
           <a:p>
-            <a:pPr indent="0" marL="0">
+            <a:pPr marL="0" indent="0">
               <a:buNone/>
             </a:pPr>
             <a:endParaRPr lang="en-US" sz="1300" dirty="0"/>
           </a:p>
           <a:p>
-            <a:pPr indent="0" marL="0">
+            <a:pPr marL="0" indent="0">
               <a:buNone/>
             </a:pPr>
             <a:r>
@@ -30292,7 +29678,7 @@
             <a:endParaRPr lang="en-US" sz="1300" dirty="0"/>
           </a:p>
           <a:p>
-            <a:pPr indent="0" marL="0">
+            <a:pPr marL="0" indent="0">
               <a:buNone/>
             </a:pPr>
             <a:r>
@@ -30309,7 +29695,7 @@
             <a:endParaRPr lang="en-US" sz="1300" dirty="0"/>
           </a:p>
           <a:p>
-            <a:pPr indent="0" marL="0">
+            <a:pPr marL="0" indent="0">
               <a:buNone/>
             </a:pPr>
             <a:r>
@@ -30326,7 +29712,7 @@
             <a:endParaRPr lang="en-US" sz="1300" dirty="0"/>
           </a:p>
           <a:p>
-            <a:pPr indent="0" marL="0">
+            <a:pPr marL="0" indent="0">
               <a:buNone/>
             </a:pPr>
             <a:r>
@@ -30343,7 +29729,7 @@
             <a:endParaRPr lang="en-US" sz="1300" dirty="0"/>
           </a:p>
           <a:p>
-            <a:pPr indent="0" marL="0">
+            <a:pPr marL="0" indent="0">
               <a:buNone/>
             </a:pPr>
             <a:r>
@@ -30360,7 +29746,7 @@
             <a:endParaRPr lang="en-US" sz="1300" dirty="0"/>
           </a:p>
           <a:p>
-            <a:pPr indent="0" marL="0">
+            <a:pPr marL="0" indent="0">
               <a:buNone/>
             </a:pPr>
             <a:r>
@@ -30372,95 +29758,27 @@
                 <a:ea typeface="Courier New" pitchFamily="34" charset="-122"/>
                 <a:cs typeface="Courier New" pitchFamily="34" charset="-120"/>
               </a:rPr>
-              <a:t>    case 3 -&gt; "Quarta";</a:t>
+              <a:t>    case 3 -&gt; "Quarta"; default -&gt; "Dia inválido";</a:t>
             </a:r>
             <a:endParaRPr lang="en-US" sz="1300" dirty="0"/>
           </a:p>
           <a:p>
-            <a:pPr indent="0" marL="0">
+            <a:pPr marL="0" indent="0">
               <a:buNone/>
             </a:pPr>
             <a:r>
               <a:rPr lang="en-US" sz="1300" dirty="0">
                 <a:solidFill>
-                  <a:srgbClr val="FDE68A"/>
+                  <a:srgbClr val="FFFFFF"/>
                 </a:solidFill>
                 <a:latin typeface="Courier New" pitchFamily="34" charset="0"/>
                 <a:ea typeface="Courier New" pitchFamily="34" charset="-122"/>
                 <a:cs typeface="Courier New" pitchFamily="34" charset="-120"/>
               </a:rPr>
-              <a:t>    case 4 -&gt; "Quinta";</a:t>
+              <a:t>};</a:t>
             </a:r>
             <a:endParaRPr lang="en-US" sz="1300" dirty="0"/>
           </a:p>
-          <a:p>
-            <a:pPr indent="0" marL="0">
-              <a:buNone/>
-            </a:pPr>
-            <a:r>
-              <a:rPr lang="en-US" sz="1300" dirty="0">
-                <a:solidFill>
-                  <a:srgbClr val="FDE68A"/>
-                </a:solidFill>
-                <a:latin typeface="Courier New" pitchFamily="34" charset="0"/>
-                <a:ea typeface="Courier New" pitchFamily="34" charset="-122"/>
-                <a:cs typeface="Courier New" pitchFamily="34" charset="-120"/>
-              </a:rPr>
-              <a:t>    case 5 -&gt; "Sexta";</a:t>
-            </a:r>
-            <a:endParaRPr lang="en-US" sz="1300" dirty="0"/>
-          </a:p>
-          <a:p>
-            <a:pPr indent="0" marL="0">
-              <a:buNone/>
-            </a:pPr>
-            <a:r>
-              <a:rPr lang="en-US" sz="1300" dirty="0">
-                <a:solidFill>
-                  <a:srgbClr val="FDE68A"/>
-                </a:solidFill>
-                <a:latin typeface="Courier New" pitchFamily="34" charset="0"/>
-                <a:ea typeface="Courier New" pitchFamily="34" charset="-122"/>
-                <a:cs typeface="Courier New" pitchFamily="34" charset="-120"/>
-              </a:rPr>
-              <a:t>    case 6 -&gt; "Sábado";</a:t>
-            </a:r>
-            <a:endParaRPr lang="en-US" sz="1300" dirty="0"/>
-          </a:p>
-          <a:p>
-            <a:pPr indent="0" marL="0">
-              <a:buNone/>
-            </a:pPr>
-            <a:r>
-              <a:rPr lang="en-US" sz="1300" dirty="0">
-                <a:solidFill>
-                  <a:srgbClr val="FDE68A"/>
-                </a:solidFill>
-                <a:latin typeface="Courier New" pitchFamily="34" charset="0"/>
-                <a:ea typeface="Courier New" pitchFamily="34" charset="-122"/>
-                <a:cs typeface="Courier New" pitchFamily="34" charset="-120"/>
-              </a:rPr>
-              <a:t>    default -&gt; "Dia inválido";</a:t>
-            </a:r>
-            <a:endParaRPr lang="en-US" sz="1300" dirty="0"/>
-          </a:p>
-          <a:p>
-            <a:pPr indent="0" marL="0">
-              <a:buNone/>
-            </a:pPr>
-            <a:r>
-              <a:rPr lang="en-US" sz="1300" dirty="0">
-                <a:solidFill>
-                  <a:srgbClr val="FFFFFF"/>
-                </a:solidFill>
-                <a:latin typeface="Courier New" pitchFamily="34" charset="0"/>
-                <a:ea typeface="Courier New" pitchFamily="34" charset="-122"/>
-                <a:cs typeface="Courier New" pitchFamily="34" charset="-120"/>
-              </a:rPr>
-              <a:t>};</a:t>
-            </a:r>
-            <a:endParaRPr lang="en-US" sz="1300" dirty="0"/>
-          </a:p>
         </p:txBody>
       </p:sp>
       <p:sp>
@@ -30471,8 +29789,8 @@
         </p:nvSpPr>
         <p:spPr>
           <a:xfrm>
-            <a:off x="219456" y="3922776"/>
-            <a:ext cx="8705088" cy="676656"/>
+            <a:off x="196596" y="4480560"/>
+            <a:ext cx="8705088" cy="370332"/>
           </a:xfrm>
           <a:prstGeom prst="rect">
             <a:avLst/>
@@ -30498,7 +29816,7 @@
         </p:nvSpPr>
         <p:spPr>
           <a:xfrm>
-            <a:off x="402336" y="3995928"/>
+            <a:off x="342900" y="4418838"/>
             <a:ext cx="8458200" cy="530352"/>
           </a:xfrm>
           <a:prstGeom prst="rect">
@@ -30511,7 +29829,7 @@
           <a:bodyPr wrap="square" lIns="0" tIns="0" rIns="0" bIns="0" rtlCol="0" anchor="ctr"/>
           <a:lstStyle/>
           <a:p>
-            <a:pPr indent="0" marL="0">
+            <a:pPr marL="0" indent="0">
               <a:buNone/>
             </a:pPr>
             <a:r>
@@ -30537,7 +29855,7 @@
         </p:nvSpPr>
         <p:spPr>
           <a:xfrm>
-            <a:off x="0" y="4919472"/>
+            <a:off x="73152" y="4919472"/>
             <a:ext cx="9144000" cy="224028"/>
           </a:xfrm>
           <a:prstGeom prst="rect">
@@ -30600,7 +29918,7 @@
           <a:bodyPr wrap="square" lIns="0" tIns="0" rIns="0" bIns="0" rtlCol="0" anchor="ctr"/>
           <a:lstStyle/>
           <a:p>
-            <a:pPr indent="0" marL="0">
+            <a:pPr marL="0" indent="0">
               <a:buNone/>
             </a:pPr>
             <a:r>
@@ -30634,6 +29952,7 @@
         <a:solidFill>
           <a:srgbClr val="F5F3FF"/>
         </a:solidFill>
+        <a:effectLst/>
       </p:bgPr>
     </p:bg>
     <p:spTree>
@@ -30721,7 +30040,7 @@
           <a:bodyPr wrap="square" lIns="0" tIns="0" rIns="0" bIns="0" rtlCol="0" anchor="ctr"/>
           <a:lstStyle/>
           <a:p>
-            <a:pPr indent="0" marL="0">
+            <a:pPr marL="0" indent="0">
               <a:buNone/>
             </a:pPr>
             <a:r>
@@ -30760,7 +30079,7 @@
           <a:bodyPr wrap="square" lIns="0" tIns="0" rIns="0" bIns="0" rtlCol="0" anchor="ctr"/>
           <a:lstStyle/>
           <a:p>
-            <a:pPr indent="0" marL="0">
+            <a:pPr marL="0" indent="0">
               <a:buNone/>
             </a:pPr>
             <a:r>
@@ -30774,9 +30093,6 @@
               </a:rPr>
               <a:t>❯ </a:t>
             </a:r>
-            <a:pPr indent="0" marL="0">
-              <a:buNone/>
-            </a:pPr>
             <a:r>
               <a:rPr lang="en-US" sz="1350" b="1" dirty="0">
                 <a:solidFill>
@@ -30838,7 +30154,7 @@
           <a:bodyPr wrap="square" lIns="0" tIns="0" rIns="0" bIns="0" rtlCol="0" anchor="ctr"/>
           <a:lstStyle/>
           <a:p>
-            <a:pPr indent="0" marL="0">
+            <a:pPr marL="0" indent="0">
               <a:buNone/>
             </a:pPr>
             <a:r>
@@ -30902,7 +30218,7 @@
           <a:bodyPr wrap="square" lIns="0" tIns="0" rIns="0" bIns="0" rtlCol="0" anchor="ctr"/>
           <a:lstStyle/>
           <a:p>
-            <a:pPr indent="0" marL="0">
+            <a:pPr marL="0" indent="0">
               <a:buNone/>
             </a:pPr>
             <a:r>
@@ -30966,7 +30282,7 @@
           <a:bodyPr wrap="square" lIns="0" tIns="0" rIns="0" bIns="0" rtlCol="0" anchor="ctr"/>
           <a:lstStyle/>
           <a:p>
-            <a:pPr indent="0" marL="0">
+            <a:pPr marL="0" indent="0">
               <a:buNone/>
             </a:pPr>
             <a:r>
@@ -31030,7 +30346,7 @@
           <a:bodyPr wrap="square" lIns="0" tIns="0" rIns="0" bIns="0" rtlCol="0" anchor="ctr"/>
           <a:lstStyle/>
           <a:p>
-            <a:pPr indent="0" marL="0">
+            <a:pPr marL="0" indent="0">
               <a:buNone/>
             </a:pPr>
             <a:r>
@@ -31094,7 +30410,7 @@
           <a:bodyPr wrap="square" lIns="0" tIns="0" rIns="0" bIns="0" rtlCol="0" anchor="ctr"/>
           <a:lstStyle/>
           <a:p>
-            <a:pPr indent="0" marL="0">
+            <a:pPr marL="0" indent="0">
               <a:buNone/>
             </a:pPr>
             <a:r>
@@ -31158,7 +30474,7 @@
           <a:bodyPr wrap="square" lIns="0" tIns="0" rIns="0" bIns="0" rtlCol="0" anchor="ctr"/>
           <a:lstStyle/>
           <a:p>
-            <a:pPr indent="0" marL="0">
+            <a:pPr marL="0" indent="0">
               <a:buNone/>
             </a:pPr>
             <a:r>
@@ -31222,7 +30538,7 @@
           <a:bodyPr wrap="square" lIns="0" tIns="0" rIns="0" bIns="0" rtlCol="0" anchor="ctr"/>
           <a:lstStyle/>
           <a:p>
-            <a:pPr indent="0" marL="0">
+            <a:pPr marL="0" indent="0">
               <a:buNone/>
             </a:pPr>
             <a:r>
@@ -31286,7 +30602,7 @@
           <a:bodyPr wrap="square" lIns="0" tIns="0" rIns="0" bIns="0" rtlCol="0" anchor="ctr"/>
           <a:lstStyle/>
           <a:p>
-            <a:pPr indent="0" marL="0">
+            <a:pPr marL="0" indent="0">
               <a:buNone/>
             </a:pPr>
             <a:r>
@@ -31350,7 +30666,7 @@
           <a:bodyPr wrap="square" lIns="0" tIns="0" rIns="0" bIns="0" rtlCol="0" anchor="ctr"/>
           <a:lstStyle/>
           <a:p>
-            <a:pPr indent="0" marL="0">
+            <a:pPr marL="0" indent="0">
               <a:buNone/>
             </a:pPr>
             <a:r>
@@ -31416,7 +30732,7 @@
           <a:bodyPr wrap="square" lIns="0" tIns="0" rIns="0" bIns="0" rtlCol="0" anchor="ctr"/>
           <a:lstStyle/>
           <a:p>
-            <a:pPr indent="0" marL="0">
+            <a:pPr marL="0" indent="0">
               <a:buNone/>
             </a:pPr>
             <a:r>
@@ -31433,31 +30749,6 @@
             <a:endParaRPr lang="en-US" sz="1400" dirty="0"/>
           </a:p>
         </p:txBody>
-      </p:sp>
-      <p:sp>
-        <p:nvSpPr>
-          <p:cNvPr id="26" name="Shape 24"/>
-          <p:cNvSpPr/>
-          <p:nvPr/>
-        </p:nvSpPr>
-        <p:spPr>
-          <a:xfrm>
-            <a:off x="0" y="4919472"/>
-            <a:ext cx="9144000" cy="224028"/>
-          </a:xfrm>
-          <a:prstGeom prst="rect">
-            <a:avLst/>
-          </a:prstGeom>
-          <a:solidFill>
-            <a:srgbClr val="12091E"/>
-          </a:solidFill>
-          <a:ln w="12700">
-            <a:solidFill>
-              <a:srgbClr val="12091E"/>
-            </a:solidFill>
-            <a:prstDash val="solid"/>
-          </a:ln>
-        </p:spPr>
       </p:sp>
       <p:sp>
         <p:nvSpPr>
@@ -31483,45 +30774,6 @@
             <a:prstDash val="solid"/>
           </a:ln>
         </p:spPr>
-      </p:sp>
-      <p:sp>
-        <p:nvSpPr>
-          <p:cNvPr id="28" name="Text 26"/>
-          <p:cNvSpPr/>
-          <p:nvPr/>
-        </p:nvSpPr>
-        <p:spPr>
-          <a:xfrm>
-            <a:off x="274320" y="4937760"/>
-            <a:ext cx="5486400" cy="182880"/>
-          </a:xfrm>
-          <a:prstGeom prst="rect">
-            <a:avLst/>
-          </a:prstGeom>
-          <a:noFill/>
-          <a:ln/>
-        </p:spPr>
-        <p:txBody>
-          <a:bodyPr wrap="square" lIns="0" tIns="0" rIns="0" bIns="0" rtlCol="0" anchor="ctr"/>
-          <a:lstStyle/>
-          <a:p>
-            <a:pPr indent="0" marL="0">
-              <a:buNone/>
-            </a:pPr>
-            <a:r>
-              <a:rPr lang="en-US" sz="900" dirty="0">
-                <a:solidFill>
-                  <a:srgbClr val="CBD5E1"/>
-                </a:solidFill>
-                <a:latin typeface="Calibri" pitchFamily="34" charset="0"/>
-                <a:ea typeface="Calibri" pitchFamily="34" charset="-122"/>
-                <a:cs typeface="Calibri" pitchFamily="34" charset="-120"/>
-              </a:rPr>
-              <a:t>Controle de Fluxo em Java</a:t>
-            </a:r>
-            <a:endParaRPr lang="en-US" sz="900" dirty="0"/>
-          </a:p>
-        </p:txBody>
       </p:sp>
     </p:spTree>
   </p:cSld>
@@ -31539,6 +30791,7 @@
         <a:solidFill>
           <a:srgbClr val="0C1A2E"/>
         </a:solidFill>
+        <a:effectLst/>
       </p:bgPr>
     </p:bg>
     <p:spTree>
@@ -31651,11 +30904,11 @@
           <a:bodyPr wrap="square" lIns="0" tIns="0" rIns="0" bIns="0" rtlCol="0" anchor="ctr"/>
           <a:lstStyle/>
           <a:p>
-            <a:pPr algn="ctr" indent="0" marL="0">
-              <a:buNone/>
-            </a:pPr>
-            <a:r>
-              <a:rPr lang="en-US" sz="1100" b="1" spc="200" kern="0" dirty="0">
+            <a:pPr marL="0" indent="0" algn="ctr">
+              <a:buNone/>
+            </a:pPr>
+            <a:r>
+              <a:rPr lang="en-US" sz="1100" b="1" kern="0" spc="200" dirty="0">
                 <a:solidFill>
                   <a:srgbClr val="FFFFFF"/>
                 </a:solidFill>
@@ -31690,7 +30943,7 @@
           <a:bodyPr wrap="square" lIns="0" tIns="0" rIns="0" bIns="0" rtlCol="0" anchor="ctr"/>
           <a:lstStyle/>
           <a:p>
-            <a:pPr indent="0" marL="0">
+            <a:pPr marL="0" indent="0">
               <a:buNone/>
             </a:pPr>
             <a:r>
@@ -31729,7 +30982,7 @@
           <a:bodyPr wrap="square" rtlCol="0" anchor="ctr"/>
           <a:lstStyle/>
           <a:p>
-            <a:pPr indent="0" marL="0">
+            <a:pPr marL="0" indent="0">
               <a:buNone/>
             </a:pPr>
             <a:r>
@@ -31795,7 +31048,7 @@
           <a:bodyPr wrap="square" lIns="0" tIns="0" rIns="0" bIns="0" rtlCol="0" anchor="ctr"/>
           <a:lstStyle/>
           <a:p>
-            <a:pPr indent="0" marL="0">
+            <a:pPr marL="0" indent="0">
               <a:buNone/>
             </a:pPr>
             <a:r>
@@ -31809,9 +31062,6 @@
               </a:rPr>
               <a:t>▶ </a:t>
             </a:r>
-            <a:pPr indent="0" marL="0">
-              <a:buNone/>
-            </a:pPr>
             <a:r>
               <a:rPr lang="en-US" sz="1300" b="1" dirty="0">
                 <a:solidFill>
@@ -31848,7 +31098,7 @@
           <a:bodyPr wrap="square" lIns="0" tIns="0" rIns="0" bIns="0" rtlCol="0" anchor="ctr"/>
           <a:lstStyle/>
           <a:p>
-            <a:pPr indent="0" marL="0">
+            <a:pPr marL="0" indent="0">
               <a:buNone/>
             </a:pPr>
             <a:r>
@@ -31862,9 +31112,6 @@
               </a:rPr>
               <a:t>▶ </a:t>
             </a:r>
-            <a:pPr indent="0" marL="0">
-              <a:buNone/>
-            </a:pPr>
             <a:r>
               <a:rPr lang="en-US" sz="1300" dirty="0">
                 <a:solidFill>
@@ -31926,7 +31173,7 @@
           <a:bodyPr wrap="square" lIns="0" tIns="0" rIns="0" bIns="0" rtlCol="0" anchor="ctr"/>
           <a:lstStyle/>
           <a:p>
-            <a:pPr indent="0" marL="0">
+            <a:pPr marL="0" indent="0">
               <a:buNone/>
             </a:pPr>
             <a:r>
@@ -31965,7 +31212,7 @@
           <a:bodyPr wrap="square" lIns="0" tIns="0" rIns="0" bIns="0" rtlCol="0" anchor="ctr"/>
           <a:lstStyle/>
           <a:p>
-            <a:pPr indent="0" marL="0">
+            <a:pPr marL="0" indent="0">
               <a:buNone/>
             </a:pPr>
             <a:r>
@@ -31979,9 +31226,6 @@
               </a:rPr>
               <a:t>▶ </a:t>
             </a:r>
-            <a:pPr indent="0" marL="0">
-              <a:buNone/>
-            </a:pPr>
             <a:r>
               <a:rPr lang="en-US" sz="1300" dirty="0">
                 <a:solidFill>
@@ -32045,7 +31289,7 @@
           <a:bodyPr wrap="square" lIns="0" tIns="0" rIns="0" bIns="0" rtlCol="0" anchor="ctr"/>
           <a:lstStyle/>
           <a:p>
-            <a:pPr indent="0" marL="0">
+            <a:pPr marL="0" indent="0">
               <a:buNone/>
             </a:pPr>
             <a:r>
@@ -32109,7 +31353,7 @@
           <a:bodyPr wrap="square" lIns="0" tIns="0" rIns="0" bIns="0" rtlCol="0" anchor="ctr"/>
           <a:lstStyle/>
           <a:p>
-            <a:pPr indent="0" marL="0">
+            <a:pPr marL="0" indent="0">
               <a:buNone/>
             </a:pPr>
             <a:r>
@@ -32143,6 +31387,7 @@
         <a:solidFill>
           <a:srgbClr val="0C1A2E"/>
         </a:solidFill>
+        <a:effectLst/>
       </p:bgPr>
     </p:bg>
     <p:spTree>
@@ -32255,11 +31500,11 @@
           <a:bodyPr wrap="square" lIns="0" tIns="0" rIns="0" bIns="0" rtlCol="0" anchor="ctr"/>
           <a:lstStyle/>
           <a:p>
-            <a:pPr algn="ctr" indent="0" marL="0">
-              <a:buNone/>
-            </a:pPr>
-            <a:r>
-              <a:rPr lang="en-US" sz="1100" b="1" spc="200" kern="0" dirty="0">
+            <a:pPr marL="0" indent="0" algn="ctr">
+              <a:buNone/>
+            </a:pPr>
+            <a:r>
+              <a:rPr lang="en-US" sz="1100" b="1" kern="0" spc="200" dirty="0">
                 <a:solidFill>
                   <a:srgbClr val="FFFFFF"/>
                 </a:solidFill>
@@ -32294,7 +31539,7 @@
           <a:bodyPr wrap="square" lIns="0" tIns="0" rIns="0" bIns="0" rtlCol="0" anchor="ctr"/>
           <a:lstStyle/>
           <a:p>
-            <a:pPr indent="0" marL="0">
+            <a:pPr marL="0" indent="0">
               <a:buNone/>
             </a:pPr>
             <a:r>
@@ -32333,7 +31578,7 @@
           <a:bodyPr wrap="square" rtlCol="0" anchor="ctr"/>
           <a:lstStyle/>
           <a:p>
-            <a:pPr indent="0" marL="0">
+            <a:pPr marL="0" indent="0">
               <a:buNone/>
             </a:pPr>
             <a:r>
@@ -32399,7 +31644,7 @@
           <a:bodyPr wrap="square" lIns="0" tIns="0" rIns="0" bIns="0" rtlCol="0" anchor="ctr"/>
           <a:lstStyle/>
           <a:p>
-            <a:pPr indent="0" marL="0">
+            <a:pPr marL="0" indent="0">
               <a:buNone/>
             </a:pPr>
             <a:r>
@@ -32413,9 +31658,6 @@
               </a:rPr>
               <a:t>▶ </a:t>
             </a:r>
-            <a:pPr indent="0" marL="0">
-              <a:buNone/>
-            </a:pPr>
             <a:r>
               <a:rPr lang="en-US" sz="1300" b="1" dirty="0">
                 <a:solidFill>
@@ -32452,7 +31694,7 @@
           <a:bodyPr wrap="square" lIns="0" tIns="0" rIns="0" bIns="0" rtlCol="0" anchor="ctr"/>
           <a:lstStyle/>
           <a:p>
-            <a:pPr indent="0" marL="0">
+            <a:pPr marL="0" indent="0">
               <a:buNone/>
             </a:pPr>
             <a:r>
@@ -32466,9 +31708,6 @@
               </a:rPr>
               <a:t>▶ </a:t>
             </a:r>
-            <a:pPr indent="0" marL="0">
-              <a:buNone/>
-            </a:pPr>
             <a:r>
               <a:rPr lang="en-US" sz="1300" dirty="0">
                 <a:solidFill>
@@ -32530,7 +31769,7 @@
           <a:bodyPr wrap="square" lIns="0" tIns="0" rIns="0" bIns="0" rtlCol="0" anchor="ctr"/>
           <a:lstStyle/>
           <a:p>
-            <a:pPr indent="0" marL="0">
+            <a:pPr marL="0" indent="0">
               <a:buNone/>
             </a:pPr>
             <a:r>
@@ -32594,7 +31833,7 @@
           <a:bodyPr wrap="square" lIns="0" tIns="0" rIns="0" bIns="0" rtlCol="0" anchor="ctr"/>
           <a:lstStyle/>
           <a:p>
-            <a:pPr indent="0" marL="0">
+            <a:pPr marL="0" indent="0">
               <a:buNone/>
             </a:pPr>
             <a:r>
@@ -32633,7 +31872,7 @@
           <a:bodyPr wrap="square" lIns="0" tIns="0" rIns="0" bIns="0" rtlCol="0" anchor="ctr"/>
           <a:lstStyle/>
           <a:p>
-            <a:pPr indent="0" marL="0">
+            <a:pPr marL="0" indent="0">
               <a:buNone/>
             </a:pPr>
             <a:r>
@@ -32647,9 +31886,6 @@
               </a:rPr>
               <a:t>▶ </a:t>
             </a:r>
-            <a:pPr indent="0" marL="0">
-              <a:buNone/>
-            </a:pPr>
             <a:r>
               <a:rPr lang="en-US" sz="1300" dirty="0">
                 <a:solidFill>
@@ -32713,7 +31949,7 @@
           <a:bodyPr wrap="square" lIns="0" tIns="0" rIns="0" bIns="0" rtlCol="0" anchor="ctr"/>
           <a:lstStyle/>
           <a:p>
-            <a:pPr indent="0" marL="0">
+            <a:pPr marL="0" indent="0">
               <a:buNone/>
             </a:pPr>
             <a:r>
@@ -32777,7 +32013,7 @@
           <a:bodyPr wrap="square" lIns="0" tIns="0" rIns="0" bIns="0" rtlCol="0" anchor="ctr"/>
           <a:lstStyle/>
           <a:p>
-            <a:pPr indent="0" marL="0">
+            <a:pPr marL="0" indent="0">
               <a:buNone/>
             </a:pPr>
             <a:r>
@@ -32811,6 +32047,7 @@
         <a:solidFill>
           <a:srgbClr val="1A0E2E"/>
         </a:solidFill>
+        <a:effectLst/>
       </p:bgPr>
     </p:bg>
     <p:spTree>
@@ -32900,7 +32137,7 @@
           <a:bodyPr wrap="square" rtlCol="0" anchor="ctr"/>
           <a:lstStyle/>
           <a:p>
-            <a:pPr indent="0" marL="0">
+            <a:pPr marL="0" indent="0">
               <a:buNone/>
             </a:pPr>
             <a:r>
@@ -32939,11 +32176,11 @@
           <a:bodyPr wrap="square" rtlCol="0" anchor="ctr"/>
           <a:lstStyle/>
           <a:p>
-            <a:pPr indent="0" marL="0">
-              <a:buNone/>
-            </a:pPr>
-            <a:r>
-              <a:rPr lang="en-US" sz="1100" b="1" spc="400" kern="0" dirty="0">
+            <a:pPr marL="0" indent="0">
+              <a:buNone/>
+            </a:pPr>
+            <a:r>
+              <a:rPr lang="en-US" sz="1100" b="1" kern="0" spc="400" dirty="0">
                 <a:solidFill>
                   <a:srgbClr val="C4B5FD"/>
                 </a:solidFill>
@@ -32978,7 +32215,7 @@
           <a:bodyPr wrap="square" rtlCol="0" anchor="ctr"/>
           <a:lstStyle/>
           <a:p>
-            <a:pPr indent="0" marL="0">
+            <a:pPr marL="0" indent="0">
               <a:buNone/>
             </a:pPr>
             <a:r>
@@ -33017,7 +32254,7 @@
           <a:bodyPr wrap="square" rtlCol="0" anchor="ctr"/>
           <a:lstStyle/>
           <a:p>
-            <a:pPr indent="0" marL="0">
+            <a:pPr marL="0" indent="0">
               <a:buNone/>
             </a:pPr>
             <a:r>
@@ -33056,7 +32293,7 @@
           <a:bodyPr wrap="square" rtlCol="0" anchor="ctr"/>
           <a:lstStyle/>
           <a:p>
-            <a:pPr indent="0" marL="0">
+            <a:pPr marL="0" indent="0">
               <a:buNone/>
             </a:pPr>
             <a:r>
@@ -33375,4 +32612,299 @@
     </a:ext>
   </a:extLst>
 </a:theme>
+</file>
+
+<file path=ppt/theme/theme2.xml><?xml version="1.0" encoding="utf-8"?>
+<a:theme xmlns:a="http://schemas.openxmlformats.org/drawingml/2006/main" name="Tema do Office">
+  <a:themeElements>
+    <a:clrScheme name="Office">
+      <a:dk1>
+        <a:sysClr val="windowText" lastClr="000000"/>
+      </a:dk1>
+      <a:lt1>
+        <a:sysClr val="window" lastClr="FFFFFF"/>
+      </a:lt1>
+      <a:dk2>
+        <a:srgbClr val="44546A"/>
+      </a:dk2>
+      <a:lt2>
+        <a:srgbClr val="E7E6E6"/>
+      </a:lt2>
+      <a:accent1>
+        <a:srgbClr val="4472C4"/>
+      </a:accent1>
+      <a:accent2>
+        <a:srgbClr val="ED7D31"/>
+      </a:accent2>
+      <a:accent3>
+        <a:srgbClr val="A5A5A5"/>
+      </a:accent3>
+      <a:accent4>
+        <a:srgbClr val="FFC000"/>
+      </a:accent4>
+      <a:accent5>
+        <a:srgbClr val="5B9BD5"/>
+      </a:accent5>
+      <a:accent6>
+        <a:srgbClr val="70AD47"/>
+      </a:accent6>
+      <a:hlink>
+        <a:srgbClr val="0563C1"/>
+      </a:hlink>
+      <a:folHlink>
+        <a:srgbClr val="954F72"/>
+      </a:folHlink>
+    </a:clrScheme>
+    <a:fontScheme name="Office">
+      <a:majorFont>
+        <a:latin typeface="Calibri Light" panose="020F0302020204030204"/>
+        <a:ea typeface=""/>
+        <a:cs typeface=""/>
+        <a:font script="Jpan" typeface="游ゴシック Light"/>
+        <a:font script="Hang" typeface="맑은 고딕"/>
+        <a:font script="Hans" typeface="等线 Light"/>
+        <a:font script="Hant" typeface="新細明體"/>
+        <a:font script="Arab" typeface="Times New Roman"/>
+        <a:font script="Hebr" typeface="Times New Roman"/>
+        <a:font script="Thai" typeface="Angsana New"/>
+        <a:font script="Ethi" typeface="Nyala"/>
+        <a:font script="Beng" typeface="Vrinda"/>
+        <a:font script="Gujr" typeface="Shruti"/>
+        <a:font script="Khmr" typeface="MoolBoran"/>
+        <a:font script="Knda" typeface="Tunga"/>
+        <a:font script="Guru" typeface="Raavi"/>
+        <a:font script="Cans" typeface="Euphemia"/>
+        <a:font script="Cher" typeface="Plantagenet Cherokee"/>
+        <a:font script="Yiii" typeface="Microsoft Yi Baiti"/>
+        <a:font script="Tibt" typeface="Microsoft Himalaya"/>
+        <a:font script="Thaa" typeface="MV Boli"/>
+        <a:font script="Deva" typeface="Mangal"/>
+        <a:font script="Telu" typeface="Gautami"/>
+        <a:font script="Taml" typeface="Latha"/>
+        <a:font script="Syrc" typeface="Estrangelo Edessa"/>
+        <a:font script="Orya" typeface="Kalinga"/>
+        <a:font script="Mlym" typeface="Kartika"/>
+        <a:font script="Laoo" typeface="DokChampa"/>
+        <a:font script="Sinh" typeface="Iskoola Pota"/>
+        <a:font script="Mong" typeface="Mongolian Baiti"/>
+        <a:font script="Viet" typeface="Times New Roman"/>
+        <a:font script="Uigh" typeface="Microsoft Uighur"/>
+        <a:font script="Geor" typeface="Sylfaen"/>
+        <a:font script="Armn" typeface="Arial"/>
+        <a:font script="Bugi" typeface="Leelawadee UI"/>
+        <a:font script="Bopo" typeface="Microsoft JhengHei"/>
+        <a:font script="Java" typeface="Javanese Text"/>
+        <a:font script="Lisu" typeface="Segoe UI"/>
+        <a:font script="Mymr" typeface="Myanmar Text"/>
+        <a:font script="Nkoo" typeface="Ebrima"/>
+        <a:font script="Olck" typeface="Nirmala UI"/>
+        <a:font script="Osma" typeface="Ebrima"/>
+        <a:font script="Phag" typeface="Phagspa"/>
+        <a:font script="Syrn" typeface="Estrangelo Edessa"/>
+        <a:font script="Syrj" typeface="Estrangelo Edessa"/>
+        <a:font script="Syre" typeface="Estrangelo Edessa"/>
+        <a:font script="Sora" typeface="Nirmala UI"/>
+        <a:font script="Tale" typeface="Microsoft Tai Le"/>
+        <a:font script="Talu" typeface="Microsoft New Tai Lue"/>
+        <a:font script="Tfng" typeface="Ebrima"/>
+      </a:majorFont>
+      <a:minorFont>
+        <a:latin typeface="Calibri" panose="020F0502020204030204"/>
+        <a:ea typeface=""/>
+        <a:cs typeface=""/>
+        <a:font script="Jpan" typeface="游ゴシック"/>
+        <a:font script="Hang" typeface="맑은 고딕"/>
+        <a:font script="Hans" typeface="等线"/>
+        <a:font script="Hant" typeface="新細明體"/>
+        <a:font script="Arab" typeface="Arial"/>
+        <a:font script="Hebr" typeface="Arial"/>
+        <a:font script="Thai" typeface="Cordia New"/>
+        <a:font script="Ethi" typeface="Nyala"/>
+        <a:font script="Beng" typeface="Vrinda"/>
+        <a:font script="Gujr" typeface="Shruti"/>
+        <a:font script="Khmr" typeface="DaunPenh"/>
+        <a:font script="Knda" typeface="Tunga"/>
+        <a:font script="Guru" typeface="Raavi"/>
+        <a:font script="Cans" typeface="Euphemia"/>
+        <a:font script="Cher" typeface="Plantagenet Cherokee"/>
+        <a:font script="Yiii" typeface="Microsoft Yi Baiti"/>
+        <a:font script="Tibt" typeface="Microsoft Himalaya"/>
+        <a:font script="Thaa" typeface="MV Boli"/>
+        <a:font script="Deva" typeface="Mangal"/>
+        <a:font script="Telu" typeface="Gautami"/>
+        <a:font script="Taml" typeface="Latha"/>
+        <a:font script="Syrc" typeface="Estrangelo Edessa"/>
+        <a:font script="Orya" typeface="Kalinga"/>
+        <a:font script="Mlym" typeface="Kartika"/>
+        <a:font script="Laoo" typeface="DokChampa"/>
+        <a:font script="Sinh" typeface="Iskoola Pota"/>
+        <a:font script="Mong" typeface="Mongolian Baiti"/>
+        <a:font script="Viet" typeface="Arial"/>
+        <a:font script="Uigh" typeface="Microsoft Uighur"/>
+        <a:font script="Geor" typeface="Sylfaen"/>
+        <a:font script="Armn" typeface="Arial"/>
+        <a:font script="Bugi" typeface="Leelawadee UI"/>
+        <a:font script="Bopo" typeface="Microsoft JhengHei"/>
+        <a:font script="Java" typeface="Javanese Text"/>
+        <a:font script="Lisu" typeface="Segoe UI"/>
+        <a:font script="Mymr" typeface="Myanmar Text"/>
+        <a:font script="Nkoo" typeface="Ebrima"/>
+        <a:font script="Olck" typeface="Nirmala UI"/>
+        <a:font script="Osma" typeface="Ebrima"/>
+        <a:font script="Phag" typeface="Phagspa"/>
+        <a:font script="Syrn" typeface="Estrangelo Edessa"/>
+        <a:font script="Syrj" typeface="Estrangelo Edessa"/>
+        <a:font script="Syre" typeface="Estrangelo Edessa"/>
+        <a:font script="Sora" typeface="Nirmala UI"/>
+        <a:font script="Tale" typeface="Microsoft Tai Le"/>
+        <a:font script="Talu" typeface="Microsoft New Tai Lue"/>
+        <a:font script="Tfng" typeface="Ebrima"/>
+      </a:minorFont>
+    </a:fontScheme>
+    <a:fmtScheme name="Office">
+      <a:fillStyleLst>
+        <a:solidFill>
+          <a:schemeClr val="phClr"/>
+        </a:solidFill>
+        <a:gradFill rotWithShape="1">
+          <a:gsLst>
+            <a:gs pos="0">
+              <a:schemeClr val="phClr">
+                <a:lumMod val="110000"/>
+                <a:satMod val="105000"/>
+                <a:tint val="67000"/>
+              </a:schemeClr>
+            </a:gs>
+            <a:gs pos="50000">
+              <a:schemeClr val="phClr">
+                <a:lumMod val="105000"/>
+                <a:satMod val="103000"/>
+                <a:tint val="73000"/>
+              </a:schemeClr>
+            </a:gs>
+            <a:gs pos="100000">
+              <a:schemeClr val="phClr">
+                <a:lumMod val="105000"/>
+                <a:satMod val="109000"/>
+                <a:tint val="81000"/>
+              </a:schemeClr>
+            </a:gs>
+          </a:gsLst>
+          <a:lin ang="5400000" scaled="0"/>
+        </a:gradFill>
+        <a:gradFill rotWithShape="1">
+          <a:gsLst>
+            <a:gs pos="0">
+              <a:schemeClr val="phClr">
+                <a:satMod val="103000"/>
+                <a:lumMod val="102000"/>
+                <a:tint val="94000"/>
+              </a:schemeClr>
+            </a:gs>
+            <a:gs pos="50000">
+              <a:schemeClr val="phClr">
+                <a:satMod val="110000"/>
+                <a:lumMod val="100000"/>
+                <a:shade val="100000"/>
+              </a:schemeClr>
+            </a:gs>
+            <a:gs pos="100000">
+              <a:schemeClr val="phClr">
+                <a:lumMod val="99000"/>
+                <a:satMod val="120000"/>
+                <a:shade val="78000"/>
+              </a:schemeClr>
+            </a:gs>
+          </a:gsLst>
+          <a:lin ang="5400000" scaled="0"/>
+        </a:gradFill>
+      </a:fillStyleLst>
+      <a:lnStyleLst>
+        <a:ln w="6350" cap="flat" cmpd="sng" algn="ctr">
+          <a:solidFill>
+            <a:schemeClr val="phClr"/>
+          </a:solidFill>
+          <a:prstDash val="solid"/>
+          <a:miter lim="800000"/>
+        </a:ln>
+        <a:ln w="12700" cap="flat" cmpd="sng" algn="ctr">
+          <a:solidFill>
+            <a:schemeClr val="phClr"/>
+          </a:solidFill>
+          <a:prstDash val="solid"/>
+          <a:miter lim="800000"/>
+        </a:ln>
+        <a:ln w="19050" cap="flat" cmpd="sng" algn="ctr">
+          <a:solidFill>
+            <a:schemeClr val="phClr"/>
+          </a:solidFill>
+          <a:prstDash val="solid"/>
+          <a:miter lim="800000"/>
+        </a:ln>
+      </a:lnStyleLst>
+      <a:effectStyleLst>
+        <a:effectStyle>
+          <a:effectLst/>
+        </a:effectStyle>
+        <a:effectStyle>
+          <a:effectLst/>
+        </a:effectStyle>
+        <a:effectStyle>
+          <a:effectLst>
+            <a:outerShdw blurRad="57150" dist="19050" dir="5400000" algn="ctr" rotWithShape="0">
+              <a:srgbClr val="000000">
+                <a:alpha val="63000"/>
+              </a:srgbClr>
+            </a:outerShdw>
+          </a:effectLst>
+        </a:effectStyle>
+      </a:effectStyleLst>
+      <a:bgFillStyleLst>
+        <a:solidFill>
+          <a:schemeClr val="phClr"/>
+        </a:solidFill>
+        <a:solidFill>
+          <a:schemeClr val="phClr">
+            <a:tint val="95000"/>
+            <a:satMod val="170000"/>
+          </a:schemeClr>
+        </a:solidFill>
+        <a:gradFill rotWithShape="1">
+          <a:gsLst>
+            <a:gs pos="0">
+              <a:schemeClr val="phClr">
+                <a:tint val="93000"/>
+                <a:satMod val="150000"/>
+                <a:shade val="98000"/>
+                <a:lumMod val="102000"/>
+              </a:schemeClr>
+            </a:gs>
+            <a:gs pos="50000">
+              <a:schemeClr val="phClr">
+                <a:tint val="98000"/>
+                <a:satMod val="130000"/>
+                <a:shade val="90000"/>
+                <a:lumMod val="103000"/>
+              </a:schemeClr>
+            </a:gs>
+            <a:gs pos="100000">
+              <a:schemeClr val="phClr">
+                <a:shade val="63000"/>
+                <a:satMod val="120000"/>
+              </a:schemeClr>
+            </a:gs>
+          </a:gsLst>
+          <a:lin ang="5400000" scaled="0"/>
+        </a:gradFill>
+      </a:bgFillStyleLst>
+    </a:fmtScheme>
+  </a:themeElements>
+  <a:objectDefaults/>
+  <a:extraClrSchemeLst/>
+  <a:extLst>
+    <a:ext uri="{05A4C25C-085E-4340-85A3-A5531E510DB2}">
+      <thm15:themeFamily xmlns:thm15="http://schemas.microsoft.com/office/thememl/2012/main" name="Office Theme" id="{62F939B6-93AF-4DB8-9C6B-D6C7DFDC589F}" vid="{4A3C46E8-61CC-4603-A589-7422A47A8E4A}"/>
+    </a:ext>
+  </a:extLst>
+</a:theme>
 </file>
--- a/src/module04/content/Controle-de-Fluxo-em-Java.pptx
+++ b/src/module04/content/Controle-de-Fluxo-em-Java.pptx
@@ -25841,7 +25841,7 @@
         <p:spPr>
           <a:xfrm>
             <a:off x="0" y="0"/>
-            <a:ext cx="9144000" cy="960120"/>
+            <a:ext cx="9144000" cy="756356"/>
           </a:xfrm>
           <a:prstGeom prst="rect">
             <a:avLst/>
@@ -25929,7 +25929,7 @@
         </p:nvSpPr>
         <p:spPr>
           <a:xfrm>
-            <a:off x="310896" y="1115568"/>
+            <a:off x="352044" y="786610"/>
             <a:ext cx="8503920" cy="388620"/>
           </a:xfrm>
           <a:prstGeom prst="rect">
@@ -25979,7 +25979,7 @@
         </p:nvSpPr>
         <p:spPr>
           <a:xfrm>
-            <a:off x="310896" y="1572768"/>
+            <a:off x="352044" y="1049500"/>
             <a:ext cx="8503920" cy="388620"/>
           </a:xfrm>
           <a:prstGeom prst="rect">
@@ -26029,7 +26029,7 @@
         </p:nvSpPr>
         <p:spPr>
           <a:xfrm>
-            <a:off x="310896" y="2029968"/>
+            <a:off x="352044" y="1322564"/>
             <a:ext cx="8503920" cy="388620"/>
           </a:xfrm>
           <a:prstGeom prst="rect">
@@ -26079,7 +26079,7 @@
         </p:nvSpPr>
         <p:spPr>
           <a:xfrm>
-            <a:off x="310896" y="2487168"/>
+            <a:off x="352044" y="1527909"/>
             <a:ext cx="8503920" cy="388620"/>
           </a:xfrm>
           <a:prstGeom prst="rect">
@@ -26129,7 +26129,7 @@
         </p:nvSpPr>
         <p:spPr>
           <a:xfrm>
-            <a:off x="256032" y="2898648"/>
+            <a:off x="315468" y="1972508"/>
             <a:ext cx="8631936" cy="402336"/>
           </a:xfrm>
           <a:prstGeom prst="rect">
@@ -26154,7 +26154,7 @@
         </p:nvSpPr>
         <p:spPr>
           <a:xfrm>
-            <a:off x="420624" y="2935224"/>
+            <a:off x="480060" y="2009084"/>
             <a:ext cx="8375904" cy="374904"/>
           </a:xfrm>
           <a:prstGeom prst="rect">
@@ -26193,7 +26193,7 @@
         </p:nvSpPr>
         <p:spPr>
           <a:xfrm>
-            <a:off x="256032" y="3355848"/>
+            <a:off x="315468" y="2429708"/>
             <a:ext cx="8631936" cy="402336"/>
           </a:xfrm>
           <a:prstGeom prst="rect">
@@ -26218,7 +26218,7 @@
         </p:nvSpPr>
         <p:spPr>
           <a:xfrm>
-            <a:off x="420624" y="3392424"/>
+            <a:off x="480060" y="2466284"/>
             <a:ext cx="8375904" cy="374904"/>
           </a:xfrm>
           <a:prstGeom prst="rect">
@@ -26257,7 +26257,7 @@
         </p:nvSpPr>
         <p:spPr>
           <a:xfrm>
-            <a:off x="256032" y="3813048"/>
+            <a:off x="315468" y="2886908"/>
             <a:ext cx="8631936" cy="402336"/>
           </a:xfrm>
           <a:prstGeom prst="rect">
@@ -26282,7 +26282,7 @@
         </p:nvSpPr>
         <p:spPr>
           <a:xfrm>
-            <a:off x="420624" y="3849624"/>
+            <a:off x="480060" y="2923484"/>
             <a:ext cx="8375904" cy="374904"/>
           </a:xfrm>
           <a:prstGeom prst="rect">
@@ -26321,7 +26321,7 @@
         </p:nvSpPr>
         <p:spPr>
           <a:xfrm>
-            <a:off x="256032" y="4270248"/>
+            <a:off x="315468" y="3344108"/>
             <a:ext cx="8631936" cy="402336"/>
           </a:xfrm>
           <a:prstGeom prst="rect">
@@ -26346,7 +26346,7 @@
         </p:nvSpPr>
         <p:spPr>
           <a:xfrm>
-            <a:off x="420624" y="4306824"/>
+            <a:off x="480060" y="3380684"/>
             <a:ext cx="8375904" cy="374904"/>
           </a:xfrm>
           <a:prstGeom prst="rect">
@@ -26385,7 +26385,7 @@
         </p:nvSpPr>
         <p:spPr>
           <a:xfrm>
-            <a:off x="256032" y="4727448"/>
+            <a:off x="315468" y="3801308"/>
             <a:ext cx="8631936" cy="402336"/>
           </a:xfrm>
           <a:prstGeom prst="rect">
@@ -26410,7 +26410,7 @@
         </p:nvSpPr>
         <p:spPr>
           <a:xfrm>
-            <a:off x="420624" y="4764024"/>
+            <a:off x="480060" y="3837884"/>
             <a:ext cx="8375904" cy="374904"/>
           </a:xfrm>
           <a:prstGeom prst="rect">
@@ -26449,7 +26449,7 @@
         </p:nvSpPr>
         <p:spPr>
           <a:xfrm>
-            <a:off x="256032" y="5184648"/>
+            <a:off x="315468" y="4258508"/>
             <a:ext cx="8631936" cy="402336"/>
           </a:xfrm>
           <a:prstGeom prst="rect">
@@ -26476,7 +26476,7 @@
         </p:nvSpPr>
         <p:spPr>
           <a:xfrm>
-            <a:off x="457200" y="5221224"/>
+            <a:off x="516636" y="4295084"/>
             <a:ext cx="8412480" cy="374904"/>
           </a:xfrm>
           <a:prstGeom prst="rect">
@@ -26565,7 +26565,7 @@
         </p:nvSpPr>
         <p:spPr>
           <a:xfrm>
-            <a:off x="274320" y="4937760"/>
+            <a:off x="274320" y="4928616"/>
             <a:ext cx="5486400" cy="182880"/>
           </a:xfrm>
           <a:prstGeom prst="rect">
@@ -26826,8 +26826,8 @@
         </p:nvSpPr>
         <p:spPr>
           <a:xfrm>
-            <a:off x="256032" y="1911096"/>
-            <a:ext cx="8631936" cy="370149"/>
+            <a:off x="233172" y="1893722"/>
+            <a:ext cx="8631936" cy="3278672"/>
           </a:xfrm>
           <a:prstGeom prst="rect">
             <a:avLst/>
@@ -26852,7 +26852,7 @@
         <p:spPr>
           <a:xfrm>
             <a:off x="420624" y="1947672"/>
-            <a:ext cx="8375904" cy="344912"/>
+            <a:ext cx="8375904" cy="213021"/>
           </a:xfrm>
           <a:prstGeom prst="rect">
             <a:avLst/>
@@ -26884,31 +26884,6 @@
       </p:sp>
       <p:sp>
         <p:nvSpPr>
-          <p:cNvPr id="9" name="Shape 7"/>
-          <p:cNvSpPr/>
-          <p:nvPr/>
-        </p:nvSpPr>
-        <p:spPr>
-          <a:xfrm>
-            <a:off x="256032" y="2331720"/>
-            <a:ext cx="8631936" cy="370149"/>
-          </a:xfrm>
-          <a:prstGeom prst="rect">
-            <a:avLst/>
-          </a:prstGeom>
-          <a:solidFill>
-            <a:srgbClr val="0E0619"/>
-          </a:solidFill>
-          <a:ln w="7620">
-            <a:solidFill>
-              <a:srgbClr val="7C3AED"/>
-            </a:solidFill>
-            <a:prstDash val="solid"/>
-          </a:ln>
-        </p:spPr>
-      </p:sp>
-      <p:sp>
-        <p:nvSpPr>
           <p:cNvPr id="10" name="Text 8"/>
           <p:cNvSpPr/>
           <p:nvPr/>
@@ -26916,7 +26891,7 @@
         <p:spPr>
           <a:xfrm>
             <a:off x="420624" y="2368296"/>
-            <a:ext cx="8375904" cy="344912"/>
+            <a:ext cx="8375904" cy="213021"/>
           </a:xfrm>
           <a:prstGeom prst="rect">
             <a:avLst/>
@@ -26948,39 +26923,14 @@
       </p:sp>
       <p:sp>
         <p:nvSpPr>
-          <p:cNvPr id="11" name="Shape 9"/>
-          <p:cNvSpPr/>
-          <p:nvPr/>
-        </p:nvSpPr>
-        <p:spPr>
-          <a:xfrm>
-            <a:off x="256032" y="2752344"/>
-            <a:ext cx="8631936" cy="370149"/>
-          </a:xfrm>
-          <a:prstGeom prst="rect">
-            <a:avLst/>
-          </a:prstGeom>
-          <a:solidFill>
-            <a:srgbClr val="0E0619"/>
-          </a:solidFill>
-          <a:ln w="7620">
-            <a:solidFill>
-              <a:srgbClr val="7C3AED"/>
-            </a:solidFill>
-            <a:prstDash val="solid"/>
-          </a:ln>
-        </p:spPr>
-      </p:sp>
-      <p:sp>
-        <p:nvSpPr>
           <p:cNvPr id="12" name="Text 10"/>
           <p:cNvSpPr/>
           <p:nvPr/>
         </p:nvSpPr>
         <p:spPr>
           <a:xfrm>
-            <a:off x="420624" y="2788920"/>
-            <a:ext cx="8375904" cy="344912"/>
+            <a:off x="420624" y="2575899"/>
+            <a:ext cx="8375904" cy="213021"/>
           </a:xfrm>
           <a:prstGeom prst="rect">
             <a:avLst/>
@@ -27012,39 +26962,14 @@
       </p:sp>
       <p:sp>
         <p:nvSpPr>
-          <p:cNvPr id="13" name="Shape 11"/>
-          <p:cNvSpPr/>
-          <p:nvPr/>
-        </p:nvSpPr>
-        <p:spPr>
-          <a:xfrm>
-            <a:off x="256032" y="3172968"/>
-            <a:ext cx="8631936" cy="370149"/>
-          </a:xfrm>
-          <a:prstGeom prst="rect">
-            <a:avLst/>
-          </a:prstGeom>
-          <a:solidFill>
-            <a:srgbClr val="0E0619"/>
-          </a:solidFill>
-          <a:ln w="7620">
-            <a:solidFill>
-              <a:srgbClr val="7C3AED"/>
-            </a:solidFill>
-            <a:prstDash val="solid"/>
-          </a:ln>
-        </p:spPr>
-      </p:sp>
-      <p:sp>
-        <p:nvSpPr>
           <p:cNvPr id="14" name="Text 12"/>
           <p:cNvSpPr/>
           <p:nvPr/>
         </p:nvSpPr>
         <p:spPr>
           <a:xfrm>
-            <a:off x="420624" y="3209544"/>
-            <a:ext cx="8375904" cy="344912"/>
+            <a:off x="420624" y="2996523"/>
+            <a:ext cx="8375904" cy="213021"/>
           </a:xfrm>
           <a:prstGeom prst="rect">
             <a:avLst/>
@@ -27076,39 +27001,14 @@
       </p:sp>
       <p:sp>
         <p:nvSpPr>
-          <p:cNvPr id="15" name="Shape 13"/>
-          <p:cNvSpPr/>
-          <p:nvPr/>
-        </p:nvSpPr>
-        <p:spPr>
-          <a:xfrm>
-            <a:off x="256032" y="3593592"/>
-            <a:ext cx="8631936" cy="370149"/>
-          </a:xfrm>
-          <a:prstGeom prst="rect">
-            <a:avLst/>
-          </a:prstGeom>
-          <a:solidFill>
-            <a:srgbClr val="0E0619"/>
-          </a:solidFill>
-          <a:ln w="7620">
-            <a:solidFill>
-              <a:srgbClr val="7C3AED"/>
-            </a:solidFill>
-            <a:prstDash val="solid"/>
-          </a:ln>
-        </p:spPr>
-      </p:sp>
-      <p:sp>
-        <p:nvSpPr>
           <p:cNvPr id="16" name="Text 14"/>
           <p:cNvSpPr/>
           <p:nvPr/>
         </p:nvSpPr>
         <p:spPr>
           <a:xfrm>
-            <a:off x="420624" y="3630168"/>
-            <a:ext cx="8375904" cy="344912"/>
+            <a:off x="420624" y="3417147"/>
+            <a:ext cx="8375904" cy="213021"/>
           </a:xfrm>
           <a:prstGeom prst="rect">
             <a:avLst/>
@@ -27140,39 +27040,14 @@
       </p:sp>
       <p:sp>
         <p:nvSpPr>
-          <p:cNvPr id="17" name="Shape 15"/>
-          <p:cNvSpPr/>
-          <p:nvPr/>
-        </p:nvSpPr>
-        <p:spPr>
-          <a:xfrm>
-            <a:off x="256032" y="4014216"/>
-            <a:ext cx="8631936" cy="370149"/>
-          </a:xfrm>
-          <a:prstGeom prst="rect">
-            <a:avLst/>
-          </a:prstGeom>
-          <a:solidFill>
-            <a:srgbClr val="0E0619"/>
-          </a:solidFill>
-          <a:ln w="7620">
-            <a:solidFill>
-              <a:srgbClr val="7C3AED"/>
-            </a:solidFill>
-            <a:prstDash val="solid"/>
-          </a:ln>
-        </p:spPr>
-      </p:sp>
-      <p:sp>
-        <p:nvSpPr>
           <p:cNvPr id="18" name="Text 16"/>
           <p:cNvSpPr/>
           <p:nvPr/>
         </p:nvSpPr>
         <p:spPr>
           <a:xfrm>
-            <a:off x="420624" y="4050792"/>
-            <a:ext cx="8375904" cy="344912"/>
+            <a:off x="420624" y="3679038"/>
+            <a:ext cx="8375904" cy="213021"/>
           </a:xfrm>
           <a:prstGeom prst="rect">
             <a:avLst/>
@@ -27204,39 +27079,14 @@
       </p:sp>
       <p:sp>
         <p:nvSpPr>
-          <p:cNvPr id="19" name="Shape 17"/>
-          <p:cNvSpPr/>
-          <p:nvPr/>
-        </p:nvSpPr>
-        <p:spPr>
-          <a:xfrm>
-            <a:off x="256032" y="4434840"/>
-            <a:ext cx="8631936" cy="370149"/>
-          </a:xfrm>
-          <a:prstGeom prst="rect">
-            <a:avLst/>
-          </a:prstGeom>
-          <a:solidFill>
-            <a:srgbClr val="0E0619"/>
-          </a:solidFill>
-          <a:ln w="7620">
-            <a:solidFill>
-              <a:srgbClr val="7C3AED"/>
-            </a:solidFill>
-            <a:prstDash val="solid"/>
-          </a:ln>
-        </p:spPr>
-      </p:sp>
-      <p:sp>
-        <p:nvSpPr>
           <p:cNvPr id="20" name="Text 18"/>
           <p:cNvSpPr/>
           <p:nvPr/>
         </p:nvSpPr>
         <p:spPr>
           <a:xfrm>
-            <a:off x="420624" y="4471416"/>
-            <a:ext cx="8375904" cy="344912"/>
+            <a:off x="420624" y="4008809"/>
+            <a:ext cx="8375904" cy="213021"/>
           </a:xfrm>
           <a:prstGeom prst="rect">
             <a:avLst/>
@@ -27268,39 +27118,14 @@
       </p:sp>
       <p:sp>
         <p:nvSpPr>
-          <p:cNvPr id="21" name="Shape 19"/>
-          <p:cNvSpPr/>
-          <p:nvPr/>
-        </p:nvSpPr>
-        <p:spPr>
-          <a:xfrm>
-            <a:off x="256032" y="4855464"/>
-            <a:ext cx="8631936" cy="370149"/>
-          </a:xfrm>
-          <a:prstGeom prst="rect">
-            <a:avLst/>
-          </a:prstGeom>
-          <a:solidFill>
-            <a:srgbClr val="0E0619"/>
-          </a:solidFill>
-          <a:ln w="7620">
-            <a:solidFill>
-              <a:srgbClr val="7C3AED"/>
-            </a:solidFill>
-            <a:prstDash val="solid"/>
-          </a:ln>
-        </p:spPr>
-      </p:sp>
-      <p:sp>
-        <p:nvSpPr>
           <p:cNvPr id="22" name="Text 20"/>
           <p:cNvSpPr/>
           <p:nvPr/>
         </p:nvSpPr>
         <p:spPr>
           <a:xfrm>
-            <a:off x="420624" y="4892040"/>
-            <a:ext cx="8375904" cy="344912"/>
+            <a:off x="420624" y="4214492"/>
+            <a:ext cx="8375904" cy="213021"/>
           </a:xfrm>
           <a:prstGeom prst="rect">
             <a:avLst/>
@@ -27332,39 +27157,14 @@
       </p:sp>
       <p:sp>
         <p:nvSpPr>
-          <p:cNvPr id="23" name="Shape 21"/>
-          <p:cNvSpPr/>
-          <p:nvPr/>
-        </p:nvSpPr>
-        <p:spPr>
-          <a:xfrm>
-            <a:off x="256032" y="5276088"/>
-            <a:ext cx="8631936" cy="370149"/>
-          </a:xfrm>
-          <a:prstGeom prst="rect">
-            <a:avLst/>
-          </a:prstGeom>
-          <a:solidFill>
-            <a:srgbClr val="0E0619"/>
-          </a:solidFill>
-          <a:ln w="7620">
-            <a:solidFill>
-              <a:srgbClr val="7C3AED"/>
-            </a:solidFill>
-            <a:prstDash val="solid"/>
-          </a:ln>
-        </p:spPr>
-      </p:sp>
-      <p:sp>
-        <p:nvSpPr>
           <p:cNvPr id="24" name="Text 22"/>
           <p:cNvSpPr/>
           <p:nvPr/>
         </p:nvSpPr>
         <p:spPr>
           <a:xfrm>
-            <a:off x="420624" y="5312664"/>
-            <a:ext cx="8375904" cy="344912"/>
+            <a:off x="457200" y="4448714"/>
+            <a:ext cx="8375904" cy="213021"/>
           </a:xfrm>
           <a:prstGeom prst="rect">
             <a:avLst/>
@@ -27396,39 +27196,14 @@
       </p:sp>
       <p:sp>
         <p:nvSpPr>
-          <p:cNvPr id="25" name="Shape 23"/>
-          <p:cNvSpPr/>
-          <p:nvPr/>
-        </p:nvSpPr>
-        <p:spPr>
-          <a:xfrm>
-            <a:off x="256032" y="5696712"/>
-            <a:ext cx="8631936" cy="370149"/>
-          </a:xfrm>
-          <a:prstGeom prst="rect">
-            <a:avLst/>
-          </a:prstGeom>
-          <a:solidFill>
-            <a:srgbClr val="0E0619"/>
-          </a:solidFill>
-          <a:ln w="7620">
-            <a:solidFill>
-              <a:srgbClr val="7C3AED"/>
-            </a:solidFill>
-            <a:prstDash val="solid"/>
-          </a:ln>
-        </p:spPr>
-      </p:sp>
-      <p:sp>
-        <p:nvSpPr>
           <p:cNvPr id="26" name="Text 24"/>
           <p:cNvSpPr/>
           <p:nvPr/>
         </p:nvSpPr>
         <p:spPr>
           <a:xfrm>
-            <a:off x="420624" y="5733288"/>
-            <a:ext cx="8375904" cy="344912"/>
+            <a:off x="448056" y="4697482"/>
+            <a:ext cx="8375904" cy="213021"/>
           </a:xfrm>
           <a:prstGeom prst="rect">
             <a:avLst/>
@@ -27460,39 +27235,14 @@
       </p:sp>
       <p:sp>
         <p:nvSpPr>
-          <p:cNvPr id="27" name="Shape 25"/>
-          <p:cNvSpPr/>
-          <p:nvPr/>
-        </p:nvSpPr>
-        <p:spPr>
-          <a:xfrm>
-            <a:off x="256032" y="6117336"/>
-            <a:ext cx="8631936" cy="370149"/>
-          </a:xfrm>
-          <a:prstGeom prst="rect">
-            <a:avLst/>
-          </a:prstGeom>
-          <a:solidFill>
-            <a:srgbClr val="0E0619"/>
-          </a:solidFill>
-          <a:ln w="7620">
-            <a:solidFill>
-              <a:srgbClr val="7C3AED"/>
-            </a:solidFill>
-            <a:prstDash val="solid"/>
-          </a:ln>
-        </p:spPr>
-      </p:sp>
-      <p:sp>
-        <p:nvSpPr>
           <p:cNvPr id="28" name="Text 26"/>
           <p:cNvSpPr/>
           <p:nvPr/>
         </p:nvSpPr>
         <p:spPr>
           <a:xfrm>
-            <a:off x="420624" y="6153912"/>
-            <a:ext cx="8375904" cy="344912"/>
+            <a:off x="448056" y="4959373"/>
+            <a:ext cx="8375904" cy="213021"/>
           </a:xfrm>
           <a:prstGeom prst="rect">
             <a:avLst/>
@@ -27519,95 +27269,6 @@
               <a:t>if (min != Double.MAX_VALUE) System.out.println("Min: " + min + " Max: " + max);</a:t>
             </a:r>
             <a:endParaRPr lang="en-US" sz="1300" dirty="0"/>
-          </a:p>
-        </p:txBody>
-      </p:sp>
-      <p:sp>
-        <p:nvSpPr>
-          <p:cNvPr id="29" name="Shape 27"/>
-          <p:cNvSpPr/>
-          <p:nvPr/>
-        </p:nvSpPr>
-        <p:spPr>
-          <a:xfrm>
-            <a:off x="0" y="4919472"/>
-            <a:ext cx="9144000" cy="224028"/>
-          </a:xfrm>
-          <a:prstGeom prst="rect">
-            <a:avLst/>
-          </a:prstGeom>
-          <a:solidFill>
-            <a:srgbClr val="12091E"/>
-          </a:solidFill>
-          <a:ln w="12700">
-            <a:solidFill>
-              <a:srgbClr val="12091E"/>
-            </a:solidFill>
-            <a:prstDash val="solid"/>
-          </a:ln>
-        </p:spPr>
-      </p:sp>
-      <p:sp>
-        <p:nvSpPr>
-          <p:cNvPr id="30" name="Shape 28"/>
-          <p:cNvSpPr/>
-          <p:nvPr/>
-        </p:nvSpPr>
-        <p:spPr>
-          <a:xfrm>
-            <a:off x="0" y="4919472"/>
-            <a:ext cx="64008" cy="224028"/>
-          </a:xfrm>
-          <a:prstGeom prst="rect">
-            <a:avLst/>
-          </a:prstGeom>
-          <a:solidFill>
-            <a:srgbClr val="7C3AED"/>
-          </a:solidFill>
-          <a:ln w="12700">
-            <a:solidFill>
-              <a:srgbClr val="7C3AED"/>
-            </a:solidFill>
-            <a:prstDash val="solid"/>
-          </a:ln>
-        </p:spPr>
-      </p:sp>
-      <p:sp>
-        <p:nvSpPr>
-          <p:cNvPr id="31" name="Text 29"/>
-          <p:cNvSpPr/>
-          <p:nvPr/>
-        </p:nvSpPr>
-        <p:spPr>
-          <a:xfrm>
-            <a:off x="274320" y="4937760"/>
-            <a:ext cx="5486400" cy="182880"/>
-          </a:xfrm>
-          <a:prstGeom prst="rect">
-            <a:avLst/>
-          </a:prstGeom>
-          <a:noFill/>
-          <a:ln/>
-        </p:spPr>
-        <p:txBody>
-          <a:bodyPr wrap="square" lIns="0" tIns="0" rIns="0" bIns="0" rtlCol="0" anchor="ctr"/>
-          <a:lstStyle/>
-          <a:p>
-            <a:pPr marL="0" indent="0">
-              <a:buNone/>
-            </a:pPr>
-            <a:r>
-              <a:rPr lang="en-US" sz="900" dirty="0">
-                <a:solidFill>
-                  <a:srgbClr val="CBD5E1"/>
-                </a:solidFill>
-                <a:latin typeface="Calibri" pitchFamily="34" charset="0"/>
-                <a:ea typeface="Calibri" pitchFamily="34" charset="-122"/>
-                <a:cs typeface="Calibri" pitchFamily="34" charset="-120"/>
-              </a:rPr>
-              <a:t>Controle de Fluxo em Java</a:t>
-            </a:r>
-            <a:endParaRPr lang="en-US" sz="900" dirty="0"/>
           </a:p>
         </p:txBody>
       </p:sp>
